--- a/Agentic时代_从AI使用者到AI架构师.pptx
+++ b/Agentic时代_从AI使用者到AI架构师.pptx
@@ -1028,7 +1028,13 @@
       </p:grpSpPr>
       <p:grpSp>
         <p:nvGrpSpPr>
-          <p:cNvPr id="5" name="Group 5"/>
+          <p:cNvPr id="72" name="Group 5">
+            <a:extLst>
+              <a:ext uri="{FF2B5EF4-FFF2-40B4-BE49-F238E27FC236}">
+                <a16:creationId xmlns:a16="http://schemas.microsoft.com/office/drawing/2014/main" id="{9E9CF4B9-5932-575F-8BD8-134746775175}"/>
+              </a:ext>
+            </a:extLst>
+          </p:cNvPr>
           <p:cNvGrpSpPr/>
           <p:nvPr/>
         </p:nvGrpSpPr>
@@ -1042,7 +1048,13 @@
         </p:grpSpPr>
         <p:sp>
           <p:nvSpPr>
-            <p:cNvPr id="2" name="TextBox 2"/>
+            <p:cNvPr id="73" name="TextBox 2">
+              <a:extLst>
+                <a:ext uri="{FF2B5EF4-FFF2-40B4-BE49-F238E27FC236}">
+                  <a16:creationId xmlns:a16="http://schemas.microsoft.com/office/drawing/2014/main" id="{55056D7B-00E4-CDDB-A9B3-40598BA93223}"/>
+                </a:ext>
+              </a:extLst>
+            </p:cNvPr>
             <p:cNvSpPr txBox="1"/>
             <p:nvPr/>
           </p:nvSpPr>
@@ -1082,7 +1094,13 @@
         </p:sp>
         <p:sp>
           <p:nvSpPr>
-            <p:cNvPr id="3" name="TextBox 3"/>
+            <p:cNvPr id="74" name="TextBox 3">
+              <a:extLst>
+                <a:ext uri="{FF2B5EF4-FFF2-40B4-BE49-F238E27FC236}">
+                  <a16:creationId xmlns:a16="http://schemas.microsoft.com/office/drawing/2014/main" id="{D184A9A1-3C81-C653-8D8E-89B35D5001C8}"/>
+                </a:ext>
+              </a:extLst>
+            </p:cNvPr>
             <p:cNvSpPr txBox="1"/>
             <p:nvPr/>
           </p:nvSpPr>
@@ -1122,7 +1140,13 @@
         </p:sp>
         <p:sp>
           <p:nvSpPr>
-            <p:cNvPr id="4" name="Rectangle 4"/>
+            <p:cNvPr id="75" name="Rectangle 4">
+              <a:extLst>
+                <a:ext uri="{FF2B5EF4-FFF2-40B4-BE49-F238E27FC236}">
+                  <a16:creationId xmlns:a16="http://schemas.microsoft.com/office/drawing/2014/main" id="{AF448A42-9ECE-BF0B-0D59-24C2B81FC763}"/>
+                </a:ext>
+              </a:extLst>
+            </p:cNvPr>
             <p:cNvSpPr/>
             <p:nvPr/>
           </p:nvSpPr>
@@ -1145,7 +1169,13 @@
       </p:grpSp>
       <p:grpSp>
         <p:nvGrpSpPr>
-          <p:cNvPr id="32" name="Group 32"/>
+          <p:cNvPr id="76" name="Group 32">
+            <a:extLst>
+              <a:ext uri="{FF2B5EF4-FFF2-40B4-BE49-F238E27FC236}">
+                <a16:creationId xmlns:a16="http://schemas.microsoft.com/office/drawing/2014/main" id="{C4135E30-0FF6-F199-1562-49D5D541BAC8}"/>
+              </a:ext>
+            </a:extLst>
+          </p:cNvPr>
           <p:cNvGrpSpPr/>
           <p:nvPr/>
         </p:nvGrpSpPr>
@@ -1159,7 +1189,13 @@
         </p:grpSpPr>
         <p:sp>
           <p:nvSpPr>
-            <p:cNvPr id="6" name="Rectangle 6"/>
+            <p:cNvPr id="77" name="Rectangle 6">
+              <a:extLst>
+                <a:ext uri="{FF2B5EF4-FFF2-40B4-BE49-F238E27FC236}">
+                  <a16:creationId xmlns:a16="http://schemas.microsoft.com/office/drawing/2014/main" id="{CB96BE34-16F3-56AB-550E-6B3F63346E75}"/>
+                </a:ext>
+              </a:extLst>
+            </p:cNvPr>
             <p:cNvSpPr/>
             <p:nvPr/>
           </p:nvSpPr>
@@ -1185,7 +1221,13 @@
         </p:sp>
         <p:sp>
           <p:nvSpPr>
-            <p:cNvPr id="7" name="TextBox 7"/>
+            <p:cNvPr id="78" name="TextBox 7">
+              <a:extLst>
+                <a:ext uri="{FF2B5EF4-FFF2-40B4-BE49-F238E27FC236}">
+                  <a16:creationId xmlns:a16="http://schemas.microsoft.com/office/drawing/2014/main" id="{06BF4809-5A1B-DEF2-0C28-FFE9FA12364D}"/>
+                </a:ext>
+              </a:extLst>
+            </p:cNvPr>
             <p:cNvSpPr txBox="1"/>
             <p:nvPr/>
           </p:nvSpPr>
@@ -1225,7 +1267,13 @@
         </p:sp>
         <p:sp>
           <p:nvSpPr>
-            <p:cNvPr id="8" name="Rectangle 8"/>
+            <p:cNvPr id="79" name="Rectangle 8">
+              <a:extLst>
+                <a:ext uri="{FF2B5EF4-FFF2-40B4-BE49-F238E27FC236}">
+                  <a16:creationId xmlns:a16="http://schemas.microsoft.com/office/drawing/2014/main" id="{913D470C-B631-C59D-059A-9F9ABD10ED98}"/>
+                </a:ext>
+              </a:extLst>
+            </p:cNvPr>
             <p:cNvSpPr/>
             <p:nvPr/>
           </p:nvSpPr>
@@ -1251,7 +1299,13 @@
         </p:sp>
         <p:sp>
           <p:nvSpPr>
-            <p:cNvPr id="9" name="Rectangle 9"/>
+            <p:cNvPr id="80" name="Rectangle 9">
+              <a:extLst>
+                <a:ext uri="{FF2B5EF4-FFF2-40B4-BE49-F238E27FC236}">
+                  <a16:creationId xmlns:a16="http://schemas.microsoft.com/office/drawing/2014/main" id="{8AB985A2-3B64-8217-C73E-8B1FA0B350EC}"/>
+                </a:ext>
+              </a:extLst>
+            </p:cNvPr>
             <p:cNvSpPr/>
             <p:nvPr/>
           </p:nvSpPr>
@@ -1273,7 +1327,13 @@
         </p:sp>
         <p:sp>
           <p:nvSpPr>
-            <p:cNvPr id="10" name="TextBox 10"/>
+            <p:cNvPr id="81" name="TextBox 10">
+              <a:extLst>
+                <a:ext uri="{FF2B5EF4-FFF2-40B4-BE49-F238E27FC236}">
+                  <a16:creationId xmlns:a16="http://schemas.microsoft.com/office/drawing/2014/main" id="{FE830A02-8A5A-0FB6-01B0-72514DD000E1}"/>
+                </a:ext>
+              </a:extLst>
+            </p:cNvPr>
             <p:cNvSpPr txBox="1"/>
             <p:nvPr/>
           </p:nvSpPr>
@@ -1313,7 +1373,13 @@
         </p:sp>
         <p:sp>
           <p:nvSpPr>
-            <p:cNvPr id="11" name="TextBox 11"/>
+            <p:cNvPr id="82" name="TextBox 11">
+              <a:extLst>
+                <a:ext uri="{FF2B5EF4-FFF2-40B4-BE49-F238E27FC236}">
+                  <a16:creationId xmlns:a16="http://schemas.microsoft.com/office/drawing/2014/main" id="{C01D3BFA-78AB-31E2-4C62-60D80915720B}"/>
+                </a:ext>
+              </a:extLst>
+            </p:cNvPr>
             <p:cNvSpPr txBox="1"/>
             <p:nvPr/>
           </p:nvSpPr>
@@ -1353,7 +1419,13 @@
         </p:sp>
         <p:sp>
           <p:nvSpPr>
-            <p:cNvPr id="12" name="TextBox 12"/>
+            <p:cNvPr id="83" name="TextBox 12">
+              <a:extLst>
+                <a:ext uri="{FF2B5EF4-FFF2-40B4-BE49-F238E27FC236}">
+                  <a16:creationId xmlns:a16="http://schemas.microsoft.com/office/drawing/2014/main" id="{48613776-075B-EEAA-2445-90D67E30A4B5}"/>
+                </a:ext>
+              </a:extLst>
+            </p:cNvPr>
             <p:cNvSpPr txBox="1"/>
             <p:nvPr/>
           </p:nvSpPr>
@@ -1393,7 +1465,13 @@
         </p:sp>
         <p:sp>
           <p:nvSpPr>
-            <p:cNvPr id="13" name="TextBox 13"/>
+            <p:cNvPr id="84" name="TextBox 13">
+              <a:extLst>
+                <a:ext uri="{FF2B5EF4-FFF2-40B4-BE49-F238E27FC236}">
+                  <a16:creationId xmlns:a16="http://schemas.microsoft.com/office/drawing/2014/main" id="{8D3F5832-6BE5-DD8B-E8B6-101978B1C9E5}"/>
+                </a:ext>
+              </a:extLst>
+            </p:cNvPr>
             <p:cNvSpPr txBox="1"/>
             <p:nvPr/>
           </p:nvSpPr>
@@ -1433,7 +1511,13 @@
         </p:sp>
         <p:sp>
           <p:nvSpPr>
-            <p:cNvPr id="14" name="TextBox 14"/>
+            <p:cNvPr id="85" name="TextBox 14">
+              <a:extLst>
+                <a:ext uri="{FF2B5EF4-FFF2-40B4-BE49-F238E27FC236}">
+                  <a16:creationId xmlns:a16="http://schemas.microsoft.com/office/drawing/2014/main" id="{E5FDECFC-C759-0C94-AD24-0DD4A662CE0E}"/>
+                </a:ext>
+              </a:extLst>
+            </p:cNvPr>
             <p:cNvSpPr txBox="1"/>
             <p:nvPr/>
           </p:nvSpPr>
@@ -1473,7 +1557,13 @@
         </p:sp>
         <p:sp>
           <p:nvSpPr>
-            <p:cNvPr id="15" name="Rectangle 15"/>
+            <p:cNvPr id="86" name="Rectangle 15">
+              <a:extLst>
+                <a:ext uri="{FF2B5EF4-FFF2-40B4-BE49-F238E27FC236}">
+                  <a16:creationId xmlns:a16="http://schemas.microsoft.com/office/drawing/2014/main" id="{D45B6E36-12FA-5115-2270-71FB725F0DA2}"/>
+                </a:ext>
+              </a:extLst>
+            </p:cNvPr>
             <p:cNvSpPr/>
             <p:nvPr/>
           </p:nvSpPr>
@@ -1499,7 +1589,13 @@
         </p:sp>
         <p:sp>
           <p:nvSpPr>
-            <p:cNvPr id="16" name="Rectangle 16"/>
+            <p:cNvPr id="87" name="Rectangle 16">
+              <a:extLst>
+                <a:ext uri="{FF2B5EF4-FFF2-40B4-BE49-F238E27FC236}">
+                  <a16:creationId xmlns:a16="http://schemas.microsoft.com/office/drawing/2014/main" id="{EFDB05CB-5476-D9FA-8C95-7F29256A90C3}"/>
+                </a:ext>
+              </a:extLst>
+            </p:cNvPr>
             <p:cNvSpPr/>
             <p:nvPr/>
           </p:nvSpPr>
@@ -1521,7 +1617,13 @@
         </p:sp>
         <p:sp>
           <p:nvSpPr>
-            <p:cNvPr id="17" name="TextBox 17"/>
+            <p:cNvPr id="88" name="TextBox 17">
+              <a:extLst>
+                <a:ext uri="{FF2B5EF4-FFF2-40B4-BE49-F238E27FC236}">
+                  <a16:creationId xmlns:a16="http://schemas.microsoft.com/office/drawing/2014/main" id="{ED61459D-3BA1-3210-8C73-33A3F86F0A40}"/>
+                </a:ext>
+              </a:extLst>
+            </p:cNvPr>
             <p:cNvSpPr txBox="1"/>
             <p:nvPr/>
           </p:nvSpPr>
@@ -1561,7 +1663,13 @@
         </p:sp>
         <p:sp>
           <p:nvSpPr>
-            <p:cNvPr id="18" name="TextBox 18"/>
+            <p:cNvPr id="89" name="TextBox 18">
+              <a:extLst>
+                <a:ext uri="{FF2B5EF4-FFF2-40B4-BE49-F238E27FC236}">
+                  <a16:creationId xmlns:a16="http://schemas.microsoft.com/office/drawing/2014/main" id="{644B2EAD-D8F0-E9F5-9E4F-C23A7368AF04}"/>
+                </a:ext>
+              </a:extLst>
+            </p:cNvPr>
             <p:cNvSpPr txBox="1"/>
             <p:nvPr/>
           </p:nvSpPr>
@@ -1601,7 +1709,13 @@
         </p:sp>
         <p:sp>
           <p:nvSpPr>
-            <p:cNvPr id="19" name="TextBox 19"/>
+            <p:cNvPr id="90" name="TextBox 19">
+              <a:extLst>
+                <a:ext uri="{FF2B5EF4-FFF2-40B4-BE49-F238E27FC236}">
+                  <a16:creationId xmlns:a16="http://schemas.microsoft.com/office/drawing/2014/main" id="{76D45223-A077-7337-3E45-40760C47AA97}"/>
+                </a:ext>
+              </a:extLst>
+            </p:cNvPr>
             <p:cNvSpPr txBox="1"/>
             <p:nvPr/>
           </p:nvSpPr>
@@ -1641,14 +1755,20 @@
         </p:sp>
         <p:sp>
           <p:nvSpPr>
-            <p:cNvPr id="20" name="TextBox 20"/>
-            <p:cNvSpPr txBox="1"/>
-            <p:nvPr/>
-          </p:nvSpPr>
-          <p:spPr>
-            <a:xfrm>
-              <a:off x="5178392" y="3808095"/>
-              <a:ext cx="1835216" cy="176212"/>
+            <p:cNvPr id="91" name="TextBox 20">
+              <a:extLst>
+                <a:ext uri="{FF2B5EF4-FFF2-40B4-BE49-F238E27FC236}">
+                  <a16:creationId xmlns:a16="http://schemas.microsoft.com/office/drawing/2014/main" id="{67D9E86E-3744-3A9E-ACC9-82EE2C05F65F}"/>
+                </a:ext>
+              </a:extLst>
+            </p:cNvPr>
+            <p:cNvSpPr txBox="1"/>
+            <p:nvPr/>
+          </p:nvSpPr>
+          <p:spPr>
+            <a:xfrm>
+              <a:off x="5243132" y="3808095"/>
+              <a:ext cx="1705737" cy="176212"/>
             </a:xfrm>
             <a:prstGeom prst="rect">
               <a:avLst/>
@@ -1674,14 +1794,20 @@
                   <a:ea typeface="Microsoft YaHei"/>
                   <a:cs typeface="Arial"/>
                 </a:rPr>
-                <a:t>美区 base 中位 ≈ $185K（2026）</a:t>
-              </a:r>
-            </a:p>
-          </p:txBody>
-        </p:sp>
-        <p:sp>
-          <p:nvSpPr>
-            <p:cNvPr id="21" name="TextBox 21"/>
+                <a:t>美区交付高薪赛道（量级参考）</a:t>
+              </a:r>
+            </a:p>
+          </p:txBody>
+        </p:sp>
+        <p:sp>
+          <p:nvSpPr>
+            <p:cNvPr id="92" name="TextBox 21">
+              <a:extLst>
+                <a:ext uri="{FF2B5EF4-FFF2-40B4-BE49-F238E27FC236}">
+                  <a16:creationId xmlns:a16="http://schemas.microsoft.com/office/drawing/2014/main" id="{FD97C2B9-4CAC-ED25-D3D5-7597A145C200}"/>
+                </a:ext>
+              </a:extLst>
+            </p:cNvPr>
             <p:cNvSpPr txBox="1"/>
             <p:nvPr/>
           </p:nvSpPr>
@@ -1721,7 +1847,13 @@
         </p:sp>
         <p:sp>
           <p:nvSpPr>
-            <p:cNvPr id="22" name="Rectangle 22"/>
+            <p:cNvPr id="93" name="Rectangle 22">
+              <a:extLst>
+                <a:ext uri="{FF2B5EF4-FFF2-40B4-BE49-F238E27FC236}">
+                  <a16:creationId xmlns:a16="http://schemas.microsoft.com/office/drawing/2014/main" id="{E71CB1FF-F290-0D32-5993-559241C0D2B4}"/>
+                </a:ext>
+              </a:extLst>
+            </p:cNvPr>
             <p:cNvSpPr/>
             <p:nvPr/>
           </p:nvSpPr>
@@ -1747,7 +1879,13 @@
         </p:sp>
         <p:sp>
           <p:nvSpPr>
-            <p:cNvPr id="23" name="Rectangle 23"/>
+            <p:cNvPr id="94" name="Rectangle 23">
+              <a:extLst>
+                <a:ext uri="{FF2B5EF4-FFF2-40B4-BE49-F238E27FC236}">
+                  <a16:creationId xmlns:a16="http://schemas.microsoft.com/office/drawing/2014/main" id="{D88BEC9B-2FD6-882B-D471-BD4AA1AE8F65}"/>
+                </a:ext>
+              </a:extLst>
+            </p:cNvPr>
             <p:cNvSpPr/>
             <p:nvPr/>
           </p:nvSpPr>
@@ -1769,7 +1907,13 @@
         </p:sp>
         <p:sp>
           <p:nvSpPr>
-            <p:cNvPr id="24" name="TextBox 24"/>
+            <p:cNvPr id="95" name="TextBox 24">
+              <a:extLst>
+                <a:ext uri="{FF2B5EF4-FFF2-40B4-BE49-F238E27FC236}">
+                  <a16:creationId xmlns:a16="http://schemas.microsoft.com/office/drawing/2014/main" id="{7685D286-02F4-FCCA-9F08-180683C1EB93}"/>
+                </a:ext>
+              </a:extLst>
+            </p:cNvPr>
             <p:cNvSpPr txBox="1"/>
             <p:nvPr/>
           </p:nvSpPr>
@@ -1809,7 +1953,13 @@
         </p:sp>
         <p:sp>
           <p:nvSpPr>
-            <p:cNvPr id="25" name="TextBox 25"/>
+            <p:cNvPr id="96" name="TextBox 25">
+              <a:extLst>
+                <a:ext uri="{FF2B5EF4-FFF2-40B4-BE49-F238E27FC236}">
+                  <a16:creationId xmlns:a16="http://schemas.microsoft.com/office/drawing/2014/main" id="{AE1EC8F7-C218-2E6E-970B-E150A883E831}"/>
+                </a:ext>
+              </a:extLst>
+            </p:cNvPr>
             <p:cNvSpPr txBox="1"/>
             <p:nvPr/>
           </p:nvSpPr>
@@ -1849,7 +1999,13 @@
         </p:sp>
         <p:sp>
           <p:nvSpPr>
-            <p:cNvPr id="26" name="TextBox 26"/>
+            <p:cNvPr id="97" name="TextBox 26">
+              <a:extLst>
+                <a:ext uri="{FF2B5EF4-FFF2-40B4-BE49-F238E27FC236}">
+                  <a16:creationId xmlns:a16="http://schemas.microsoft.com/office/drawing/2014/main" id="{F49836E6-907F-C35A-4B21-C68E2466C422}"/>
+                </a:ext>
+              </a:extLst>
+            </p:cNvPr>
             <p:cNvSpPr txBox="1"/>
             <p:nvPr/>
           </p:nvSpPr>
@@ -1889,7 +2045,13 @@
         </p:sp>
         <p:sp>
           <p:nvSpPr>
-            <p:cNvPr id="27" name="TextBox 27"/>
+            <p:cNvPr id="98" name="TextBox 27">
+              <a:extLst>
+                <a:ext uri="{FF2B5EF4-FFF2-40B4-BE49-F238E27FC236}">
+                  <a16:creationId xmlns:a16="http://schemas.microsoft.com/office/drawing/2014/main" id="{D9137455-F13F-CC72-1DFA-A9DB197B4630}"/>
+                </a:ext>
+              </a:extLst>
+            </p:cNvPr>
             <p:cNvSpPr txBox="1"/>
             <p:nvPr/>
           </p:nvSpPr>
@@ -1929,7 +2091,13 @@
         </p:sp>
         <p:sp>
           <p:nvSpPr>
-            <p:cNvPr id="28" name="TextBox 28"/>
+            <p:cNvPr id="99" name="TextBox 28">
+              <a:extLst>
+                <a:ext uri="{FF2B5EF4-FFF2-40B4-BE49-F238E27FC236}">
+                  <a16:creationId xmlns:a16="http://schemas.microsoft.com/office/drawing/2014/main" id="{FFA067B1-E966-C149-52AE-B6AD86F3B96C}"/>
+                </a:ext>
+              </a:extLst>
+            </p:cNvPr>
             <p:cNvSpPr txBox="1"/>
             <p:nvPr/>
           </p:nvSpPr>
@@ -1969,7 +2137,13 @@
         </p:sp>
         <p:sp>
           <p:nvSpPr>
-            <p:cNvPr id="29" name="Rectangle 29"/>
+            <p:cNvPr id="100" name="Rectangle 29">
+              <a:extLst>
+                <a:ext uri="{FF2B5EF4-FFF2-40B4-BE49-F238E27FC236}">
+                  <a16:creationId xmlns:a16="http://schemas.microsoft.com/office/drawing/2014/main" id="{05747009-11BC-C057-EA8E-0B38CEB10082}"/>
+                </a:ext>
+              </a:extLst>
+            </p:cNvPr>
             <p:cNvSpPr/>
             <p:nvPr/>
           </p:nvSpPr>
@@ -1993,7 +2167,13 @@
         </p:sp>
         <p:sp>
           <p:nvSpPr>
-            <p:cNvPr id="30" name="Rectangle 30"/>
+            <p:cNvPr id="101" name="Rectangle 30">
+              <a:extLst>
+                <a:ext uri="{FF2B5EF4-FFF2-40B4-BE49-F238E27FC236}">
+                  <a16:creationId xmlns:a16="http://schemas.microsoft.com/office/drawing/2014/main" id="{D83FE398-0FA2-73C3-5396-265C65F3209F}"/>
+                </a:ext>
+              </a:extLst>
+            </p:cNvPr>
             <p:cNvSpPr/>
             <p:nvPr/>
           </p:nvSpPr>
@@ -2015,7 +2195,13 @@
         </p:sp>
         <p:sp>
           <p:nvSpPr>
-            <p:cNvPr id="31" name="TextBox 31"/>
+            <p:cNvPr id="102" name="TextBox 31">
+              <a:extLst>
+                <a:ext uri="{FF2B5EF4-FFF2-40B4-BE49-F238E27FC236}">
+                  <a16:creationId xmlns:a16="http://schemas.microsoft.com/office/drawing/2014/main" id="{B0DCFDC7-9053-2EC9-CEBF-4798E0D7D44A}"/>
+                </a:ext>
+              </a:extLst>
+            </p:cNvPr>
             <p:cNvSpPr txBox="1"/>
             <p:nvPr/>
           </p:nvSpPr>
@@ -2056,7 +2242,13 @@
       </p:grpSp>
       <p:grpSp>
         <p:nvGrpSpPr>
-          <p:cNvPr id="36" name="Group 36"/>
+          <p:cNvPr id="103" name="Group 36">
+            <a:extLst>
+              <a:ext uri="{FF2B5EF4-FFF2-40B4-BE49-F238E27FC236}">
+                <a16:creationId xmlns:a16="http://schemas.microsoft.com/office/drawing/2014/main" id="{439D7972-A962-C9A4-7ADE-FB7CA91953C9}"/>
+              </a:ext>
+            </a:extLst>
+          </p:cNvPr>
           <p:cNvGrpSpPr/>
           <p:nvPr/>
         </p:nvGrpSpPr>
@@ -2070,7 +2262,13 @@
         </p:grpSpPr>
         <p:sp>
           <p:nvSpPr>
-            <p:cNvPr id="33" name="TextBox 33"/>
+            <p:cNvPr id="104" name="TextBox 33">
+              <a:extLst>
+                <a:ext uri="{FF2B5EF4-FFF2-40B4-BE49-F238E27FC236}">
+                  <a16:creationId xmlns:a16="http://schemas.microsoft.com/office/drawing/2014/main" id="{09EC82B8-3C23-0B31-4FE8-9C6AFFADADDE}"/>
+                </a:ext>
+              </a:extLst>
+            </p:cNvPr>
             <p:cNvSpPr txBox="1"/>
             <p:nvPr/>
           </p:nvSpPr>
@@ -2110,7 +2308,13 @@
         </p:sp>
         <p:sp>
           <p:nvSpPr>
-            <p:cNvPr id="34" name="Rectangle 34"/>
+            <p:cNvPr id="105" name="Rectangle 34">
+              <a:extLst>
+                <a:ext uri="{FF2B5EF4-FFF2-40B4-BE49-F238E27FC236}">
+                  <a16:creationId xmlns:a16="http://schemas.microsoft.com/office/drawing/2014/main" id="{A3985431-23F4-82FB-F292-66F7F4B5640A}"/>
+                </a:ext>
+              </a:extLst>
+            </p:cNvPr>
             <p:cNvSpPr/>
             <p:nvPr/>
           </p:nvSpPr>
@@ -2132,7 +2336,13 @@
         </p:sp>
         <p:sp>
           <p:nvSpPr>
-            <p:cNvPr id="35" name="TextBox 35"/>
+            <p:cNvPr id="106" name="TextBox 35">
+              <a:extLst>
+                <a:ext uri="{FF2B5EF4-FFF2-40B4-BE49-F238E27FC236}">
+                  <a16:creationId xmlns:a16="http://schemas.microsoft.com/office/drawing/2014/main" id="{ABF77BA1-2227-4FEC-830C-03F2B0B47BEB}"/>
+                </a:ext>
+              </a:extLst>
+            </p:cNvPr>
             <p:cNvSpPr txBox="1"/>
             <p:nvPr/>
           </p:nvSpPr>
@@ -17165,7 +17375,13 @@
       </p:grpSpPr>
       <p:grpSp>
         <p:nvGrpSpPr>
-          <p:cNvPr id="5" name="Group 5"/>
+          <p:cNvPr id="38" name="Group 5">
+            <a:extLst>
+              <a:ext uri="{FF2B5EF4-FFF2-40B4-BE49-F238E27FC236}">
+                <a16:creationId xmlns:a16="http://schemas.microsoft.com/office/drawing/2014/main" id="{2AE00B48-7038-24DA-804F-60F05C877701}"/>
+              </a:ext>
+            </a:extLst>
+          </p:cNvPr>
           <p:cNvGrpSpPr/>
           <p:nvPr/>
         </p:nvGrpSpPr>
@@ -17179,7 +17395,13 @@
         </p:grpSpPr>
         <p:sp>
           <p:nvSpPr>
-            <p:cNvPr id="2" name="TextBox 2"/>
+            <p:cNvPr id="39" name="TextBox 2">
+              <a:extLst>
+                <a:ext uri="{FF2B5EF4-FFF2-40B4-BE49-F238E27FC236}">
+                  <a16:creationId xmlns:a16="http://schemas.microsoft.com/office/drawing/2014/main" id="{67F013C4-5A40-25C1-D837-6D7919B8E191}"/>
+                </a:ext>
+              </a:extLst>
+            </p:cNvPr>
             <p:cNvSpPr txBox="1"/>
             <p:nvPr/>
           </p:nvSpPr>
@@ -17219,7 +17441,13 @@
         </p:sp>
         <p:sp>
           <p:nvSpPr>
-            <p:cNvPr id="3" name="TextBox 3"/>
+            <p:cNvPr id="40" name="TextBox 3">
+              <a:extLst>
+                <a:ext uri="{FF2B5EF4-FFF2-40B4-BE49-F238E27FC236}">
+                  <a16:creationId xmlns:a16="http://schemas.microsoft.com/office/drawing/2014/main" id="{3457E3B2-5645-AFA8-D771-C84679E23784}"/>
+                </a:ext>
+              </a:extLst>
+            </p:cNvPr>
             <p:cNvSpPr txBox="1"/>
             <p:nvPr/>
           </p:nvSpPr>
@@ -17259,7 +17487,13 @@
         </p:sp>
         <p:sp>
           <p:nvSpPr>
-            <p:cNvPr id="4" name="Rectangle 4"/>
+            <p:cNvPr id="41" name="Rectangle 4">
+              <a:extLst>
+                <a:ext uri="{FF2B5EF4-FFF2-40B4-BE49-F238E27FC236}">
+                  <a16:creationId xmlns:a16="http://schemas.microsoft.com/office/drawing/2014/main" id="{F4CDBB71-8C28-5D95-92A2-F413F56F33E7}"/>
+                </a:ext>
+              </a:extLst>
+            </p:cNvPr>
             <p:cNvSpPr/>
             <p:nvPr/>
           </p:nvSpPr>
@@ -17282,7 +17516,13 @@
       </p:grpSp>
       <p:grpSp>
         <p:nvGrpSpPr>
-          <p:cNvPr id="19" name="Group 19"/>
+          <p:cNvPr id="42" name="Group 19">
+            <a:extLst>
+              <a:ext uri="{FF2B5EF4-FFF2-40B4-BE49-F238E27FC236}">
+                <a16:creationId xmlns:a16="http://schemas.microsoft.com/office/drawing/2014/main" id="{9D05D6D9-0BE5-50AA-B79D-2B53CEDB78B5}"/>
+              </a:ext>
+            </a:extLst>
+          </p:cNvPr>
           <p:cNvGrpSpPr/>
           <p:nvPr/>
         </p:nvGrpSpPr>
@@ -17296,7 +17536,13 @@
         </p:grpSpPr>
         <p:sp>
           <p:nvSpPr>
-            <p:cNvPr id="6" name="Rectangle 6"/>
+            <p:cNvPr id="43" name="Rectangle 6">
+              <a:extLst>
+                <a:ext uri="{FF2B5EF4-FFF2-40B4-BE49-F238E27FC236}">
+                  <a16:creationId xmlns:a16="http://schemas.microsoft.com/office/drawing/2014/main" id="{B593D2D0-003F-3FD1-ECAD-518BAA76985C}"/>
+                </a:ext>
+              </a:extLst>
+            </p:cNvPr>
             <p:cNvSpPr/>
             <p:nvPr/>
           </p:nvSpPr>
@@ -17318,7 +17564,13 @@
         </p:sp>
         <p:sp>
           <p:nvSpPr>
-            <p:cNvPr id="7" name="Rectangle 7"/>
+            <p:cNvPr id="44" name="Rectangle 7">
+              <a:extLst>
+                <a:ext uri="{FF2B5EF4-FFF2-40B4-BE49-F238E27FC236}">
+                  <a16:creationId xmlns:a16="http://schemas.microsoft.com/office/drawing/2014/main" id="{60AE74AD-0D1B-778C-2CD5-C6694FFA3A41}"/>
+                </a:ext>
+              </a:extLst>
+            </p:cNvPr>
             <p:cNvSpPr/>
             <p:nvPr/>
           </p:nvSpPr>
@@ -17340,7 +17592,13 @@
         </p:sp>
         <p:sp>
           <p:nvSpPr>
-            <p:cNvPr id="8" name="TextBox 8"/>
+            <p:cNvPr id="45" name="TextBox 8">
+              <a:extLst>
+                <a:ext uri="{FF2B5EF4-FFF2-40B4-BE49-F238E27FC236}">
+                  <a16:creationId xmlns:a16="http://schemas.microsoft.com/office/drawing/2014/main" id="{4A297700-2DC6-A5C3-0ACA-AC4CF92E056F}"/>
+                </a:ext>
+              </a:extLst>
+            </p:cNvPr>
             <p:cNvSpPr txBox="1"/>
             <p:nvPr/>
           </p:nvSpPr>
@@ -17380,7 +17638,13 @@
         </p:sp>
         <p:sp>
           <p:nvSpPr>
-            <p:cNvPr id="9" name="Rectangle 9"/>
+            <p:cNvPr id="46" name="Rectangle 9">
+              <a:extLst>
+                <a:ext uri="{FF2B5EF4-FFF2-40B4-BE49-F238E27FC236}">
+                  <a16:creationId xmlns:a16="http://schemas.microsoft.com/office/drawing/2014/main" id="{421A7C69-BD39-A56A-C3A6-7F9EA0C3B7A3}"/>
+                </a:ext>
+              </a:extLst>
+            </p:cNvPr>
             <p:cNvSpPr/>
             <p:nvPr/>
           </p:nvSpPr>
@@ -17402,7 +17666,13 @@
         </p:sp>
         <p:sp>
           <p:nvSpPr>
-            <p:cNvPr id="10" name="TextBox 10"/>
+            <p:cNvPr id="47" name="TextBox 10">
+              <a:extLst>
+                <a:ext uri="{FF2B5EF4-FFF2-40B4-BE49-F238E27FC236}">
+                  <a16:creationId xmlns:a16="http://schemas.microsoft.com/office/drawing/2014/main" id="{62064CA7-D3F4-BA1B-768D-491803C2A910}"/>
+                </a:ext>
+              </a:extLst>
+            </p:cNvPr>
             <p:cNvSpPr txBox="1"/>
             <p:nvPr/>
           </p:nvSpPr>
@@ -17453,7 +17723,13 @@
         </p:sp>
         <p:sp>
           <p:nvSpPr>
-            <p:cNvPr id="11" name="Rectangle 11"/>
+            <p:cNvPr id="48" name="Rectangle 11">
+              <a:extLst>
+                <a:ext uri="{FF2B5EF4-FFF2-40B4-BE49-F238E27FC236}">
+                  <a16:creationId xmlns:a16="http://schemas.microsoft.com/office/drawing/2014/main" id="{2DC5F37E-A952-2303-FAC9-8E556776DFEF}"/>
+                </a:ext>
+              </a:extLst>
+            </p:cNvPr>
             <p:cNvSpPr/>
             <p:nvPr/>
           </p:nvSpPr>
@@ -17475,7 +17751,13 @@
         </p:sp>
         <p:sp>
           <p:nvSpPr>
-            <p:cNvPr id="12" name="TextBox 12"/>
+            <p:cNvPr id="49" name="TextBox 12">
+              <a:extLst>
+                <a:ext uri="{FF2B5EF4-FFF2-40B4-BE49-F238E27FC236}">
+                  <a16:creationId xmlns:a16="http://schemas.microsoft.com/office/drawing/2014/main" id="{5A190537-BCCA-CFC1-06B1-A4E5574B2972}"/>
+                </a:ext>
+              </a:extLst>
+            </p:cNvPr>
             <p:cNvSpPr txBox="1"/>
             <p:nvPr/>
           </p:nvSpPr>
@@ -17526,7 +17808,13 @@
         </p:sp>
         <p:sp>
           <p:nvSpPr>
-            <p:cNvPr id="13" name="Rectangle 13"/>
+            <p:cNvPr id="50" name="Rectangle 13">
+              <a:extLst>
+                <a:ext uri="{FF2B5EF4-FFF2-40B4-BE49-F238E27FC236}">
+                  <a16:creationId xmlns:a16="http://schemas.microsoft.com/office/drawing/2014/main" id="{548F9D7F-389D-FB7F-440F-11FEBE394FAC}"/>
+                </a:ext>
+              </a:extLst>
+            </p:cNvPr>
             <p:cNvSpPr/>
             <p:nvPr/>
           </p:nvSpPr>
@@ -17548,7 +17836,13 @@
         </p:sp>
         <p:sp>
           <p:nvSpPr>
-            <p:cNvPr id="14" name="TextBox 14"/>
+            <p:cNvPr id="51" name="TextBox 14">
+              <a:extLst>
+                <a:ext uri="{FF2B5EF4-FFF2-40B4-BE49-F238E27FC236}">
+                  <a16:creationId xmlns:a16="http://schemas.microsoft.com/office/drawing/2014/main" id="{FAC97D20-B078-96DF-27C2-8E61FB1F85F1}"/>
+                </a:ext>
+              </a:extLst>
+            </p:cNvPr>
             <p:cNvSpPr txBox="1"/>
             <p:nvPr/>
           </p:nvSpPr>
@@ -17599,7 +17893,13 @@
         </p:sp>
         <p:sp>
           <p:nvSpPr>
-            <p:cNvPr id="15" name="Rectangle 15"/>
+            <p:cNvPr id="52" name="Rectangle 15">
+              <a:extLst>
+                <a:ext uri="{FF2B5EF4-FFF2-40B4-BE49-F238E27FC236}">
+                  <a16:creationId xmlns:a16="http://schemas.microsoft.com/office/drawing/2014/main" id="{9CEFF3E2-6D34-7C75-C42A-168E9A997135}"/>
+                </a:ext>
+              </a:extLst>
+            </p:cNvPr>
             <p:cNvSpPr/>
             <p:nvPr/>
           </p:nvSpPr>
@@ -17621,7 +17921,13 @@
         </p:sp>
         <p:sp>
           <p:nvSpPr>
-            <p:cNvPr id="16" name="TextBox 16"/>
+            <p:cNvPr id="53" name="TextBox 16">
+              <a:extLst>
+                <a:ext uri="{FF2B5EF4-FFF2-40B4-BE49-F238E27FC236}">
+                  <a16:creationId xmlns:a16="http://schemas.microsoft.com/office/drawing/2014/main" id="{B27942B3-BB0F-7E7E-5357-E795F3C37703}"/>
+                </a:ext>
+              </a:extLst>
+            </p:cNvPr>
             <p:cNvSpPr txBox="1"/>
             <p:nvPr/>
           </p:nvSpPr>
@@ -17672,7 +17978,13 @@
         </p:sp>
         <p:sp>
           <p:nvSpPr>
-            <p:cNvPr id="17" name="Rectangle 17"/>
+            <p:cNvPr id="54" name="Rectangle 17">
+              <a:extLst>
+                <a:ext uri="{FF2B5EF4-FFF2-40B4-BE49-F238E27FC236}">
+                  <a16:creationId xmlns:a16="http://schemas.microsoft.com/office/drawing/2014/main" id="{205D1628-1272-0317-7886-9B77EA047C81}"/>
+                </a:ext>
+              </a:extLst>
+            </p:cNvPr>
             <p:cNvSpPr/>
             <p:nvPr/>
           </p:nvSpPr>
@@ -17694,7 +18006,13 @@
         </p:sp>
         <p:sp>
           <p:nvSpPr>
-            <p:cNvPr id="18" name="TextBox 18"/>
+            <p:cNvPr id="55" name="TextBox 18">
+              <a:extLst>
+                <a:ext uri="{FF2B5EF4-FFF2-40B4-BE49-F238E27FC236}">
+                  <a16:creationId xmlns:a16="http://schemas.microsoft.com/office/drawing/2014/main" id="{F78CADDA-CA17-74EF-43F9-C46F1F31A4C9}"/>
+                </a:ext>
+              </a:extLst>
+            </p:cNvPr>
             <p:cNvSpPr txBox="1"/>
             <p:nvPr/>
           </p:nvSpPr>
@@ -17746,7 +18064,13 @@
       </p:grpSp>
       <p:grpSp>
         <p:nvGrpSpPr>
-          <p:cNvPr id="33" name="Group 33"/>
+          <p:cNvPr id="56" name="Group 33">
+            <a:extLst>
+              <a:ext uri="{FF2B5EF4-FFF2-40B4-BE49-F238E27FC236}">
+                <a16:creationId xmlns:a16="http://schemas.microsoft.com/office/drawing/2014/main" id="{0FA06F6C-721F-3AE8-5161-D462110941C2}"/>
+              </a:ext>
+            </a:extLst>
+          </p:cNvPr>
           <p:cNvGrpSpPr/>
           <p:nvPr/>
         </p:nvGrpSpPr>
@@ -17760,7 +18084,13 @@
         </p:grpSpPr>
         <p:sp>
           <p:nvSpPr>
-            <p:cNvPr id="20" name="Rectangle 20"/>
+            <p:cNvPr id="57" name="Rectangle 20">
+              <a:extLst>
+                <a:ext uri="{FF2B5EF4-FFF2-40B4-BE49-F238E27FC236}">
+                  <a16:creationId xmlns:a16="http://schemas.microsoft.com/office/drawing/2014/main" id="{2E7F90D5-BF29-D033-DFCE-869D0D830E2B}"/>
+                </a:ext>
+              </a:extLst>
+            </p:cNvPr>
             <p:cNvSpPr/>
             <p:nvPr/>
           </p:nvSpPr>
@@ -17782,7 +18112,13 @@
         </p:sp>
         <p:sp>
           <p:nvSpPr>
-            <p:cNvPr id="21" name="Rectangle 21"/>
+            <p:cNvPr id="58" name="Rectangle 21">
+              <a:extLst>
+                <a:ext uri="{FF2B5EF4-FFF2-40B4-BE49-F238E27FC236}">
+                  <a16:creationId xmlns:a16="http://schemas.microsoft.com/office/drawing/2014/main" id="{253D8947-B329-5300-69EF-B7E64CA10D3B}"/>
+                </a:ext>
+              </a:extLst>
+            </p:cNvPr>
             <p:cNvSpPr/>
             <p:nvPr/>
           </p:nvSpPr>
@@ -17804,7 +18140,13 @@
         </p:sp>
         <p:sp>
           <p:nvSpPr>
-            <p:cNvPr id="22" name="TextBox 22"/>
+            <p:cNvPr id="59" name="TextBox 22">
+              <a:extLst>
+                <a:ext uri="{FF2B5EF4-FFF2-40B4-BE49-F238E27FC236}">
+                  <a16:creationId xmlns:a16="http://schemas.microsoft.com/office/drawing/2014/main" id="{9A754402-4131-48D3-E02F-B2F8BA713722}"/>
+                </a:ext>
+              </a:extLst>
+            </p:cNvPr>
             <p:cNvSpPr txBox="1"/>
             <p:nvPr/>
           </p:nvSpPr>
@@ -17844,7 +18186,13 @@
         </p:sp>
         <p:sp>
           <p:nvSpPr>
-            <p:cNvPr id="23" name="Rectangle 23"/>
+            <p:cNvPr id="60" name="Rectangle 23">
+              <a:extLst>
+                <a:ext uri="{FF2B5EF4-FFF2-40B4-BE49-F238E27FC236}">
+                  <a16:creationId xmlns:a16="http://schemas.microsoft.com/office/drawing/2014/main" id="{7E9C5808-BBBC-63E6-2C6E-062D09FFBDC2}"/>
+                </a:ext>
+              </a:extLst>
+            </p:cNvPr>
             <p:cNvSpPr/>
             <p:nvPr/>
           </p:nvSpPr>
@@ -17866,14 +18214,20 @@
         </p:sp>
         <p:sp>
           <p:nvSpPr>
-            <p:cNvPr id="24" name="TextBox 24"/>
+            <p:cNvPr id="61" name="TextBox 24">
+              <a:extLst>
+                <a:ext uri="{FF2B5EF4-FFF2-40B4-BE49-F238E27FC236}">
+                  <a16:creationId xmlns:a16="http://schemas.microsoft.com/office/drawing/2014/main" id="{B267A101-A688-5FAE-03E3-BCE3333479C5}"/>
+                </a:ext>
+              </a:extLst>
+            </p:cNvPr>
             <p:cNvSpPr txBox="1"/>
             <p:nvPr/>
           </p:nvSpPr>
           <p:spPr>
             <a:xfrm>
               <a:off x="6718935" y="3136106"/>
-              <a:ext cx="3794284" cy="220028"/>
+              <a:ext cx="4531013" cy="220028"/>
             </a:xfrm>
             <a:prstGeom prst="rect">
               <a:avLst/>
@@ -17910,14 +18264,20 @@
                   <a:ea typeface="Microsoft YaHei"/>
                   <a:cs typeface="Arial"/>
                 </a:rPr>
-                <a:t> Python · PyTorch · Linux 够用即走</a:t>
-              </a:r>
-            </a:p>
-          </p:txBody>
-        </p:sp>
-        <p:sp>
-          <p:nvSpPr>
-            <p:cNvPr id="25" name="Rectangle 25"/>
+                <a:t> 产出：跑通一个「训练→推理」的 PyTorch 小例</a:t>
+              </a:r>
+            </a:p>
+          </p:txBody>
+        </p:sp>
+        <p:sp>
+          <p:nvSpPr>
+            <p:cNvPr id="62" name="Rectangle 25">
+              <a:extLst>
+                <a:ext uri="{FF2B5EF4-FFF2-40B4-BE49-F238E27FC236}">
+                  <a16:creationId xmlns:a16="http://schemas.microsoft.com/office/drawing/2014/main" id="{019705C4-4739-81B8-9018-A504D7470096}"/>
+                </a:ext>
+              </a:extLst>
+            </p:cNvPr>
             <p:cNvSpPr/>
             <p:nvPr/>
           </p:nvSpPr>
@@ -17939,14 +18299,20 @@
         </p:sp>
         <p:sp>
           <p:nvSpPr>
-            <p:cNvPr id="26" name="TextBox 26"/>
+            <p:cNvPr id="63" name="TextBox 26">
+              <a:extLst>
+                <a:ext uri="{FF2B5EF4-FFF2-40B4-BE49-F238E27FC236}">
+                  <a16:creationId xmlns:a16="http://schemas.microsoft.com/office/drawing/2014/main" id="{34E8192F-4DFC-6D28-01D2-E21F9F7EC732}"/>
+                </a:ext>
+              </a:extLst>
+            </p:cNvPr>
             <p:cNvSpPr txBox="1"/>
             <p:nvPr/>
           </p:nvSpPr>
           <p:spPr>
             <a:xfrm>
               <a:off x="6718935" y="3459956"/>
-              <a:ext cx="3654936" cy="220028"/>
+              <a:ext cx="4254062" cy="220028"/>
             </a:xfrm>
             <a:prstGeom prst="rect">
               <a:avLst/>
@@ -17983,14 +18349,20 @@
                   <a:ea typeface="Microsoft YaHei"/>
                   <a:cs typeface="Arial"/>
                 </a:rPr>
-                <a:t> OpenCV + 目标检测 + RGB-D 点云</a:t>
-              </a:r>
-            </a:p>
-          </p:txBody>
-        </p:sp>
-        <p:sp>
-          <p:nvSpPr>
-            <p:cNvPr id="27" name="Rectangle 27"/>
+                <a:t> 产出：YOLO 检测 Demo + 一张点云可视化</a:t>
+              </a:r>
+            </a:p>
+          </p:txBody>
+        </p:sp>
+        <p:sp>
+          <p:nvSpPr>
+            <p:cNvPr id="64" name="Rectangle 27">
+              <a:extLst>
+                <a:ext uri="{FF2B5EF4-FFF2-40B4-BE49-F238E27FC236}">
+                  <a16:creationId xmlns:a16="http://schemas.microsoft.com/office/drawing/2014/main" id="{90519180-C80F-5CD4-1D77-B876941B1CE4}"/>
+                </a:ext>
+              </a:extLst>
+            </p:cNvPr>
             <p:cNvSpPr/>
             <p:nvPr/>
           </p:nvSpPr>
@@ -18012,14 +18384,20 @@
         </p:sp>
         <p:sp>
           <p:nvSpPr>
-            <p:cNvPr id="28" name="TextBox 28"/>
+            <p:cNvPr id="65" name="TextBox 28">
+              <a:extLst>
+                <a:ext uri="{FF2B5EF4-FFF2-40B4-BE49-F238E27FC236}">
+                  <a16:creationId xmlns:a16="http://schemas.microsoft.com/office/drawing/2014/main" id="{0194490C-36A0-57CD-66C0-0AEDA3F9FCC8}"/>
+                </a:ext>
+              </a:extLst>
+            </p:cNvPr>
             <p:cNvSpPr txBox="1"/>
             <p:nvPr/>
           </p:nvSpPr>
           <p:spPr>
             <a:xfrm>
               <a:off x="6718935" y="3783806"/>
-              <a:ext cx="4015388" cy="220028"/>
+              <a:ext cx="4086450" cy="220028"/>
             </a:xfrm>
             <a:prstGeom prst="rect">
               <a:avLst/>
@@ -18056,14 +18434,20 @@
                   <a:ea typeface="Microsoft YaHei"/>
                   <a:cs typeface="Arial"/>
                 </a:rPr>
-                <a:t> ROS2 + URDF/Rviz + MuJoCo 抓取仿真</a:t>
-              </a:r>
-            </a:p>
-          </p:txBody>
-        </p:sp>
-        <p:sp>
-          <p:nvSpPr>
-            <p:cNvPr id="29" name="Rectangle 29"/>
+                <a:t> 产出：MuJoCo 里机械臂抓取仿真跑起来</a:t>
+              </a:r>
+            </a:p>
+          </p:txBody>
+        </p:sp>
+        <p:sp>
+          <p:nvSpPr>
+            <p:cNvPr id="66" name="Rectangle 29">
+              <a:extLst>
+                <a:ext uri="{FF2B5EF4-FFF2-40B4-BE49-F238E27FC236}">
+                  <a16:creationId xmlns:a16="http://schemas.microsoft.com/office/drawing/2014/main" id="{2360F62D-9BD9-9E64-4C64-A86D91E70158}"/>
+                </a:ext>
+              </a:extLst>
+            </p:cNvPr>
             <p:cNvSpPr/>
             <p:nvPr/>
           </p:nvSpPr>
@@ -18085,14 +18469,20 @@
         </p:sp>
         <p:sp>
           <p:nvSpPr>
-            <p:cNvPr id="30" name="TextBox 30"/>
+            <p:cNvPr id="67" name="TextBox 30">
+              <a:extLst>
+                <a:ext uri="{FF2B5EF4-FFF2-40B4-BE49-F238E27FC236}">
+                  <a16:creationId xmlns:a16="http://schemas.microsoft.com/office/drawing/2014/main" id="{36CBDFC9-EBAA-9CC3-5DD5-A7F9DAFD4B33}"/>
+                </a:ext>
+              </a:extLst>
+            </p:cNvPr>
             <p:cNvSpPr txBox="1"/>
             <p:nvPr/>
           </p:nvSpPr>
           <p:spPr>
             <a:xfrm>
               <a:off x="6718935" y="4107656"/>
-              <a:ext cx="3820603" cy="220028"/>
+              <a:ext cx="4104928" cy="220028"/>
             </a:xfrm>
             <a:prstGeom prst="rect">
               <a:avLst/>
@@ -18129,14 +18519,20 @@
                   <a:ea typeface="Microsoft YaHei"/>
                   <a:cs typeface="Arial"/>
                 </a:rPr>
-                <a:t> 复现 LeRobot 模仿学习 Demo → PPO</a:t>
-              </a:r>
-            </a:p>
-          </p:txBody>
-        </p:sp>
-        <p:sp>
-          <p:nvSpPr>
-            <p:cNvPr id="31" name="Rectangle 31"/>
+                <a:t> 产出：复现 LeRobot 模仿学习策略 Demo</a:t>
+              </a:r>
+            </a:p>
+          </p:txBody>
+        </p:sp>
+        <p:sp>
+          <p:nvSpPr>
+            <p:cNvPr id="68" name="Rectangle 31">
+              <a:extLst>
+                <a:ext uri="{FF2B5EF4-FFF2-40B4-BE49-F238E27FC236}">
+                  <a16:creationId xmlns:a16="http://schemas.microsoft.com/office/drawing/2014/main" id="{83E4B8E6-938B-03C1-936D-E5014A8498B0}"/>
+                </a:ext>
+              </a:extLst>
+            </p:cNvPr>
             <p:cNvSpPr/>
             <p:nvPr/>
           </p:nvSpPr>
@@ -18158,14 +18554,20 @@
         </p:sp>
         <p:sp>
           <p:nvSpPr>
-            <p:cNvPr id="32" name="TextBox 32"/>
+            <p:cNvPr id="69" name="TextBox 32">
+              <a:extLst>
+                <a:ext uri="{FF2B5EF4-FFF2-40B4-BE49-F238E27FC236}">
+                  <a16:creationId xmlns:a16="http://schemas.microsoft.com/office/drawing/2014/main" id="{CC47751C-EAB8-50C4-FD0B-DE03B0988211}"/>
+                </a:ext>
+              </a:extLst>
+            </p:cNvPr>
             <p:cNvSpPr txBox="1"/>
             <p:nvPr/>
           </p:nvSpPr>
           <p:spPr>
             <a:xfrm>
               <a:off x="6718935" y="4431506"/>
-              <a:ext cx="3913262" cy="220028"/>
+              <a:ext cx="4447698" cy="220028"/>
             </a:xfrm>
             <a:prstGeom prst="rect">
               <a:avLst/>
@@ -18202,7 +18604,7 @@
                   <a:ea typeface="Microsoft YaHei"/>
                   <a:cs typeface="Arial"/>
                 </a:rPr>
-                <a:t> OpenVLA 微调 · Sim2Real · 世界模型</a:t>
+                <a:t> 产出：OpenVLA 小实验 + 仿真/真机迁移笔记</a:t>
               </a:r>
             </a:p>
           </p:txBody>
@@ -18210,7 +18612,13 @@
       </p:grpSp>
       <p:grpSp>
         <p:nvGrpSpPr>
-          <p:cNvPr id="37" name="Group 37"/>
+          <p:cNvPr id="70" name="Group 37">
+            <a:extLst>
+              <a:ext uri="{FF2B5EF4-FFF2-40B4-BE49-F238E27FC236}">
+                <a16:creationId xmlns:a16="http://schemas.microsoft.com/office/drawing/2014/main" id="{1E606C73-B485-1351-3085-6011D8CA657D}"/>
+              </a:ext>
+            </a:extLst>
+          </p:cNvPr>
           <p:cNvGrpSpPr/>
           <p:nvPr/>
         </p:nvGrpSpPr>
@@ -18224,7 +18632,13 @@
         </p:grpSpPr>
         <p:sp>
           <p:nvSpPr>
-            <p:cNvPr id="34" name="TextBox 34"/>
+            <p:cNvPr id="71" name="TextBox 34">
+              <a:extLst>
+                <a:ext uri="{FF2B5EF4-FFF2-40B4-BE49-F238E27FC236}">
+                  <a16:creationId xmlns:a16="http://schemas.microsoft.com/office/drawing/2014/main" id="{54BEF183-1A95-D68C-64A9-75C4B07E03E1}"/>
+                </a:ext>
+              </a:extLst>
+            </p:cNvPr>
             <p:cNvSpPr txBox="1"/>
             <p:nvPr/>
           </p:nvSpPr>
@@ -18264,7 +18678,13 @@
         </p:sp>
         <p:sp>
           <p:nvSpPr>
-            <p:cNvPr id="35" name="Rectangle 35"/>
+            <p:cNvPr id="72" name="Rectangle 35">
+              <a:extLst>
+                <a:ext uri="{FF2B5EF4-FFF2-40B4-BE49-F238E27FC236}">
+                  <a16:creationId xmlns:a16="http://schemas.microsoft.com/office/drawing/2014/main" id="{B770D665-9102-592C-9DCB-F84027B6C826}"/>
+                </a:ext>
+              </a:extLst>
+            </p:cNvPr>
             <p:cNvSpPr/>
             <p:nvPr/>
           </p:nvSpPr>
@@ -18286,7 +18706,13 @@
         </p:sp>
         <p:sp>
           <p:nvSpPr>
-            <p:cNvPr id="36" name="TextBox 36"/>
+            <p:cNvPr id="73" name="TextBox 36">
+              <a:extLst>
+                <a:ext uri="{FF2B5EF4-FFF2-40B4-BE49-F238E27FC236}">
+                  <a16:creationId xmlns:a16="http://schemas.microsoft.com/office/drawing/2014/main" id="{A4282AE9-A214-39FE-AA67-8509EA42912E}"/>
+                </a:ext>
+              </a:extLst>
+            </p:cNvPr>
             <p:cNvSpPr txBox="1"/>
             <p:nvPr/>
           </p:nvSpPr>
@@ -27445,21 +27871,33 @@
       </p:grpSpPr>
       <p:grpSp>
         <p:nvGrpSpPr>
-          <p:cNvPr id="5" name="Group 5"/>
+          <p:cNvPr id="55" name="Group 5">
+            <a:extLst>
+              <a:ext uri="{FF2B5EF4-FFF2-40B4-BE49-F238E27FC236}">
+                <a16:creationId xmlns:a16="http://schemas.microsoft.com/office/drawing/2014/main" id="{9E6CDA6E-C0CF-229D-3A44-8A77F76F2B79}"/>
+              </a:ext>
+            </a:extLst>
+          </p:cNvPr>
           <p:cNvGrpSpPr/>
           <p:nvPr/>
         </p:nvGrpSpPr>
         <p:grpSpPr>
           <a:xfrm>
             <a:off x="595122" y="501491"/>
-            <a:ext cx="7747847" cy="738854"/>
+            <a:ext cx="10387965" cy="738854"/>
             <a:chOff x="595122" y="501491"/>
-            <a:chExt cx="7747847" cy="738854"/>
+            <a:chExt cx="10387965" cy="738854"/>
           </a:xfrm>
         </p:grpSpPr>
         <p:sp>
           <p:nvSpPr>
-            <p:cNvPr id="2" name="TextBox 2"/>
+            <p:cNvPr id="56" name="TextBox 2">
+              <a:extLst>
+                <a:ext uri="{FF2B5EF4-FFF2-40B4-BE49-F238E27FC236}">
+                  <a16:creationId xmlns:a16="http://schemas.microsoft.com/office/drawing/2014/main" id="{AB5D70D7-CD16-CC30-0E8D-FA83AA99E61B}"/>
+                </a:ext>
+              </a:extLst>
+            </p:cNvPr>
             <p:cNvSpPr txBox="1"/>
             <p:nvPr/>
           </p:nvSpPr>
@@ -27499,14 +27937,20 @@
         </p:sp>
         <p:sp>
           <p:nvSpPr>
-            <p:cNvPr id="3" name="TextBox 3"/>
+            <p:cNvPr id="57" name="TextBox 3">
+              <a:extLst>
+                <a:ext uri="{FF2B5EF4-FFF2-40B4-BE49-F238E27FC236}">
+                  <a16:creationId xmlns:a16="http://schemas.microsoft.com/office/drawing/2014/main" id="{3A461AAB-3D41-24C8-F7DA-9364F3E55570}"/>
+                </a:ext>
+              </a:extLst>
+            </p:cNvPr>
             <p:cNvSpPr txBox="1"/>
             <p:nvPr/>
           </p:nvSpPr>
           <p:spPr>
             <a:xfrm>
               <a:off x="595122" y="682942"/>
-              <a:ext cx="7747847" cy="557403"/>
+              <a:ext cx="10387965" cy="557403"/>
             </a:xfrm>
             <a:prstGeom prst="rect">
               <a:avLst/>
@@ -27532,14 +27976,20 @@
                   <a:ea typeface="Microsoft YaHei"/>
                   <a:cs typeface="Arial"/>
                 </a:rPr>
-                <a:t>从 RAG 到 Agent：被问题逼出来的技术演进</a:t>
-              </a:r>
-            </a:p>
-          </p:txBody>
-        </p:sp>
-        <p:sp>
-          <p:nvSpPr>
-            <p:cNvPr id="4" name="Rectangle 4"/>
+                <a:t>五段工程范式：从「提问」到「编排」，被问题逼出来的迭代</a:t>
+              </a:r>
+            </a:p>
+          </p:txBody>
+        </p:sp>
+        <p:sp>
+          <p:nvSpPr>
+            <p:cNvPr id="58" name="Rectangle 4">
+              <a:extLst>
+                <a:ext uri="{FF2B5EF4-FFF2-40B4-BE49-F238E27FC236}">
+                  <a16:creationId xmlns:a16="http://schemas.microsoft.com/office/drawing/2014/main" id="{16A658CE-45AC-B23C-B674-A1820994A2F6}"/>
+                </a:ext>
+              </a:extLst>
+            </p:cNvPr>
             <p:cNvSpPr/>
             <p:nvPr/>
           </p:nvSpPr>
@@ -27562,32 +28012,44 @@
       </p:grpSp>
       <p:grpSp>
         <p:nvGrpSpPr>
-          <p:cNvPr id="50" name="Group 50"/>
+          <p:cNvPr id="59" name="Group 69">
+            <a:extLst>
+              <a:ext uri="{FF2B5EF4-FFF2-40B4-BE49-F238E27FC236}">
+                <a16:creationId xmlns:a16="http://schemas.microsoft.com/office/drawing/2014/main" id="{76B9E281-0214-D82A-CBFD-DDEF3B5E8F8D}"/>
+              </a:ext>
+            </a:extLst>
+          </p:cNvPr>
           <p:cNvGrpSpPr/>
           <p:nvPr/>
         </p:nvGrpSpPr>
         <p:grpSpPr>
           <a:xfrm>
             <a:off x="1047750" y="1866900"/>
-            <a:ext cx="10096500" cy="4057650"/>
+            <a:ext cx="10096500" cy="3733800"/>
             <a:chOff x="1047750" y="1866900"/>
-            <a:chExt cx="10096500" cy="4057650"/>
+            <a:chExt cx="10096500" cy="3733800"/>
           </a:xfrm>
         </p:grpSpPr>
         <p:sp>
           <p:nvSpPr>
-            <p:cNvPr id="6" name="Rectangle 6"/>
+            <p:cNvPr id="60" name="Rectangle 6">
+              <a:extLst>
+                <a:ext uri="{FF2B5EF4-FFF2-40B4-BE49-F238E27FC236}">
+                  <a16:creationId xmlns:a16="http://schemas.microsoft.com/office/drawing/2014/main" id="{AD24DD1F-5781-5026-F26A-F8C80D4FA12D}"/>
+                </a:ext>
+              </a:extLst>
+            </p:cNvPr>
             <p:cNvSpPr/>
             <p:nvPr/>
           </p:nvSpPr>
           <p:spPr>
             <a:xfrm>
               <a:off x="1047750" y="1866900"/>
-              <a:ext cx="10096500" cy="400050"/>
+              <a:ext cx="10096500" cy="381000"/>
             </a:xfrm>
             <a:prstGeom prst="roundRect">
               <a:avLst>
-                <a:gd name="adj" fmla="val 7143"/>
+                <a:gd name="adj" fmla="val 7500"/>
               </a:avLst>
             </a:prstGeom>
             <a:solidFill>
@@ -27602,14 +28064,20 @@
         </p:sp>
         <p:sp>
           <p:nvSpPr>
-            <p:cNvPr id="7" name="TextBox 7"/>
-            <p:cNvSpPr txBox="1"/>
-            <p:nvPr/>
-          </p:nvSpPr>
-          <p:spPr>
-            <a:xfrm>
-              <a:off x="3661389" y="2001202"/>
-              <a:ext cx="4869222" cy="205359"/>
+            <p:cNvPr id="61" name="TextBox 7">
+              <a:extLst>
+                <a:ext uri="{FF2B5EF4-FFF2-40B4-BE49-F238E27FC236}">
+                  <a16:creationId xmlns:a16="http://schemas.microsoft.com/office/drawing/2014/main" id="{2CE188A0-C3C9-FFD9-98EA-FD61B6773F38}"/>
+                </a:ext>
+              </a:extLst>
+            </p:cNvPr>
+            <p:cNvSpPr txBox="1"/>
+            <p:nvPr/>
+          </p:nvSpPr>
+          <p:spPr>
+            <a:xfrm>
+              <a:off x="3397706" y="1995726"/>
+              <a:ext cx="5396588" cy="198025"/>
             </a:xfrm>
             <a:prstGeom prst="rect">
               <a:avLst/>
@@ -27627,7 +28095,7 @@
             <a:p>
               <a:pPr algn="ctr"/>
               <a:r>
-                <a:rPr lang="zh-CN" sz="1050" b="1" dirty="0">
+                <a:rPr lang="zh-CN" sz="1010" b="1" dirty="0">
                   <a:solidFill>
                     <a:srgbClr val="1A1A1A"/>
                   </a:solidFill>
@@ -27635,25 +28103,31 @@
                   <a:ea typeface="Microsoft YaHei"/>
                   <a:cs typeface="Arial"/>
                 </a:rPr>
-                <a:t>案例主线：企业招聘 Agent —— 每一层，都是被上一个「真实问题」逼出来的</a:t>
-              </a:r>
-            </a:p>
-          </p:txBody>
-        </p:sp>
-        <p:sp>
-          <p:nvSpPr>
-            <p:cNvPr id="8" name="Rectangle 8"/>
+                <a:t>主线：提示词 → 上下文 → 循环 → 外壳 → 图编排 —— 每一段，都是被上一段的短板逼出来的</a:t>
+              </a:r>
+            </a:p>
+          </p:txBody>
+        </p:sp>
+        <p:sp>
+          <p:nvSpPr>
+            <p:cNvPr id="62" name="Rectangle 8">
+              <a:extLst>
+                <a:ext uri="{FF2B5EF4-FFF2-40B4-BE49-F238E27FC236}">
+                  <a16:creationId xmlns:a16="http://schemas.microsoft.com/office/drawing/2014/main" id="{55D0C377-CCDF-0804-B8AC-F575AFAEB511}"/>
+                </a:ext>
+              </a:extLst>
+            </p:cNvPr>
             <p:cNvSpPr/>
             <p:nvPr/>
           </p:nvSpPr>
           <p:spPr>
             <a:xfrm>
               <a:off x="1047750" y="2400300"/>
-              <a:ext cx="1943100" cy="2038350"/>
+              <a:ext cx="1905000" cy="1600200"/>
             </a:xfrm>
             <a:prstGeom prst="roundRect">
               <a:avLst>
-                <a:gd name="adj" fmla="val 1471"/>
+                <a:gd name="adj" fmla="val 1786"/>
               </a:avLst>
             </a:prstGeom>
             <a:solidFill>
@@ -27668,14 +28142,20 @@
         </p:sp>
         <p:sp>
           <p:nvSpPr>
-            <p:cNvPr id="9" name="Rectangle 9"/>
+            <p:cNvPr id="63" name="Rectangle 9">
+              <a:extLst>
+                <a:ext uri="{FF2B5EF4-FFF2-40B4-BE49-F238E27FC236}">
+                  <a16:creationId xmlns:a16="http://schemas.microsoft.com/office/drawing/2014/main" id="{1F937807-5F62-2809-B2BF-1CEB25F17E8E}"/>
+                </a:ext>
+              </a:extLst>
+            </p:cNvPr>
             <p:cNvSpPr/>
             <p:nvPr/>
           </p:nvSpPr>
           <p:spPr>
             <a:xfrm>
               <a:off x="1047750" y="2400300"/>
-              <a:ext cx="1943100" cy="57150"/>
+              <a:ext cx="1905000" cy="57150"/>
             </a:xfrm>
             <a:prstGeom prst="rect">
               <a:avLst/>
@@ -27690,14 +28170,48 @@
         </p:sp>
         <p:sp>
           <p:nvSpPr>
-            <p:cNvPr id="10" name="TextBox 10"/>
-            <p:cNvSpPr txBox="1"/>
-            <p:nvPr/>
-          </p:nvSpPr>
-          <p:spPr>
-            <a:xfrm>
-              <a:off x="1515648" y="2595801"/>
-              <a:ext cx="1007304" cy="198025"/>
+            <p:cNvPr id="64" name="Rectangle 10">
+              <a:extLst>
+                <a:ext uri="{FF2B5EF4-FFF2-40B4-BE49-F238E27FC236}">
+                  <a16:creationId xmlns:a16="http://schemas.microsoft.com/office/drawing/2014/main" id="{7D96EFAE-CDC7-A72C-2086-5ECD8220F44F}"/>
+                </a:ext>
+              </a:extLst>
+            </p:cNvPr>
+            <p:cNvSpPr/>
+            <p:nvPr/>
+          </p:nvSpPr>
+          <p:spPr>
+            <a:xfrm>
+              <a:off x="1047750" y="2457450"/>
+              <a:ext cx="1905000" cy="190500"/>
+            </a:xfrm>
+            <a:prstGeom prst="rect">
+              <a:avLst/>
+            </a:prstGeom>
+            <a:solidFill>
+              <a:srgbClr val="F5F5F5"/>
+            </a:solidFill>
+            <a:ln>
+              <a:noFill/>
+            </a:ln>
+          </p:spPr>
+        </p:sp>
+        <p:sp>
+          <p:nvSpPr>
+            <p:cNvPr id="65" name="TextBox 11">
+              <a:extLst>
+                <a:ext uri="{FF2B5EF4-FFF2-40B4-BE49-F238E27FC236}">
+                  <a16:creationId xmlns:a16="http://schemas.microsoft.com/office/drawing/2014/main" id="{5E5D7A2A-17CA-6E10-B9E0-A71D3DC0A746}"/>
+                </a:ext>
+              </a:extLst>
+            </p:cNvPr>
+            <p:cNvSpPr txBox="1"/>
+            <p:nvPr/>
+          </p:nvSpPr>
+          <p:spPr>
+            <a:xfrm>
+              <a:off x="1371393" y="2592943"/>
+              <a:ext cx="1257713" cy="169069"/>
             </a:xfrm>
             <a:prstGeom prst="rect">
               <a:avLst/>
@@ -27715,29 +28229,35 @@
             <a:p>
               <a:pPr algn="ctr"/>
               <a:r>
-                <a:rPr lang="zh-CN" sz="1010" b="1" dirty="0">
+                <a:rPr lang="en-US" sz="860" b="1" dirty="0">
                   <a:solidFill>
                     <a:srgbClr val="1A1A1A"/>
                   </a:solidFill>
                   <a:latin typeface="Arial"/>
-                  <a:ea typeface="Microsoft YaHei"/>
-                  <a:cs typeface="Arial"/>
-                </a:rPr>
-                <a:t>① RAG 检索增强</a:t>
-              </a:r>
-            </a:p>
-          </p:txBody>
-        </p:sp>
-        <p:sp>
-          <p:nvSpPr>
-            <p:cNvPr id="11" name="TextBox 11"/>
-            <p:cNvSpPr txBox="1"/>
-            <p:nvPr/>
-          </p:nvSpPr>
-          <p:spPr>
-            <a:xfrm>
-              <a:off x="1376439" y="2848689"/>
-              <a:ext cx="1285723" cy="154781"/>
+                  <a:ea typeface="Arial"/>
+                  <a:cs typeface="Arial"/>
+                </a:rPr>
+                <a:t>1 Prompt Engineering</a:t>
+              </a:r>
+            </a:p>
+          </p:txBody>
+        </p:sp>
+        <p:sp>
+          <p:nvSpPr>
+            <p:cNvPr id="66" name="TextBox 12">
+              <a:extLst>
+                <a:ext uri="{FF2B5EF4-FFF2-40B4-BE49-F238E27FC236}">
+                  <a16:creationId xmlns:a16="http://schemas.microsoft.com/office/drawing/2014/main" id="{85CC8098-5FE0-D26C-E511-A93DA26C709C}"/>
+                </a:ext>
+              </a:extLst>
+            </p:cNvPr>
+            <p:cNvSpPr txBox="1"/>
+            <p:nvPr/>
+          </p:nvSpPr>
+          <p:spPr>
+            <a:xfrm>
+              <a:off x="1706054" y="2783443"/>
+              <a:ext cx="588391" cy="169069"/>
             </a:xfrm>
             <a:prstGeom prst="rect">
               <a:avLst/>
@@ -27755,7 +28275,7 @@
             <a:p>
               <a:pPr algn="ctr"/>
               <a:r>
-                <a:rPr lang="zh-CN" sz="790" b="1" dirty="0">
+                <a:rPr lang="zh-CN" sz="860" b="1" dirty="0">
                   <a:solidFill>
                     <a:srgbClr val="E30613"/>
                   </a:solidFill>
@@ -27763,21 +28283,27 @@
                   <a:ea typeface="Microsoft YaHei"/>
                   <a:cs typeface="Arial"/>
                 </a:rPr>
-                <a:t>痛点：答不出公司内部制度</a:t>
-              </a:r>
-            </a:p>
-          </p:txBody>
-        </p:sp>
-        <p:sp>
-          <p:nvSpPr>
-            <p:cNvPr id="12" name="Line 12"/>
+                <a:t>提示词工程</a:t>
+              </a:r>
+            </a:p>
+          </p:txBody>
+        </p:sp>
+        <p:sp>
+          <p:nvSpPr>
+            <p:cNvPr id="67" name="Line 13">
+              <a:extLst>
+                <a:ext uri="{FF2B5EF4-FFF2-40B4-BE49-F238E27FC236}">
+                  <a16:creationId xmlns:a16="http://schemas.microsoft.com/office/drawing/2014/main" id="{58E28CA9-2A18-DC38-9243-96402328377B}"/>
+                </a:ext>
+              </a:extLst>
+            </p:cNvPr>
             <p:cNvSpPr/>
             <p:nvPr/>
           </p:nvSpPr>
           <p:spPr>
             <a:xfrm>
-              <a:off x="1200150" y="3086100"/>
-              <a:ext cx="1638300" cy="9525"/>
+              <a:off x="1162050" y="3009900"/>
+              <a:ext cx="1676400" cy="9525"/>
             </a:xfrm>
             <a:custGeom>
               <a:avLst/>
@@ -27786,12 +28312,12 @@
               <a:cxnLst/>
               <a:rect l="l" t="t" r="r" b="b"/>
               <a:pathLst>
-                <a:path w="1638300" h="9525">
+                <a:path w="1676400" h="9525">
                   <a:moveTo>
                     <a:pt x="0" y="0"/>
                   </a:moveTo>
                   <a:lnTo>
-                    <a:pt x="1638300" y="0"/>
+                    <a:pt x="1676400" y="0"/>
                   </a:lnTo>
                 </a:path>
               </a:pathLst>
@@ -27806,14 +28332,20 @@
         </p:sp>
         <p:sp>
           <p:nvSpPr>
-            <p:cNvPr id="13" name="TextBox 13"/>
-            <p:cNvSpPr txBox="1"/>
-            <p:nvPr/>
-          </p:nvSpPr>
-          <p:spPr>
-            <a:xfrm>
-              <a:off x="1369102" y="3221593"/>
-              <a:ext cx="1300396" cy="169069"/>
+            <p:cNvPr id="68" name="TextBox 14">
+              <a:extLst>
+                <a:ext uri="{FF2B5EF4-FFF2-40B4-BE49-F238E27FC236}">
+                  <a16:creationId xmlns:a16="http://schemas.microsoft.com/office/drawing/2014/main" id="{1A03B491-7933-469E-D111-FB952E39D86F}"/>
+                </a:ext>
+              </a:extLst>
+            </p:cNvPr>
+            <p:cNvSpPr txBox="1"/>
+            <p:nvPr/>
+          </p:nvSpPr>
+          <p:spPr>
+            <a:xfrm>
+              <a:off x="1288732" y="3138488"/>
+              <a:ext cx="1423035" cy="147638"/>
             </a:xfrm>
             <a:prstGeom prst="rect">
               <a:avLst/>
@@ -27831,7 +28363,7 @@
             <a:p>
               <a:pPr algn="ctr"/>
               <a:r>
-                <a:rPr lang="zh-CN" sz="860" dirty="0">
+                <a:rPr lang="zh-CN" sz="750" dirty="0">
                   <a:solidFill>
                     <a:srgbClr val="555555"/>
                   </a:solidFill>
@@ -27839,21 +28371,27 @@
                   <a:ea typeface="Microsoft YaHei"/>
                   <a:cs typeface="Arial"/>
                 </a:rPr>
-                <a:t>连私有知识 · 显著减幻觉</a:t>
-              </a:r>
-            </a:p>
-          </p:txBody>
-        </p:sp>
-        <p:sp>
-          <p:nvSpPr>
-            <p:cNvPr id="14" name="TextBox 14"/>
-            <p:cNvSpPr txBox="1"/>
-            <p:nvPr/>
-          </p:nvSpPr>
-          <p:spPr>
-            <a:xfrm>
-              <a:off x="1609331" y="3488293"/>
-              <a:ext cx="819937" cy="169069"/>
+                <a:t>解决：一次问对：给示例与约束</a:t>
+              </a:r>
+            </a:p>
+          </p:txBody>
+        </p:sp>
+        <p:sp>
+          <p:nvSpPr>
+            <p:cNvPr id="69" name="TextBox 15">
+              <a:extLst>
+                <a:ext uri="{FF2B5EF4-FFF2-40B4-BE49-F238E27FC236}">
+                  <a16:creationId xmlns:a16="http://schemas.microsoft.com/office/drawing/2014/main" id="{5422DF38-32F9-B36C-DE19-E98A1661EFD6}"/>
+                </a:ext>
+              </a:extLst>
+            </p:cNvPr>
+            <p:cNvSpPr txBox="1"/>
+            <p:nvPr/>
+          </p:nvSpPr>
+          <p:spPr>
+            <a:xfrm>
+              <a:off x="1440180" y="3367088"/>
+              <a:ext cx="1120140" cy="147638"/>
             </a:xfrm>
             <a:prstGeom prst="rect">
               <a:avLst/>
@@ -27871,7 +28409,7 @@
             <a:p>
               <a:pPr algn="ctr"/>
               <a:r>
-                <a:rPr lang="zh-CN" sz="860" dirty="0">
+                <a:rPr lang="zh-CN" sz="750" dirty="0">
                   <a:solidFill>
                     <a:srgbClr val="555555"/>
                   </a:solidFill>
@@ -27879,25 +28417,165 @@
                   <a:ea typeface="Microsoft YaHei"/>
                   <a:cs typeface="Arial"/>
                 </a:rPr>
-                <a:t>上下文可控可溯</a:t>
-              </a:r>
-            </a:p>
-          </p:txBody>
-        </p:sp>
-        <p:sp>
-          <p:nvSpPr>
-            <p:cNvPr id="15" name="Rectangle 15"/>
+                <a:t>短板：对话一长就「忘」</a:t>
+              </a:r>
+            </a:p>
+          </p:txBody>
+        </p:sp>
+        <p:sp>
+          <p:nvSpPr>
+            <p:cNvPr id="70" name="TextBox 16">
+              <a:extLst>
+                <a:ext uri="{FF2B5EF4-FFF2-40B4-BE49-F238E27FC236}">
+                  <a16:creationId xmlns:a16="http://schemas.microsoft.com/office/drawing/2014/main" id="{94C755C6-B024-EFD1-8E72-3B9D8FAEC12C}"/>
+                </a:ext>
+              </a:extLst>
+            </p:cNvPr>
+            <p:cNvSpPr txBox="1"/>
+            <p:nvPr/>
+          </p:nvSpPr>
+          <p:spPr>
+            <a:xfrm>
+              <a:off x="1620335" y="3599736"/>
+              <a:ext cx="759830" cy="140494"/>
+            </a:xfrm>
+            <a:prstGeom prst="rect">
+              <a:avLst/>
+            </a:prstGeom>
+            <a:noFill/>
+            <a:ln>
+              <a:noFill/>
+            </a:ln>
+          </p:spPr>
+          <p:txBody>
+            <a:bodyPr wrap="none" lIns="0" tIns="0" rIns="0" bIns="0" anchor="t" anchorCtr="0">
+              <a:spAutoFit/>
+            </a:bodyPr>
+            <a:lstStyle/>
+            <a:p>
+              <a:pPr algn="ctr"/>
+              <a:r>
+                <a:rPr lang="zh-CN" sz="710" dirty="0">
+                  <a:solidFill>
+                    <a:srgbClr val="999999"/>
+                  </a:solidFill>
+                  <a:latin typeface="Arial"/>
+                  <a:ea typeface="Microsoft YaHei"/>
+                  <a:cs typeface="Arial"/>
+                </a:rPr>
+                <a:t>→ 开始讲究喂什么</a:t>
+              </a:r>
+            </a:p>
+          </p:txBody>
+        </p:sp>
+        <p:sp>
+          <p:nvSpPr>
+            <p:cNvPr id="71" name="Line 17">
+              <a:extLst>
+                <a:ext uri="{FF2B5EF4-FFF2-40B4-BE49-F238E27FC236}">
+                  <a16:creationId xmlns:a16="http://schemas.microsoft.com/office/drawing/2014/main" id="{CAE5D399-30C3-5411-BB4F-E979536D1FDA}"/>
+                </a:ext>
+              </a:extLst>
+            </p:cNvPr>
             <p:cNvSpPr/>
             <p:nvPr/>
           </p:nvSpPr>
           <p:spPr>
             <a:xfrm>
-              <a:off x="3086100" y="2400300"/>
-              <a:ext cx="1943100" cy="2038350"/>
+              <a:off x="2952750" y="3162300"/>
+              <a:ext cx="57150" cy="9525"/>
+            </a:xfrm>
+            <a:custGeom>
+              <a:avLst/>
+              <a:gdLst/>
+              <a:ahLst/>
+              <a:cxnLst/>
+              <a:rect l="l" t="t" r="r" b="b"/>
+              <a:pathLst>
+                <a:path w="57150" h="9525">
+                  <a:moveTo>
+                    <a:pt x="0" y="0"/>
+                  </a:moveTo>
+                  <a:lnTo>
+                    <a:pt x="57150" y="0"/>
+                  </a:lnTo>
+                </a:path>
+              </a:pathLst>
+            </a:custGeom>
+            <a:noFill/>
+            <a:ln w="15240">
+              <a:solidFill>
+                <a:srgbClr val="E30613"/>
+              </a:solidFill>
+            </a:ln>
+          </p:spPr>
+        </p:sp>
+        <p:sp>
+          <p:nvSpPr>
+            <p:cNvPr id="72" name="Polygon 18">
+              <a:extLst>
+                <a:ext uri="{FF2B5EF4-FFF2-40B4-BE49-F238E27FC236}">
+                  <a16:creationId xmlns:a16="http://schemas.microsoft.com/office/drawing/2014/main" id="{901BA2A9-044D-457A-54E9-EF08196C9581}"/>
+                </a:ext>
+              </a:extLst>
+            </p:cNvPr>
+            <p:cNvSpPr/>
+            <p:nvPr/>
+          </p:nvSpPr>
+          <p:spPr>
+            <a:xfrm>
+              <a:off x="3016568" y="3129915"/>
+              <a:ext cx="79058" cy="64770"/>
+            </a:xfrm>
+            <a:custGeom>
+              <a:avLst/>
+              <a:gdLst/>
+              <a:ahLst/>
+              <a:cxnLst/>
+              <a:rect l="l" t="t" r="r" b="b"/>
+              <a:pathLst>
+                <a:path w="79058" h="64770">
+                  <a:moveTo>
+                    <a:pt x="79058" y="32385"/>
+                  </a:moveTo>
+                  <a:lnTo>
+                    <a:pt x="0" y="64770"/>
+                  </a:lnTo>
+                  <a:lnTo>
+                    <a:pt x="0" y="0"/>
+                  </a:lnTo>
+                  <a:close/>
+                </a:path>
+              </a:pathLst>
+            </a:custGeom>
+            <a:solidFill>
+              <a:srgbClr val="E30613"/>
+            </a:solidFill>
+            <a:ln>
+              <a:noFill/>
+            </a:ln>
+          </p:spPr>
+        </p:sp>
+        <p:sp>
+          <p:nvSpPr>
+            <p:cNvPr id="73" name="Rectangle 19">
+              <a:extLst>
+                <a:ext uri="{FF2B5EF4-FFF2-40B4-BE49-F238E27FC236}">
+                  <a16:creationId xmlns:a16="http://schemas.microsoft.com/office/drawing/2014/main" id="{18CFDC00-17CD-5246-54E1-5F7300F04813}"/>
+                </a:ext>
+              </a:extLst>
+            </p:cNvPr>
+            <p:cNvSpPr/>
+            <p:nvPr/>
+          </p:nvSpPr>
+          <p:spPr>
+            <a:xfrm>
+              <a:off x="3095625" y="2400300"/>
+              <a:ext cx="1905000" cy="1600200"/>
             </a:xfrm>
             <a:prstGeom prst="roundRect">
               <a:avLst>
-                <a:gd name="adj" fmla="val 1471"/>
+                <a:gd name="adj" fmla="val 1786"/>
               </a:avLst>
             </a:prstGeom>
             <a:solidFill>
@@ -27912,14 +28590,20 @@
         </p:sp>
         <p:sp>
           <p:nvSpPr>
-            <p:cNvPr id="16" name="Rectangle 16"/>
+            <p:cNvPr id="74" name="Rectangle 20">
+              <a:extLst>
+                <a:ext uri="{FF2B5EF4-FFF2-40B4-BE49-F238E27FC236}">
+                  <a16:creationId xmlns:a16="http://schemas.microsoft.com/office/drawing/2014/main" id="{F8C1F28C-2C3D-0814-778A-5CBEAA2820E5}"/>
+                </a:ext>
+              </a:extLst>
+            </p:cNvPr>
             <p:cNvSpPr/>
             <p:nvPr/>
           </p:nvSpPr>
           <p:spPr>
             <a:xfrm>
-              <a:off x="3086100" y="2400300"/>
-              <a:ext cx="1943100" cy="57150"/>
+              <a:off x="3095625" y="2400300"/>
+              <a:ext cx="1905000" cy="57150"/>
             </a:xfrm>
             <a:prstGeom prst="rect">
               <a:avLst/>
@@ -27934,14 +28618,48 @@
         </p:sp>
         <p:sp>
           <p:nvSpPr>
-            <p:cNvPr id="17" name="TextBox 17"/>
-            <p:cNvSpPr txBox="1"/>
-            <p:nvPr/>
-          </p:nvSpPr>
-          <p:spPr>
-            <a:xfrm>
-              <a:off x="3564706" y="2595801"/>
-              <a:ext cx="985888" cy="198025"/>
+            <p:cNvPr id="75" name="Rectangle 21">
+              <a:extLst>
+                <a:ext uri="{FF2B5EF4-FFF2-40B4-BE49-F238E27FC236}">
+                  <a16:creationId xmlns:a16="http://schemas.microsoft.com/office/drawing/2014/main" id="{0F27FD97-3A80-F87E-42E3-70C7A95F0ABC}"/>
+                </a:ext>
+              </a:extLst>
+            </p:cNvPr>
+            <p:cNvSpPr/>
+            <p:nvPr/>
+          </p:nvSpPr>
+          <p:spPr>
+            <a:xfrm>
+              <a:off x="3095625" y="2457450"/>
+              <a:ext cx="1905000" cy="190500"/>
+            </a:xfrm>
+            <a:prstGeom prst="rect">
+              <a:avLst/>
+            </a:prstGeom>
+            <a:solidFill>
+              <a:srgbClr val="F5F5F5"/>
+            </a:solidFill>
+            <a:ln>
+              <a:noFill/>
+            </a:ln>
+          </p:spPr>
+        </p:sp>
+        <p:sp>
+          <p:nvSpPr>
+            <p:cNvPr id="76" name="TextBox 22">
+              <a:extLst>
+                <a:ext uri="{FF2B5EF4-FFF2-40B4-BE49-F238E27FC236}">
+                  <a16:creationId xmlns:a16="http://schemas.microsoft.com/office/drawing/2014/main" id="{FC51DC6C-4686-9083-7A33-42A463BF2722}"/>
+                </a:ext>
+              </a:extLst>
+            </p:cNvPr>
+            <p:cNvSpPr txBox="1"/>
+            <p:nvPr/>
+          </p:nvSpPr>
+          <p:spPr>
+            <a:xfrm>
+              <a:off x="3398091" y="2592943"/>
+              <a:ext cx="1300069" cy="169069"/>
             </a:xfrm>
             <a:prstGeom prst="rect">
               <a:avLst/>
@@ -27959,29 +28677,35 @@
             <a:p>
               <a:pPr algn="ctr"/>
               <a:r>
-                <a:rPr lang="zh-CN" sz="1010" b="1" dirty="0">
+                <a:rPr lang="en-US" sz="860" b="1" dirty="0">
                   <a:solidFill>
                     <a:srgbClr val="1A1A1A"/>
                   </a:solidFill>
                   <a:latin typeface="Arial"/>
-                  <a:ea typeface="Microsoft YaHei"/>
-                  <a:cs typeface="Arial"/>
-                </a:rPr>
-                <a:t>② Graph 结构化</a:t>
-              </a:r>
-            </a:p>
-          </p:txBody>
-        </p:sp>
-        <p:sp>
-          <p:nvSpPr>
-            <p:cNvPr id="18" name="TextBox 18"/>
-            <p:cNvSpPr txBox="1"/>
-            <p:nvPr/>
-          </p:nvSpPr>
-          <p:spPr>
-            <a:xfrm>
-              <a:off x="3361614" y="2848689"/>
-              <a:ext cx="1392072" cy="154781"/>
+                  <a:ea typeface="Arial"/>
+                  <a:cs typeface="Arial"/>
+                </a:rPr>
+                <a:t>2 Context Engineering</a:t>
+              </a:r>
+            </a:p>
+          </p:txBody>
+        </p:sp>
+        <p:sp>
+          <p:nvSpPr>
+            <p:cNvPr id="77" name="TextBox 23">
+              <a:extLst>
+                <a:ext uri="{FF2B5EF4-FFF2-40B4-BE49-F238E27FC236}">
+                  <a16:creationId xmlns:a16="http://schemas.microsoft.com/office/drawing/2014/main" id="{91CC4FE3-8201-58F8-ED28-723DC40991B4}"/>
+                </a:ext>
+              </a:extLst>
+            </p:cNvPr>
+            <p:cNvSpPr txBox="1"/>
+            <p:nvPr/>
+          </p:nvSpPr>
+          <p:spPr>
+            <a:xfrm>
+              <a:off x="3753930" y="2783443"/>
+              <a:ext cx="588391" cy="169069"/>
             </a:xfrm>
             <a:prstGeom prst="rect">
               <a:avLst/>
@@ -27999,7 +28723,7 @@
             <a:p>
               <a:pPr algn="ctr"/>
               <a:r>
-                <a:rPr lang="zh-CN" sz="790" b="1" dirty="0">
+                <a:rPr lang="zh-CN" sz="860" b="1" dirty="0">
                   <a:solidFill>
                     <a:srgbClr val="E30613"/>
                   </a:solidFill>
@@ -28007,21 +28731,27 @@
                   <a:ea typeface="Microsoft YaHei"/>
                   <a:cs typeface="Arial"/>
                 </a:rPr>
-                <a:t>痛点：知识与流程关系理不清</a:t>
-              </a:r>
-            </a:p>
-          </p:txBody>
-        </p:sp>
-        <p:sp>
-          <p:nvSpPr>
-            <p:cNvPr id="19" name="Line 19"/>
+                <a:t>上下文工程</a:t>
+              </a:r>
+            </a:p>
+          </p:txBody>
+        </p:sp>
+        <p:sp>
+          <p:nvSpPr>
+            <p:cNvPr id="78" name="Line 24">
+              <a:extLst>
+                <a:ext uri="{FF2B5EF4-FFF2-40B4-BE49-F238E27FC236}">
+                  <a16:creationId xmlns:a16="http://schemas.microsoft.com/office/drawing/2014/main" id="{AD290765-CFBC-FF28-617E-4E20301F8FB8}"/>
+                </a:ext>
+              </a:extLst>
+            </p:cNvPr>
             <p:cNvSpPr/>
             <p:nvPr/>
           </p:nvSpPr>
           <p:spPr>
             <a:xfrm>
-              <a:off x="3238500" y="3086100"/>
-              <a:ext cx="1638300" cy="9525"/>
+              <a:off x="3209925" y="3009900"/>
+              <a:ext cx="1676400" cy="9525"/>
             </a:xfrm>
             <a:custGeom>
               <a:avLst/>
@@ -28030,12 +28760,12 @@
               <a:cxnLst/>
               <a:rect l="l" t="t" r="r" b="b"/>
               <a:pathLst>
-                <a:path w="1638300" h="9525">
+                <a:path w="1676400" h="9525">
                   <a:moveTo>
                     <a:pt x="0" y="0"/>
                   </a:moveTo>
                   <a:lnTo>
-                    <a:pt x="1638300" y="0"/>
+                    <a:pt x="1676400" y="0"/>
                   </a:lnTo>
                 </a:path>
               </a:pathLst>
@@ -28050,14 +28780,20 @@
         </p:sp>
         <p:sp>
           <p:nvSpPr>
-            <p:cNvPr id="20" name="TextBox 20"/>
-            <p:cNvSpPr txBox="1"/>
-            <p:nvPr/>
-          </p:nvSpPr>
-          <p:spPr>
-            <a:xfrm>
-              <a:off x="3589795" y="3221593"/>
-              <a:ext cx="935711" cy="169069"/>
+            <p:cNvPr id="79" name="TextBox 25">
+              <a:extLst>
+                <a:ext uri="{FF2B5EF4-FFF2-40B4-BE49-F238E27FC236}">
+                  <a16:creationId xmlns:a16="http://schemas.microsoft.com/office/drawing/2014/main" id="{0EEF8331-8736-E3B2-8D9C-872AC22052E7}"/>
+                </a:ext>
+              </a:extLst>
+            </p:cNvPr>
+            <p:cNvSpPr txBox="1"/>
+            <p:nvPr/>
+          </p:nvSpPr>
+          <p:spPr>
+            <a:xfrm>
+              <a:off x="3437572" y="3138488"/>
+              <a:ext cx="1221105" cy="147638"/>
             </a:xfrm>
             <a:prstGeom prst="rect">
               <a:avLst/>
@@ -28075,7 +28811,7 @@
             <a:p>
               <a:pPr algn="ctr"/>
               <a:r>
-                <a:rPr lang="zh-CN" sz="860" dirty="0">
+                <a:rPr lang="zh-CN" sz="750" dirty="0">
                   <a:solidFill>
                     <a:srgbClr val="555555"/>
                   </a:solidFill>
@@ -28083,21 +28819,27 @@
                   <a:ea typeface="Microsoft YaHei"/>
                   <a:cs typeface="Arial"/>
                 </a:rPr>
-                <a:t>知识图谱推理路径</a:t>
-              </a:r>
-            </a:p>
-          </p:txBody>
-        </p:sp>
-        <p:sp>
-          <p:nvSpPr>
-            <p:cNvPr id="21" name="TextBox 21"/>
-            <p:cNvSpPr txBox="1"/>
-            <p:nvPr/>
-          </p:nvSpPr>
-          <p:spPr>
-            <a:xfrm>
-              <a:off x="3523225" y="3488293"/>
-              <a:ext cx="1068850" cy="169069"/>
+                <a:t>解决：喂得少而准、可溯源</a:t>
+              </a:r>
+            </a:p>
+          </p:txBody>
+        </p:sp>
+        <p:sp>
+          <p:nvSpPr>
+            <p:cNvPr id="80" name="TextBox 26">
+              <a:extLst>
+                <a:ext uri="{FF2B5EF4-FFF2-40B4-BE49-F238E27FC236}">
+                  <a16:creationId xmlns:a16="http://schemas.microsoft.com/office/drawing/2014/main" id="{310B59B2-8EFF-20D4-52BF-4DB997349E9E}"/>
+                </a:ext>
+              </a:extLst>
+            </p:cNvPr>
+            <p:cNvSpPr txBox="1"/>
+            <p:nvPr/>
+          </p:nvSpPr>
+          <p:spPr>
+            <a:xfrm>
+              <a:off x="3488055" y="3367088"/>
+              <a:ext cx="1120140" cy="147638"/>
             </a:xfrm>
             <a:prstGeom prst="rect">
               <a:avLst/>
@@ -28115,7 +28857,7 @@
             <a:p>
               <a:pPr algn="ctr"/>
               <a:r>
-                <a:rPr lang="zh-CN" sz="860" dirty="0">
+                <a:rPr lang="zh-CN" sz="750" dirty="0">
                   <a:solidFill>
                     <a:srgbClr val="555555"/>
                   </a:solidFill>
@@ -28123,25 +28865,165 @@
                   <a:ea typeface="Microsoft YaHei"/>
                   <a:cs typeface="Arial"/>
                 </a:rPr>
-                <a:t>关系清晰 · 更可解释</a:t>
-              </a:r>
-            </a:p>
-          </p:txBody>
-        </p:sp>
-        <p:sp>
-          <p:nvSpPr>
-            <p:cNvPr id="22" name="Rectangle 22"/>
+                <a:t>短板：单轮装不下长任务</a:t>
+              </a:r>
+            </a:p>
+          </p:txBody>
+        </p:sp>
+        <p:sp>
+          <p:nvSpPr>
+            <p:cNvPr id="81" name="TextBox 27">
+              <a:extLst>
+                <a:ext uri="{FF2B5EF4-FFF2-40B4-BE49-F238E27FC236}">
+                  <a16:creationId xmlns:a16="http://schemas.microsoft.com/office/drawing/2014/main" id="{213070EE-6D0E-6F3B-8FD0-D0A59CA7255A}"/>
+                </a:ext>
+              </a:extLst>
+            </p:cNvPr>
+            <p:cNvSpPr txBox="1"/>
+            <p:nvPr/>
+          </p:nvSpPr>
+          <p:spPr>
+            <a:xfrm>
+              <a:off x="3716000" y="3599736"/>
+              <a:ext cx="664249" cy="140494"/>
+            </a:xfrm>
+            <a:prstGeom prst="rect">
+              <a:avLst/>
+            </a:prstGeom>
+            <a:noFill/>
+            <a:ln>
+              <a:noFill/>
+            </a:ln>
+          </p:spPr>
+          <p:txBody>
+            <a:bodyPr wrap="none" lIns="0" tIns="0" rIns="0" bIns="0" anchor="t" anchorCtr="0">
+              <a:spAutoFit/>
+            </a:bodyPr>
+            <a:lstStyle/>
+            <a:p>
+              <a:pPr algn="ctr"/>
+              <a:r>
+                <a:rPr lang="zh-CN" sz="710" dirty="0">
+                  <a:solidFill>
+                    <a:srgbClr val="999999"/>
+                  </a:solidFill>
+                  <a:latin typeface="Arial"/>
+                  <a:ea typeface="Microsoft YaHei"/>
+                  <a:cs typeface="Arial"/>
+                </a:rPr>
+                <a:t>→ 让它边干边查</a:t>
+              </a:r>
+            </a:p>
+          </p:txBody>
+        </p:sp>
+        <p:sp>
+          <p:nvSpPr>
+            <p:cNvPr id="82" name="Line 28">
+              <a:extLst>
+                <a:ext uri="{FF2B5EF4-FFF2-40B4-BE49-F238E27FC236}">
+                  <a16:creationId xmlns:a16="http://schemas.microsoft.com/office/drawing/2014/main" id="{5AF0034E-7F16-A880-BE63-6620C131F18A}"/>
+                </a:ext>
+              </a:extLst>
+            </p:cNvPr>
             <p:cNvSpPr/>
             <p:nvPr/>
           </p:nvSpPr>
           <p:spPr>
             <a:xfrm>
-              <a:off x="5124450" y="2400300"/>
-              <a:ext cx="1943100" cy="2038350"/>
+              <a:off x="5000625" y="3162300"/>
+              <a:ext cx="57150" cy="9525"/>
+            </a:xfrm>
+            <a:custGeom>
+              <a:avLst/>
+              <a:gdLst/>
+              <a:ahLst/>
+              <a:cxnLst/>
+              <a:rect l="l" t="t" r="r" b="b"/>
+              <a:pathLst>
+                <a:path w="57150" h="9525">
+                  <a:moveTo>
+                    <a:pt x="0" y="0"/>
+                  </a:moveTo>
+                  <a:lnTo>
+                    <a:pt x="57150" y="0"/>
+                  </a:lnTo>
+                </a:path>
+              </a:pathLst>
+            </a:custGeom>
+            <a:noFill/>
+            <a:ln w="15240">
+              <a:solidFill>
+                <a:srgbClr val="E30613"/>
+              </a:solidFill>
+            </a:ln>
+          </p:spPr>
+        </p:sp>
+        <p:sp>
+          <p:nvSpPr>
+            <p:cNvPr id="83" name="Polygon 29">
+              <a:extLst>
+                <a:ext uri="{FF2B5EF4-FFF2-40B4-BE49-F238E27FC236}">
+                  <a16:creationId xmlns:a16="http://schemas.microsoft.com/office/drawing/2014/main" id="{B9F7F7E5-8CA2-3B07-F6C5-EE537018313B}"/>
+                </a:ext>
+              </a:extLst>
+            </p:cNvPr>
+            <p:cNvSpPr/>
+            <p:nvPr/>
+          </p:nvSpPr>
+          <p:spPr>
+            <a:xfrm>
+              <a:off x="5064442" y="3129915"/>
+              <a:ext cx="79057" cy="64770"/>
+            </a:xfrm>
+            <a:custGeom>
+              <a:avLst/>
+              <a:gdLst/>
+              <a:ahLst/>
+              <a:cxnLst/>
+              <a:rect l="l" t="t" r="r" b="b"/>
+              <a:pathLst>
+                <a:path w="79057" h="64770">
+                  <a:moveTo>
+                    <a:pt x="79057" y="32385"/>
+                  </a:moveTo>
+                  <a:lnTo>
+                    <a:pt x="0" y="64770"/>
+                  </a:lnTo>
+                  <a:lnTo>
+                    <a:pt x="0" y="0"/>
+                  </a:lnTo>
+                  <a:close/>
+                </a:path>
+              </a:pathLst>
+            </a:custGeom>
+            <a:solidFill>
+              <a:srgbClr val="E30613"/>
+            </a:solidFill>
+            <a:ln>
+              <a:noFill/>
+            </a:ln>
+          </p:spPr>
+        </p:sp>
+        <p:sp>
+          <p:nvSpPr>
+            <p:cNvPr id="84" name="Rectangle 30">
+              <a:extLst>
+                <a:ext uri="{FF2B5EF4-FFF2-40B4-BE49-F238E27FC236}">
+                  <a16:creationId xmlns:a16="http://schemas.microsoft.com/office/drawing/2014/main" id="{6CA5D9EF-D268-95C8-EA3D-FFE7F4EB4434}"/>
+                </a:ext>
+              </a:extLst>
+            </p:cNvPr>
+            <p:cNvSpPr/>
+            <p:nvPr/>
+          </p:nvSpPr>
+          <p:spPr>
+            <a:xfrm>
+              <a:off x="5143500" y="2400300"/>
+              <a:ext cx="1905000" cy="1600200"/>
             </a:xfrm>
             <a:prstGeom prst="roundRect">
               <a:avLst>
-                <a:gd name="adj" fmla="val 1471"/>
+                <a:gd name="adj" fmla="val 1786"/>
               </a:avLst>
             </a:prstGeom>
             <a:solidFill>
@@ -28156,14 +29038,20 @@
         </p:sp>
         <p:sp>
           <p:nvSpPr>
-            <p:cNvPr id="23" name="Rectangle 23"/>
+            <p:cNvPr id="85" name="Rectangle 31">
+              <a:extLst>
+                <a:ext uri="{FF2B5EF4-FFF2-40B4-BE49-F238E27FC236}">
+                  <a16:creationId xmlns:a16="http://schemas.microsoft.com/office/drawing/2014/main" id="{1FF556C9-46A2-7C0F-52A5-28F352C5FCA4}"/>
+                </a:ext>
+              </a:extLst>
+            </p:cNvPr>
             <p:cNvSpPr/>
             <p:nvPr/>
           </p:nvSpPr>
           <p:spPr>
             <a:xfrm>
-              <a:off x="5124450" y="2400300"/>
-              <a:ext cx="1943100" cy="57150"/>
+              <a:off x="5143500" y="2400300"/>
+              <a:ext cx="1905000" cy="57150"/>
             </a:xfrm>
             <a:prstGeom prst="rect">
               <a:avLst/>
@@ -28178,14 +29066,48 @@
         </p:sp>
         <p:sp>
           <p:nvSpPr>
-            <p:cNvPr id="24" name="TextBox 24"/>
-            <p:cNvSpPr txBox="1"/>
-            <p:nvPr/>
-          </p:nvSpPr>
-          <p:spPr>
-            <a:xfrm>
-              <a:off x="5572562" y="2595801"/>
-              <a:ext cx="1046877" cy="198025"/>
+            <p:cNvPr id="86" name="Rectangle 32">
+              <a:extLst>
+                <a:ext uri="{FF2B5EF4-FFF2-40B4-BE49-F238E27FC236}">
+                  <a16:creationId xmlns:a16="http://schemas.microsoft.com/office/drawing/2014/main" id="{350C9041-4FAC-4780-DEF7-DCFD594D4357}"/>
+                </a:ext>
+              </a:extLst>
+            </p:cNvPr>
+            <p:cNvSpPr/>
+            <p:nvPr/>
+          </p:nvSpPr>
+          <p:spPr>
+            <a:xfrm>
+              <a:off x="5143500" y="2457450"/>
+              <a:ext cx="1905000" cy="190500"/>
+            </a:xfrm>
+            <a:prstGeom prst="rect">
+              <a:avLst/>
+            </a:prstGeom>
+            <a:solidFill>
+              <a:srgbClr val="F5F5F5"/>
+            </a:solidFill>
+            <a:ln>
+              <a:noFill/>
+            </a:ln>
+          </p:spPr>
+        </p:sp>
+        <p:sp>
+          <p:nvSpPr>
+            <p:cNvPr id="87" name="TextBox 33">
+              <a:extLst>
+                <a:ext uri="{FF2B5EF4-FFF2-40B4-BE49-F238E27FC236}">
+                  <a16:creationId xmlns:a16="http://schemas.microsoft.com/office/drawing/2014/main" id="{7914BE42-A9FE-D6E3-26EB-FEF479B07A45}"/>
+                </a:ext>
+              </a:extLst>
+            </p:cNvPr>
+            <p:cNvSpPr txBox="1"/>
+            <p:nvPr/>
+          </p:nvSpPr>
+          <p:spPr>
+            <a:xfrm>
+              <a:off x="5546205" y="2592943"/>
+              <a:ext cx="1099591" cy="169069"/>
             </a:xfrm>
             <a:prstGeom prst="rect">
               <a:avLst/>
@@ -28203,29 +29125,35 @@
             <a:p>
               <a:pPr algn="ctr"/>
               <a:r>
-                <a:rPr lang="zh-CN" sz="1010" b="1" dirty="0">
+                <a:rPr lang="en-US" sz="860" b="1" dirty="0">
                   <a:solidFill>
                     <a:srgbClr val="1A1A1A"/>
                   </a:solidFill>
                   <a:latin typeface="Arial"/>
-                  <a:ea typeface="Microsoft YaHei"/>
-                  <a:cs typeface="Arial"/>
-                </a:rPr>
-                <a:t>③ Loop 反馈循环</a:t>
-              </a:r>
-            </a:p>
-          </p:txBody>
-        </p:sp>
-        <p:sp>
-          <p:nvSpPr>
-            <p:cNvPr id="25" name="TextBox 25"/>
-            <p:cNvSpPr txBox="1"/>
-            <p:nvPr/>
-          </p:nvSpPr>
-          <p:spPr>
-            <a:xfrm>
-              <a:off x="5559488" y="2848689"/>
-              <a:ext cx="1073023" cy="154781"/>
+                  <a:ea typeface="Arial"/>
+                  <a:cs typeface="Arial"/>
+                </a:rPr>
+                <a:t>3 Loop Engineering</a:t>
+              </a:r>
+            </a:p>
+          </p:txBody>
+        </p:sp>
+        <p:sp>
+          <p:nvSpPr>
+            <p:cNvPr id="88" name="TextBox 34">
+              <a:extLst>
+                <a:ext uri="{FF2B5EF4-FFF2-40B4-BE49-F238E27FC236}">
+                  <a16:creationId xmlns:a16="http://schemas.microsoft.com/office/drawing/2014/main" id="{1B397330-FA73-3ABC-5655-6942616795D9}"/>
+                </a:ext>
+              </a:extLst>
+            </p:cNvPr>
+            <p:cNvSpPr txBox="1"/>
+            <p:nvPr/>
+          </p:nvSpPr>
+          <p:spPr>
+            <a:xfrm>
+              <a:off x="5859691" y="2783443"/>
+              <a:ext cx="472618" cy="169069"/>
             </a:xfrm>
             <a:prstGeom prst="rect">
               <a:avLst/>
@@ -28243,7 +29171,7 @@
             <a:p>
               <a:pPr algn="ctr"/>
               <a:r>
-                <a:rPr lang="zh-CN" sz="790" b="1" dirty="0">
+                <a:rPr lang="zh-CN" sz="860" b="1" dirty="0">
                   <a:solidFill>
                     <a:srgbClr val="E30613"/>
                   </a:solidFill>
@@ -28251,21 +29179,27 @@
                   <a:ea typeface="Microsoft YaHei"/>
                   <a:cs typeface="Arial"/>
                 </a:rPr>
-                <a:t>痛点：做错了没人纠正</a:t>
-              </a:r>
-            </a:p>
-          </p:txBody>
-        </p:sp>
-        <p:sp>
-          <p:nvSpPr>
-            <p:cNvPr id="26" name="Line 26"/>
+                <a:t>循环工程</a:t>
+              </a:r>
+            </a:p>
+          </p:txBody>
+        </p:sp>
+        <p:sp>
+          <p:nvSpPr>
+            <p:cNvPr id="89" name="Line 35">
+              <a:extLst>
+                <a:ext uri="{FF2B5EF4-FFF2-40B4-BE49-F238E27FC236}">
+                  <a16:creationId xmlns:a16="http://schemas.microsoft.com/office/drawing/2014/main" id="{C4A19274-289A-D81F-F7A1-102DB198E011}"/>
+                </a:ext>
+              </a:extLst>
+            </p:cNvPr>
             <p:cNvSpPr/>
             <p:nvPr/>
           </p:nvSpPr>
           <p:spPr>
             <a:xfrm>
-              <a:off x="5276850" y="3086100"/>
-              <a:ext cx="1638300" cy="9525"/>
+              <a:off x="5257800" y="3009900"/>
+              <a:ext cx="1676400" cy="9525"/>
             </a:xfrm>
             <a:custGeom>
               <a:avLst/>
@@ -28274,12 +29208,12 @@
               <a:cxnLst/>
               <a:rect l="l" t="t" r="r" b="b"/>
               <a:pathLst>
-                <a:path w="1638300" h="9525">
+                <a:path w="1676400" h="9525">
                   <a:moveTo>
                     <a:pt x="0" y="0"/>
                   </a:moveTo>
                   <a:lnTo>
-                    <a:pt x="1638300" y="0"/>
+                    <a:pt x="1676400" y="0"/>
                   </a:lnTo>
                 </a:path>
               </a:pathLst>
@@ -28294,14 +29228,20 @@
         </p:sp>
         <p:sp>
           <p:nvSpPr>
-            <p:cNvPr id="27" name="TextBox 27"/>
-            <p:cNvSpPr txBox="1"/>
-            <p:nvPr/>
-          </p:nvSpPr>
-          <p:spPr>
-            <a:xfrm>
-              <a:off x="5686031" y="3221593"/>
-              <a:ext cx="819937" cy="169069"/>
+            <p:cNvPr id="90" name="TextBox 36">
+              <a:extLst>
+                <a:ext uri="{FF2B5EF4-FFF2-40B4-BE49-F238E27FC236}">
+                  <a16:creationId xmlns:a16="http://schemas.microsoft.com/office/drawing/2014/main" id="{55D09573-D2ED-6802-E9C9-6F734EB29DE9}"/>
+                </a:ext>
+              </a:extLst>
+            </p:cNvPr>
+            <p:cNvSpPr txBox="1"/>
+            <p:nvPr/>
+          </p:nvSpPr>
+          <p:spPr>
+            <a:xfrm>
+              <a:off x="5328952" y="3138488"/>
+              <a:ext cx="1534096" cy="147638"/>
             </a:xfrm>
             <a:prstGeom prst="rect">
               <a:avLst/>
@@ -28319,7 +29259,7 @@
             <a:p>
               <a:pPr algn="ctr"/>
               <a:r>
-                <a:rPr lang="zh-CN" sz="860" dirty="0">
+                <a:rPr lang="zh-CN" sz="750" dirty="0">
                   <a:solidFill>
                     <a:srgbClr val="555555"/>
                   </a:solidFill>
@@ -28327,21 +29267,27 @@
                   <a:ea typeface="Microsoft YaHei"/>
                   <a:cs typeface="Arial"/>
                 </a:rPr>
-                <a:t>自我纠错与迭代</a:t>
-              </a:r>
-            </a:p>
-          </p:txBody>
-        </p:sp>
-        <p:sp>
-          <p:nvSpPr>
-            <p:cNvPr id="28" name="TextBox 28"/>
-            <p:cNvSpPr txBox="1"/>
-            <p:nvPr/>
-          </p:nvSpPr>
-          <p:spPr>
-            <a:xfrm>
-              <a:off x="5743918" y="3488293"/>
-              <a:ext cx="704164" cy="169069"/>
+                <a:t>解决：执行→检查→反馈，自我迭代</a:t>
+              </a:r>
+            </a:p>
+          </p:txBody>
+        </p:sp>
+        <p:sp>
+          <p:nvSpPr>
+            <p:cNvPr id="91" name="TextBox 37">
+              <a:extLst>
+                <a:ext uri="{FF2B5EF4-FFF2-40B4-BE49-F238E27FC236}">
+                  <a16:creationId xmlns:a16="http://schemas.microsoft.com/office/drawing/2014/main" id="{0E4CC307-0141-3E7B-C58A-3B9C8B5D9543}"/>
+                </a:ext>
+              </a:extLst>
+            </p:cNvPr>
+            <p:cNvSpPr txBox="1"/>
+            <p:nvPr/>
+          </p:nvSpPr>
+          <p:spPr>
+            <a:xfrm>
+              <a:off x="5535930" y="3367088"/>
+              <a:ext cx="1120140" cy="147638"/>
             </a:xfrm>
             <a:prstGeom prst="rect">
               <a:avLst/>
@@ -28359,7 +29305,7 @@
             <a:p>
               <a:pPr algn="ctr"/>
               <a:r>
-                <a:rPr lang="zh-CN" sz="860" dirty="0">
+                <a:rPr lang="zh-CN" sz="750" dirty="0">
                   <a:solidFill>
                     <a:srgbClr val="555555"/>
                   </a:solidFill>
@@ -28367,25 +29313,165 @@
                   <a:ea typeface="Microsoft YaHei"/>
                   <a:cs typeface="Arial"/>
                 </a:rPr>
-                <a:t>评估驱动改进</a:t>
-              </a:r>
-            </a:p>
-          </p:txBody>
-        </p:sp>
-        <p:sp>
-          <p:nvSpPr>
-            <p:cNvPr id="29" name="Rectangle 29"/>
+                <a:t>短板：缺权限与护栏兜底</a:t>
+              </a:r>
+            </a:p>
+          </p:txBody>
+        </p:sp>
+        <p:sp>
+          <p:nvSpPr>
+            <p:cNvPr id="92" name="TextBox 38">
+              <a:extLst>
+                <a:ext uri="{FF2B5EF4-FFF2-40B4-BE49-F238E27FC236}">
+                  <a16:creationId xmlns:a16="http://schemas.microsoft.com/office/drawing/2014/main" id="{87BBBF24-57E9-67A4-C59C-7DD92A93F344}"/>
+                </a:ext>
+              </a:extLst>
+            </p:cNvPr>
+            <p:cNvSpPr txBox="1"/>
+            <p:nvPr/>
+          </p:nvSpPr>
+          <p:spPr>
+            <a:xfrm>
+              <a:off x="5716085" y="3599736"/>
+              <a:ext cx="759830" cy="140494"/>
+            </a:xfrm>
+            <a:prstGeom prst="rect">
+              <a:avLst/>
+            </a:prstGeom>
+            <a:noFill/>
+            <a:ln>
+              <a:noFill/>
+            </a:ln>
+          </p:spPr>
+          <p:txBody>
+            <a:bodyPr wrap="none" lIns="0" tIns="0" rIns="0" bIns="0" anchor="t" anchorCtr="0">
+              <a:spAutoFit/>
+            </a:bodyPr>
+            <a:lstStyle/>
+            <a:p>
+              <a:pPr algn="ctr"/>
+              <a:r>
+                <a:rPr lang="zh-CN" sz="710" dirty="0">
+                  <a:solidFill>
+                    <a:srgbClr val="999999"/>
+                  </a:solidFill>
+                  <a:latin typeface="Arial"/>
+                  <a:ea typeface="Microsoft YaHei"/>
+                  <a:cs typeface="Arial"/>
+                </a:rPr>
+                <a:t>→ 外面加一层外壳</a:t>
+              </a:r>
+            </a:p>
+          </p:txBody>
+        </p:sp>
+        <p:sp>
+          <p:nvSpPr>
+            <p:cNvPr id="93" name="Line 39">
+              <a:extLst>
+                <a:ext uri="{FF2B5EF4-FFF2-40B4-BE49-F238E27FC236}">
+                  <a16:creationId xmlns:a16="http://schemas.microsoft.com/office/drawing/2014/main" id="{1037C10C-0C22-3FB2-8B8C-68831BF03766}"/>
+                </a:ext>
+              </a:extLst>
+            </p:cNvPr>
             <p:cNvSpPr/>
             <p:nvPr/>
           </p:nvSpPr>
           <p:spPr>
             <a:xfrm>
-              <a:off x="7162800" y="2400300"/>
-              <a:ext cx="1943100" cy="2038350"/>
+              <a:off x="7048500" y="3162300"/>
+              <a:ext cx="57150" cy="9525"/>
+            </a:xfrm>
+            <a:custGeom>
+              <a:avLst/>
+              <a:gdLst/>
+              <a:ahLst/>
+              <a:cxnLst/>
+              <a:rect l="l" t="t" r="r" b="b"/>
+              <a:pathLst>
+                <a:path w="57150" h="9525">
+                  <a:moveTo>
+                    <a:pt x="0" y="0"/>
+                  </a:moveTo>
+                  <a:lnTo>
+                    <a:pt x="57150" y="0"/>
+                  </a:lnTo>
+                </a:path>
+              </a:pathLst>
+            </a:custGeom>
+            <a:noFill/>
+            <a:ln w="15240">
+              <a:solidFill>
+                <a:srgbClr val="E30613"/>
+              </a:solidFill>
+            </a:ln>
+          </p:spPr>
+        </p:sp>
+        <p:sp>
+          <p:nvSpPr>
+            <p:cNvPr id="94" name="Polygon 40">
+              <a:extLst>
+                <a:ext uri="{FF2B5EF4-FFF2-40B4-BE49-F238E27FC236}">
+                  <a16:creationId xmlns:a16="http://schemas.microsoft.com/office/drawing/2014/main" id="{09589A27-DE07-A237-05A8-AF1C1A1B204A}"/>
+                </a:ext>
+              </a:extLst>
+            </p:cNvPr>
+            <p:cNvSpPr/>
+            <p:nvPr/>
+          </p:nvSpPr>
+          <p:spPr>
+            <a:xfrm>
+              <a:off x="7112318" y="3129915"/>
+              <a:ext cx="79057" cy="64770"/>
+            </a:xfrm>
+            <a:custGeom>
+              <a:avLst/>
+              <a:gdLst/>
+              <a:ahLst/>
+              <a:cxnLst/>
+              <a:rect l="l" t="t" r="r" b="b"/>
+              <a:pathLst>
+                <a:path w="79057" h="64770">
+                  <a:moveTo>
+                    <a:pt x="79057" y="32385"/>
+                  </a:moveTo>
+                  <a:lnTo>
+                    <a:pt x="0" y="64770"/>
+                  </a:lnTo>
+                  <a:lnTo>
+                    <a:pt x="0" y="0"/>
+                  </a:lnTo>
+                  <a:close/>
+                </a:path>
+              </a:pathLst>
+            </a:custGeom>
+            <a:solidFill>
+              <a:srgbClr val="E30613"/>
+            </a:solidFill>
+            <a:ln>
+              <a:noFill/>
+            </a:ln>
+          </p:spPr>
+        </p:sp>
+        <p:sp>
+          <p:nvSpPr>
+            <p:cNvPr id="95" name="Rectangle 41">
+              <a:extLst>
+                <a:ext uri="{FF2B5EF4-FFF2-40B4-BE49-F238E27FC236}">
+                  <a16:creationId xmlns:a16="http://schemas.microsoft.com/office/drawing/2014/main" id="{E031DE5D-ED15-7E16-72B0-51C2A3F93A43}"/>
+                </a:ext>
+              </a:extLst>
+            </p:cNvPr>
+            <p:cNvSpPr/>
+            <p:nvPr/>
+          </p:nvSpPr>
+          <p:spPr>
+            <a:xfrm>
+              <a:off x="7191375" y="2400300"/>
+              <a:ext cx="1905000" cy="1600200"/>
             </a:xfrm>
             <a:prstGeom prst="roundRect">
               <a:avLst>
-                <a:gd name="adj" fmla="val 1471"/>
+                <a:gd name="adj" fmla="val 1786"/>
               </a:avLst>
             </a:prstGeom>
             <a:solidFill>
@@ -28400,14 +29486,20 @@
         </p:sp>
         <p:sp>
           <p:nvSpPr>
-            <p:cNvPr id="30" name="Rectangle 30"/>
+            <p:cNvPr id="96" name="Rectangle 42">
+              <a:extLst>
+                <a:ext uri="{FF2B5EF4-FFF2-40B4-BE49-F238E27FC236}">
+                  <a16:creationId xmlns:a16="http://schemas.microsoft.com/office/drawing/2014/main" id="{0D766C8B-6379-0B4F-A88B-2C3C242582FB}"/>
+                </a:ext>
+              </a:extLst>
+            </p:cNvPr>
             <p:cNvSpPr/>
             <p:nvPr/>
           </p:nvSpPr>
           <p:spPr>
             <a:xfrm>
-              <a:off x="7162800" y="2400300"/>
-              <a:ext cx="1943100" cy="57150"/>
+              <a:off x="7191375" y="2400300"/>
+              <a:ext cx="1905000" cy="57150"/>
             </a:xfrm>
             <a:prstGeom prst="rect">
               <a:avLst/>
@@ -28422,14 +29514,48 @@
         </p:sp>
         <p:sp>
           <p:nvSpPr>
-            <p:cNvPr id="31" name="TextBox 31"/>
-            <p:cNvSpPr txBox="1"/>
-            <p:nvPr/>
-          </p:nvSpPr>
-          <p:spPr>
-            <a:xfrm>
-              <a:off x="7571178" y="2595801"/>
-              <a:ext cx="1126344" cy="198025"/>
+            <p:cNvPr id="97" name="Rectangle 43">
+              <a:extLst>
+                <a:ext uri="{FF2B5EF4-FFF2-40B4-BE49-F238E27FC236}">
+                  <a16:creationId xmlns:a16="http://schemas.microsoft.com/office/drawing/2014/main" id="{1393A65C-7C0A-CE50-27F1-AB4EC9DCC1E4}"/>
+                </a:ext>
+              </a:extLst>
+            </p:cNvPr>
+            <p:cNvSpPr/>
+            <p:nvPr/>
+          </p:nvSpPr>
+          <p:spPr>
+            <a:xfrm>
+              <a:off x="7191375" y="2457450"/>
+              <a:ext cx="1905000" cy="190500"/>
+            </a:xfrm>
+            <a:prstGeom prst="rect">
+              <a:avLst/>
+            </a:prstGeom>
+            <a:solidFill>
+              <a:srgbClr val="F5F5F5"/>
+            </a:solidFill>
+            <a:ln>
+              <a:noFill/>
+            </a:ln>
+          </p:spPr>
+        </p:sp>
+        <p:sp>
+          <p:nvSpPr>
+            <p:cNvPr id="98" name="TextBox 44">
+              <a:extLst>
+                <a:ext uri="{FF2B5EF4-FFF2-40B4-BE49-F238E27FC236}">
+                  <a16:creationId xmlns:a16="http://schemas.microsoft.com/office/drawing/2014/main" id="{9E9628A5-E4FA-887B-03C6-6459C2C6D2F7}"/>
+                </a:ext>
+              </a:extLst>
+            </p:cNvPr>
+            <p:cNvSpPr txBox="1"/>
+            <p:nvPr/>
+          </p:nvSpPr>
+          <p:spPr>
+            <a:xfrm>
+              <a:off x="7493841" y="2592943"/>
+              <a:ext cx="1300069" cy="169069"/>
             </a:xfrm>
             <a:prstGeom prst="rect">
               <a:avLst/>
@@ -28447,29 +29573,35 @@
             <a:p>
               <a:pPr algn="ctr"/>
               <a:r>
-                <a:rPr lang="zh-CN" sz="1010" b="1" dirty="0">
+                <a:rPr lang="en-US" sz="860" b="1" dirty="0">
                   <a:solidFill>
                     <a:srgbClr val="1A1A1A"/>
                   </a:solidFill>
                   <a:latin typeface="Arial"/>
-                  <a:ea typeface="Microsoft YaHei"/>
-                  <a:cs typeface="Arial"/>
-                </a:rPr>
-                <a:t>④ Harness / 安全</a:t>
-              </a:r>
-            </a:p>
-          </p:txBody>
-        </p:sp>
-        <p:sp>
-          <p:nvSpPr>
-            <p:cNvPr id="32" name="TextBox 32"/>
-            <p:cNvSpPr txBox="1"/>
-            <p:nvPr/>
-          </p:nvSpPr>
-          <p:spPr>
-            <a:xfrm>
-              <a:off x="7438314" y="2848689"/>
-              <a:ext cx="1392072" cy="154781"/>
+                  <a:ea typeface="Arial"/>
+                  <a:cs typeface="Arial"/>
+                </a:rPr>
+                <a:t>4 Harness Engineering</a:t>
+              </a:r>
+            </a:p>
+          </p:txBody>
+        </p:sp>
+        <p:sp>
+          <p:nvSpPr>
+            <p:cNvPr id="99" name="TextBox 45">
+              <a:extLst>
+                <a:ext uri="{FF2B5EF4-FFF2-40B4-BE49-F238E27FC236}">
+                  <a16:creationId xmlns:a16="http://schemas.microsoft.com/office/drawing/2014/main" id="{B26DFA58-0FF4-8821-4944-E3B852A8AEB0}"/>
+                </a:ext>
+              </a:extLst>
+            </p:cNvPr>
+            <p:cNvSpPr txBox="1"/>
+            <p:nvPr/>
+          </p:nvSpPr>
+          <p:spPr>
+            <a:xfrm>
+              <a:off x="7849680" y="2783443"/>
+              <a:ext cx="588391" cy="169069"/>
             </a:xfrm>
             <a:prstGeom prst="rect">
               <a:avLst/>
@@ -28487,7 +29619,7 @@
             <a:p>
               <a:pPr algn="ctr"/>
               <a:r>
-                <a:rPr lang="zh-CN" sz="790" b="1" dirty="0">
+                <a:rPr lang="zh-CN" sz="860" b="1" dirty="0">
                   <a:solidFill>
                     <a:srgbClr val="E30613"/>
                   </a:solidFill>
@@ -28495,21 +29627,27 @@
                   <a:ea typeface="Microsoft YaHei"/>
                   <a:cs typeface="Arial"/>
                 </a:rPr>
-                <a:t>痛点：能执行了，怕越权乱来</a:t>
-              </a:r>
-            </a:p>
-          </p:txBody>
-        </p:sp>
-        <p:sp>
-          <p:nvSpPr>
-            <p:cNvPr id="33" name="Line 33"/>
+                <a:t>生产化外壳</a:t>
+              </a:r>
+            </a:p>
+          </p:txBody>
+        </p:sp>
+        <p:sp>
+          <p:nvSpPr>
+            <p:cNvPr id="100" name="Line 46">
+              <a:extLst>
+                <a:ext uri="{FF2B5EF4-FFF2-40B4-BE49-F238E27FC236}">
+                  <a16:creationId xmlns:a16="http://schemas.microsoft.com/office/drawing/2014/main" id="{6AFB567D-2C20-5D76-DAFF-32AF5AB03473}"/>
+                </a:ext>
+              </a:extLst>
+            </p:cNvPr>
             <p:cNvSpPr/>
             <p:nvPr/>
           </p:nvSpPr>
           <p:spPr>
             <a:xfrm>
-              <a:off x="7315200" y="3086100"/>
-              <a:ext cx="1638300" cy="9525"/>
+              <a:off x="7305675" y="3009900"/>
+              <a:ext cx="1676400" cy="9525"/>
             </a:xfrm>
             <a:custGeom>
               <a:avLst/>
@@ -28518,12 +29656,12 @@
               <a:cxnLst/>
               <a:rect l="l" t="t" r="r" b="b"/>
               <a:pathLst>
-                <a:path w="1638300" h="9525">
+                <a:path w="1676400" h="9525">
                   <a:moveTo>
                     <a:pt x="0" y="0"/>
                   </a:moveTo>
                   <a:lnTo>
-                    <a:pt x="1638300" y="0"/>
+                    <a:pt x="1676400" y="0"/>
                   </a:lnTo>
                 </a:path>
               </a:pathLst>
@@ -28538,14 +29676,20 @@
         </p:sp>
         <p:sp>
           <p:nvSpPr>
-            <p:cNvPr id="34" name="TextBox 34"/>
-            <p:cNvSpPr txBox="1"/>
-            <p:nvPr/>
-          </p:nvSpPr>
-          <p:spPr>
-            <a:xfrm>
-              <a:off x="7649129" y="3221593"/>
-              <a:ext cx="970443" cy="169069"/>
+            <p:cNvPr id="101" name="TextBox 47">
+              <a:extLst>
+                <a:ext uri="{FF2B5EF4-FFF2-40B4-BE49-F238E27FC236}">
+                  <a16:creationId xmlns:a16="http://schemas.microsoft.com/office/drawing/2014/main" id="{0F07FA72-80FA-37A5-580F-76B5DF4D8E15}"/>
+                </a:ext>
+              </a:extLst>
+            </p:cNvPr>
+            <p:cNvSpPr txBox="1"/>
+            <p:nvPr/>
+          </p:nvSpPr>
+          <p:spPr>
+            <a:xfrm>
+              <a:off x="7321296" y="3138488"/>
+              <a:ext cx="1645158" cy="147638"/>
             </a:xfrm>
             <a:prstGeom prst="rect">
               <a:avLst/>
@@ -28563,7 +29707,7 @@
             <a:p>
               <a:pPr algn="ctr"/>
               <a:r>
-                <a:rPr lang="zh-CN" sz="860" dirty="0">
+                <a:rPr lang="zh-CN" sz="750" dirty="0">
                   <a:solidFill>
                     <a:srgbClr val="555555"/>
                   </a:solidFill>
@@ -28571,21 +29715,27 @@
                   <a:ea typeface="Microsoft YaHei"/>
                   <a:cs typeface="Arial"/>
                 </a:rPr>
-                <a:t>护栏 · 沙箱 · 评估</a:t>
-              </a:r>
-            </a:p>
-          </p:txBody>
-        </p:sp>
-        <p:sp>
-          <p:nvSpPr>
-            <p:cNvPr id="35" name="TextBox 35"/>
-            <p:cNvSpPr txBox="1"/>
-            <p:nvPr/>
-          </p:nvSpPr>
-          <p:spPr>
-            <a:xfrm>
-              <a:off x="7649129" y="3488293"/>
-              <a:ext cx="970443" cy="169069"/>
+                <a:t>解决：管权限·记忆·沙箱·日志·接管</a:t>
+              </a:r>
+            </a:p>
+          </p:txBody>
+        </p:sp>
+        <p:sp>
+          <p:nvSpPr>
+            <p:cNvPr id="102" name="TextBox 48">
+              <a:extLst>
+                <a:ext uri="{FF2B5EF4-FFF2-40B4-BE49-F238E27FC236}">
+                  <a16:creationId xmlns:a16="http://schemas.microsoft.com/office/drawing/2014/main" id="{BD4EF8A7-5514-4904-5066-4F4B55554512}"/>
+                </a:ext>
+              </a:extLst>
+            </p:cNvPr>
+            <p:cNvSpPr txBox="1"/>
+            <p:nvPr/>
+          </p:nvSpPr>
+          <p:spPr>
+            <a:xfrm>
+              <a:off x="7432358" y="3367088"/>
+              <a:ext cx="1423035" cy="147638"/>
             </a:xfrm>
             <a:prstGeom prst="rect">
               <a:avLst/>
@@ -28603,7 +29753,7 @@
             <a:p>
               <a:pPr algn="ctr"/>
               <a:r>
-                <a:rPr lang="zh-CN" sz="860" dirty="0">
+                <a:rPr lang="zh-CN" sz="750" dirty="0">
                   <a:solidFill>
                     <a:srgbClr val="555555"/>
                   </a:solidFill>
@@ -28611,25 +29761,165 @@
                   <a:ea typeface="Microsoft YaHei"/>
                   <a:cs typeface="Arial"/>
                 </a:rPr>
-                <a:t>对齐 · 合规 · 审计</a:t>
-              </a:r>
-            </a:p>
-          </p:txBody>
-        </p:sp>
-        <p:sp>
-          <p:nvSpPr>
-            <p:cNvPr id="36" name="Rectangle 36"/>
+                <a:t>短板：一条线表达不了复杂流程</a:t>
+              </a:r>
+            </a:p>
+          </p:txBody>
+        </p:sp>
+        <p:sp>
+          <p:nvSpPr>
+            <p:cNvPr id="103" name="TextBox 49">
+              <a:extLst>
+                <a:ext uri="{FF2B5EF4-FFF2-40B4-BE49-F238E27FC236}">
+                  <a16:creationId xmlns:a16="http://schemas.microsoft.com/office/drawing/2014/main" id="{D8A05BC5-D78D-6627-ACD0-1AA841578DDA}"/>
+                </a:ext>
+              </a:extLst>
+            </p:cNvPr>
+            <p:cNvSpPr txBox="1"/>
+            <p:nvPr/>
+          </p:nvSpPr>
+          <p:spPr>
+            <a:xfrm>
+              <a:off x="7763960" y="3599736"/>
+              <a:ext cx="759830" cy="140494"/>
+            </a:xfrm>
+            <a:prstGeom prst="rect">
+              <a:avLst/>
+            </a:prstGeom>
+            <a:noFill/>
+            <a:ln>
+              <a:noFill/>
+            </a:ln>
+          </p:spPr>
+          <p:txBody>
+            <a:bodyPr wrap="none" lIns="0" tIns="0" rIns="0" bIns="0" anchor="t" anchorCtr="0">
+              <a:spAutoFit/>
+            </a:bodyPr>
+            <a:lstStyle/>
+            <a:p>
+              <a:pPr algn="ctr"/>
+              <a:r>
+                <a:rPr lang="zh-CN" sz="710" dirty="0">
+                  <a:solidFill>
+                    <a:srgbClr val="999999"/>
+                  </a:solidFill>
+                  <a:latin typeface="Arial"/>
+                  <a:ea typeface="Microsoft YaHei"/>
+                  <a:cs typeface="Arial"/>
+                </a:rPr>
+                <a:t>→ 多条路径排成图</a:t>
+              </a:r>
+            </a:p>
+          </p:txBody>
+        </p:sp>
+        <p:sp>
+          <p:nvSpPr>
+            <p:cNvPr id="104" name="Line 50">
+              <a:extLst>
+                <a:ext uri="{FF2B5EF4-FFF2-40B4-BE49-F238E27FC236}">
+                  <a16:creationId xmlns:a16="http://schemas.microsoft.com/office/drawing/2014/main" id="{B1B2E92F-C110-1660-0CD9-A300F4989C52}"/>
+                </a:ext>
+              </a:extLst>
+            </p:cNvPr>
             <p:cNvSpPr/>
             <p:nvPr/>
           </p:nvSpPr>
           <p:spPr>
             <a:xfrm>
-              <a:off x="9201150" y="2400300"/>
-              <a:ext cx="1943100" cy="2038350"/>
+              <a:off x="9096375" y="3162300"/>
+              <a:ext cx="57150" cy="9525"/>
+            </a:xfrm>
+            <a:custGeom>
+              <a:avLst/>
+              <a:gdLst/>
+              <a:ahLst/>
+              <a:cxnLst/>
+              <a:rect l="l" t="t" r="r" b="b"/>
+              <a:pathLst>
+                <a:path w="57150" h="9525">
+                  <a:moveTo>
+                    <a:pt x="0" y="0"/>
+                  </a:moveTo>
+                  <a:lnTo>
+                    <a:pt x="57150" y="0"/>
+                  </a:lnTo>
+                </a:path>
+              </a:pathLst>
+            </a:custGeom>
+            <a:noFill/>
+            <a:ln w="15240">
+              <a:solidFill>
+                <a:srgbClr val="E30613"/>
+              </a:solidFill>
+            </a:ln>
+          </p:spPr>
+        </p:sp>
+        <p:sp>
+          <p:nvSpPr>
+            <p:cNvPr id="105" name="Polygon 51">
+              <a:extLst>
+                <a:ext uri="{FF2B5EF4-FFF2-40B4-BE49-F238E27FC236}">
+                  <a16:creationId xmlns:a16="http://schemas.microsoft.com/office/drawing/2014/main" id="{316C0B92-CB95-E05B-8CF7-C1244A3F758D}"/>
+                </a:ext>
+              </a:extLst>
+            </p:cNvPr>
+            <p:cNvSpPr/>
+            <p:nvPr/>
+          </p:nvSpPr>
+          <p:spPr>
+            <a:xfrm>
+              <a:off x="9160192" y="3129915"/>
+              <a:ext cx="79057" cy="64770"/>
+            </a:xfrm>
+            <a:custGeom>
+              <a:avLst/>
+              <a:gdLst/>
+              <a:ahLst/>
+              <a:cxnLst/>
+              <a:rect l="l" t="t" r="r" b="b"/>
+              <a:pathLst>
+                <a:path w="79057" h="64770">
+                  <a:moveTo>
+                    <a:pt x="79057" y="32385"/>
+                  </a:moveTo>
+                  <a:lnTo>
+                    <a:pt x="0" y="64770"/>
+                  </a:lnTo>
+                  <a:lnTo>
+                    <a:pt x="0" y="0"/>
+                  </a:lnTo>
+                  <a:close/>
+                </a:path>
+              </a:pathLst>
+            </a:custGeom>
+            <a:solidFill>
+              <a:srgbClr val="E30613"/>
+            </a:solidFill>
+            <a:ln>
+              <a:noFill/>
+            </a:ln>
+          </p:spPr>
+        </p:sp>
+        <p:sp>
+          <p:nvSpPr>
+            <p:cNvPr id="106" name="Rectangle 52">
+              <a:extLst>
+                <a:ext uri="{FF2B5EF4-FFF2-40B4-BE49-F238E27FC236}">
+                  <a16:creationId xmlns:a16="http://schemas.microsoft.com/office/drawing/2014/main" id="{7777067B-EAD0-7D9E-E813-FFF166F1AAAD}"/>
+                </a:ext>
+              </a:extLst>
+            </p:cNvPr>
+            <p:cNvSpPr/>
+            <p:nvPr/>
+          </p:nvSpPr>
+          <p:spPr>
+            <a:xfrm>
+              <a:off x="9239250" y="2400300"/>
+              <a:ext cx="1905000" cy="1600200"/>
             </a:xfrm>
             <a:prstGeom prst="roundRect">
               <a:avLst>
-                <a:gd name="adj" fmla="val 1471"/>
+                <a:gd name="adj" fmla="val 1786"/>
               </a:avLst>
             </a:prstGeom>
             <a:solidFill>
@@ -28644,14 +29934,20 @@
         </p:sp>
         <p:sp>
           <p:nvSpPr>
-            <p:cNvPr id="37" name="Rectangle 37"/>
+            <p:cNvPr id="107" name="Rectangle 53">
+              <a:extLst>
+                <a:ext uri="{FF2B5EF4-FFF2-40B4-BE49-F238E27FC236}">
+                  <a16:creationId xmlns:a16="http://schemas.microsoft.com/office/drawing/2014/main" id="{51055ED6-4A86-EB6F-875B-58EDED73D797}"/>
+                </a:ext>
+              </a:extLst>
+            </p:cNvPr>
             <p:cNvSpPr/>
             <p:nvPr/>
           </p:nvSpPr>
           <p:spPr>
             <a:xfrm>
-              <a:off x="9201150" y="2400300"/>
-              <a:ext cx="1943100" cy="57150"/>
+              <a:off x="9239250" y="2400300"/>
+              <a:ext cx="1905000" cy="57150"/>
             </a:xfrm>
             <a:prstGeom prst="rect">
               <a:avLst/>
@@ -28666,14 +29962,48 @@
         </p:sp>
         <p:sp>
           <p:nvSpPr>
-            <p:cNvPr id="38" name="TextBox 38"/>
-            <p:cNvSpPr txBox="1"/>
-            <p:nvPr/>
-          </p:nvSpPr>
-          <p:spPr>
-            <a:xfrm>
-              <a:off x="9658099" y="2595801"/>
-              <a:ext cx="1029202" cy="198025"/>
+            <p:cNvPr id="108" name="Rectangle 54">
+              <a:extLst>
+                <a:ext uri="{FF2B5EF4-FFF2-40B4-BE49-F238E27FC236}">
+                  <a16:creationId xmlns:a16="http://schemas.microsoft.com/office/drawing/2014/main" id="{3F72A3EA-8CAD-D642-0BC8-45CB39E44782}"/>
+                </a:ext>
+              </a:extLst>
+            </p:cNvPr>
+            <p:cNvSpPr/>
+            <p:nvPr/>
+          </p:nvSpPr>
+          <p:spPr>
+            <a:xfrm>
+              <a:off x="9239250" y="2457450"/>
+              <a:ext cx="1905000" cy="190500"/>
+            </a:xfrm>
+            <a:prstGeom prst="rect">
+              <a:avLst/>
+            </a:prstGeom>
+            <a:solidFill>
+              <a:srgbClr val="F5F5F5"/>
+            </a:solidFill>
+            <a:ln>
+              <a:noFill/>
+            </a:ln>
+          </p:spPr>
+        </p:sp>
+        <p:sp>
+          <p:nvSpPr>
+            <p:cNvPr id="109" name="TextBox 55">
+              <a:extLst>
+                <a:ext uri="{FF2B5EF4-FFF2-40B4-BE49-F238E27FC236}">
+                  <a16:creationId xmlns:a16="http://schemas.microsoft.com/office/drawing/2014/main" id="{77218361-F84D-7B9C-39B9-960387166A36}"/>
+                </a:ext>
+              </a:extLst>
+            </p:cNvPr>
+            <p:cNvSpPr txBox="1"/>
+            <p:nvPr/>
+          </p:nvSpPr>
+          <p:spPr>
+            <a:xfrm>
+              <a:off x="9608544" y="2592943"/>
+              <a:ext cx="1166413" cy="169069"/>
             </a:xfrm>
             <a:prstGeom prst="rect">
               <a:avLst/>
@@ -28691,29 +30021,35 @@
             <a:p>
               <a:pPr algn="ctr"/>
               <a:r>
-                <a:rPr lang="zh-CN" sz="1010" b="1" dirty="0">
+                <a:rPr lang="en-US" sz="860" b="1" dirty="0">
                   <a:solidFill>
                     <a:srgbClr val="1A1A1A"/>
                   </a:solidFill>
                   <a:latin typeface="Arial"/>
-                  <a:ea typeface="Microsoft YaHei"/>
-                  <a:cs typeface="Arial"/>
-                </a:rPr>
-                <a:t>⑤ 多 Agent 协作</a:t>
-              </a:r>
-            </a:p>
-          </p:txBody>
-        </p:sp>
-        <p:sp>
-          <p:nvSpPr>
-            <p:cNvPr id="39" name="TextBox 39"/>
-            <p:cNvSpPr txBox="1"/>
-            <p:nvPr/>
-          </p:nvSpPr>
-          <p:spPr>
-            <a:xfrm>
-              <a:off x="9494785" y="2848689"/>
-              <a:ext cx="1355829" cy="154781"/>
+                  <a:ea typeface="Arial"/>
+                  <a:cs typeface="Arial"/>
+                </a:rPr>
+                <a:t>5 Graph Engineering</a:t>
+              </a:r>
+            </a:p>
+          </p:txBody>
+        </p:sp>
+        <p:sp>
+          <p:nvSpPr>
+            <p:cNvPr id="110" name="TextBox 56">
+              <a:extLst>
+                <a:ext uri="{FF2B5EF4-FFF2-40B4-BE49-F238E27FC236}">
+                  <a16:creationId xmlns:a16="http://schemas.microsoft.com/office/drawing/2014/main" id="{CB44203F-46EE-F650-CBB9-67706B1D2EE1}"/>
+                </a:ext>
+              </a:extLst>
+            </p:cNvPr>
+            <p:cNvSpPr txBox="1"/>
+            <p:nvPr/>
+          </p:nvSpPr>
+          <p:spPr>
+            <a:xfrm>
+              <a:off x="9897554" y="2783443"/>
+              <a:ext cx="588391" cy="169069"/>
             </a:xfrm>
             <a:prstGeom prst="rect">
               <a:avLst/>
@@ -28731,7 +30067,7 @@
             <a:p>
               <a:pPr algn="ctr"/>
               <a:r>
-                <a:rPr lang="zh-CN" sz="790" b="1" dirty="0">
+                <a:rPr lang="zh-CN" sz="860" b="1" dirty="0">
                   <a:solidFill>
                     <a:srgbClr val="E30613"/>
                   </a:solidFill>
@@ -28739,21 +30075,27 @@
                   <a:ea typeface="Microsoft YaHei"/>
                   <a:cs typeface="Arial"/>
                 </a:rPr>
-                <a:t>痛点：一个 Agent 忙不过来</a:t>
-              </a:r>
-            </a:p>
-          </p:txBody>
-        </p:sp>
-        <p:sp>
-          <p:nvSpPr>
-            <p:cNvPr id="40" name="Line 40"/>
+                <a:t>图编排工程</a:t>
+              </a:r>
+            </a:p>
+          </p:txBody>
+        </p:sp>
+        <p:sp>
+          <p:nvSpPr>
+            <p:cNvPr id="111" name="Line 57">
+              <a:extLst>
+                <a:ext uri="{FF2B5EF4-FFF2-40B4-BE49-F238E27FC236}">
+                  <a16:creationId xmlns:a16="http://schemas.microsoft.com/office/drawing/2014/main" id="{45A382BC-E611-3555-D6EB-194A7710E9B0}"/>
+                </a:ext>
+              </a:extLst>
+            </p:cNvPr>
             <p:cNvSpPr/>
             <p:nvPr/>
           </p:nvSpPr>
           <p:spPr>
             <a:xfrm>
-              <a:off x="9353550" y="3086100"/>
-              <a:ext cx="1638300" cy="9525"/>
+              <a:off x="9353550" y="3009900"/>
+              <a:ext cx="1676400" cy="9525"/>
             </a:xfrm>
             <a:custGeom>
               <a:avLst/>
@@ -28762,12 +30104,12 @@
               <a:cxnLst/>
               <a:rect l="l" t="t" r="r" b="b"/>
               <a:pathLst>
-                <a:path w="1638300" h="9525">
+                <a:path w="1676400" h="9525">
                   <a:moveTo>
                     <a:pt x="0" y="0"/>
                   </a:moveTo>
                   <a:lnTo>
-                    <a:pt x="1638300" y="0"/>
+                    <a:pt x="1676400" y="0"/>
                   </a:lnTo>
                 </a:path>
               </a:pathLst>
@@ -28782,14 +30124,20 @@
         </p:sp>
         <p:sp>
           <p:nvSpPr>
-            <p:cNvPr id="41" name="TextBox 41"/>
-            <p:cNvSpPr txBox="1"/>
-            <p:nvPr/>
-          </p:nvSpPr>
-          <p:spPr>
-            <a:xfrm>
-              <a:off x="9762731" y="3221593"/>
-              <a:ext cx="819937" cy="169069"/>
+            <p:cNvPr id="112" name="TextBox 58">
+              <a:extLst>
+                <a:ext uri="{FF2B5EF4-FFF2-40B4-BE49-F238E27FC236}">
+                  <a16:creationId xmlns:a16="http://schemas.microsoft.com/office/drawing/2014/main" id="{B9D31D8D-303A-C69E-DB65-40CDA0699067}"/>
+                </a:ext>
+              </a:extLst>
+            </p:cNvPr>
+            <p:cNvSpPr txBox="1"/>
+            <p:nvPr/>
+          </p:nvSpPr>
+          <p:spPr>
+            <a:xfrm>
+              <a:off x="9401985" y="3138488"/>
+              <a:ext cx="1579531" cy="147638"/>
             </a:xfrm>
             <a:prstGeom prst="rect">
               <a:avLst/>
@@ -28807,7 +30155,7 @@
             <a:p>
               <a:pPr algn="ctr"/>
               <a:r>
-                <a:rPr lang="zh-CN" sz="860" dirty="0">
+                <a:rPr lang="zh-CN" sz="750" dirty="0">
                   <a:solidFill>
                     <a:srgbClr val="555555"/>
                   </a:solidFill>
@@ -28815,21 +30163,27 @@
                   <a:ea typeface="Microsoft YaHei"/>
                   <a:cs typeface="Arial"/>
                 </a:rPr>
-                <a:t>角色分工与编排</a:t>
-              </a:r>
-            </a:p>
-          </p:txBody>
-        </p:sp>
-        <p:sp>
-          <p:nvSpPr>
-            <p:cNvPr id="42" name="TextBox 42"/>
-            <p:cNvSpPr txBox="1"/>
-            <p:nvPr/>
-          </p:nvSpPr>
-          <p:spPr>
-            <a:xfrm>
-              <a:off x="9762731" y="3488293"/>
-              <a:ext cx="819937" cy="169069"/>
+                <a:t>解决：分支/并行成图，可测可回滚</a:t>
+              </a:r>
+            </a:p>
+          </p:txBody>
+        </p:sp>
+        <p:sp>
+          <p:nvSpPr>
+            <p:cNvPr id="113" name="TextBox 59">
+              <a:extLst>
+                <a:ext uri="{FF2B5EF4-FFF2-40B4-BE49-F238E27FC236}">
+                  <a16:creationId xmlns:a16="http://schemas.microsoft.com/office/drawing/2014/main" id="{C1F22E05-24B5-0E11-F43C-B1904A9E0CA7}"/>
+                </a:ext>
+              </a:extLst>
+            </p:cNvPr>
+            <p:cNvSpPr txBox="1"/>
+            <p:nvPr/>
+          </p:nvSpPr>
+          <p:spPr>
+            <a:xfrm>
+              <a:off x="9480232" y="3367088"/>
+              <a:ext cx="1423035" cy="147638"/>
             </a:xfrm>
             <a:prstGeom prst="rect">
               <a:avLst/>
@@ -28847,7 +30201,7 @@
             <a:p>
               <a:pPr algn="ctr"/>
               <a:r>
-                <a:rPr lang="zh-CN" sz="860" dirty="0">
+                <a:rPr lang="zh-CN" sz="750" dirty="0">
                   <a:solidFill>
                     <a:srgbClr val="555555"/>
                   </a:solidFill>
@@ -28855,20 +30209,72 @@
                   <a:ea typeface="Microsoft YaHei"/>
                   <a:cs typeface="Arial"/>
                 </a:rPr>
-                <a:t>竞争与协同机制</a:t>
-              </a:r>
-            </a:p>
-          </p:txBody>
-        </p:sp>
-        <p:sp>
-          <p:nvSpPr>
-            <p:cNvPr id="43" name="Rectangle 43"/>
+                <a:t>短板：越复杂越要盯验证与成本</a:t>
+              </a:r>
+            </a:p>
+          </p:txBody>
+        </p:sp>
+        <p:sp>
+          <p:nvSpPr>
+            <p:cNvPr id="114" name="TextBox 60">
+              <a:extLst>
+                <a:ext uri="{FF2B5EF4-FFF2-40B4-BE49-F238E27FC236}">
+                  <a16:creationId xmlns:a16="http://schemas.microsoft.com/office/drawing/2014/main" id="{34CEAD55-4ED1-2B50-33B6-67BD32B03936}"/>
+                </a:ext>
+              </a:extLst>
+            </p:cNvPr>
+            <p:cNvSpPr txBox="1"/>
+            <p:nvPr/>
+          </p:nvSpPr>
+          <p:spPr>
+            <a:xfrm>
+              <a:off x="9811835" y="3599736"/>
+              <a:ext cx="759830" cy="140494"/>
+            </a:xfrm>
+            <a:prstGeom prst="rect">
+              <a:avLst/>
+            </a:prstGeom>
+            <a:noFill/>
+            <a:ln>
+              <a:noFill/>
+            </a:ln>
+          </p:spPr>
+          <p:txBody>
+            <a:bodyPr wrap="none" lIns="0" tIns="0" rIns="0" bIns="0" anchor="t" anchorCtr="0">
+              <a:spAutoFit/>
+            </a:bodyPr>
+            <a:lstStyle/>
+            <a:p>
+              <a:pPr algn="ctr"/>
+              <a:r>
+                <a:rPr lang="zh-CN" sz="710" dirty="0">
+                  <a:solidFill>
+                    <a:srgbClr val="999999"/>
+                  </a:solidFill>
+                  <a:latin typeface="Arial"/>
+                  <a:ea typeface="Microsoft YaHei"/>
+                  <a:cs typeface="Arial"/>
+                </a:rPr>
+                <a:t>→ 评估永远不能省</a:t>
+              </a:r>
+            </a:p>
+          </p:txBody>
+        </p:sp>
+        <p:sp>
+          <p:nvSpPr>
+            <p:cNvPr id="115" name="Rectangle 61">
+              <a:extLst>
+                <a:ext uri="{FF2B5EF4-FFF2-40B4-BE49-F238E27FC236}">
+                  <a16:creationId xmlns:a16="http://schemas.microsoft.com/office/drawing/2014/main" id="{782616A3-0F50-E825-DD5A-97B761FC74CD}"/>
+                </a:ext>
+              </a:extLst>
+            </p:cNvPr>
             <p:cNvSpPr/>
             <p:nvPr/>
           </p:nvSpPr>
           <p:spPr>
             <a:xfrm>
-              <a:off x="1047750" y="4629150"/>
+              <a:off x="1047750" y="4305300"/>
               <a:ext cx="10096500" cy="552450"/>
             </a:xfrm>
             <a:prstGeom prst="roundRect">
@@ -28886,13 +30292,19 @@
         </p:sp>
         <p:sp>
           <p:nvSpPr>
-            <p:cNvPr id="44" name="Rectangle 44"/>
+            <p:cNvPr id="116" name="Rectangle 62">
+              <a:extLst>
+                <a:ext uri="{FF2B5EF4-FFF2-40B4-BE49-F238E27FC236}">
+                  <a16:creationId xmlns:a16="http://schemas.microsoft.com/office/drawing/2014/main" id="{47E8A10B-46A8-25A5-82C2-A715F2244C42}"/>
+                </a:ext>
+              </a:extLst>
+            </p:cNvPr>
             <p:cNvSpPr/>
             <p:nvPr/>
           </p:nvSpPr>
           <p:spPr>
             <a:xfrm>
-              <a:off x="1047750" y="4629150"/>
+              <a:off x="1047750" y="4305300"/>
               <a:ext cx="10096500" cy="57150"/>
             </a:xfrm>
             <a:prstGeom prst="rect">
@@ -28908,14 +30320,20 @@
         </p:sp>
         <p:sp>
           <p:nvSpPr>
-            <p:cNvPr id="45" name="TextBox 45"/>
-            <p:cNvSpPr txBox="1"/>
-            <p:nvPr/>
-          </p:nvSpPr>
-          <p:spPr>
-            <a:xfrm>
-              <a:off x="3705358" y="4755356"/>
-              <a:ext cx="4781285" cy="220028"/>
+            <p:cNvPr id="117" name="TextBox 63">
+              <a:extLst>
+                <a:ext uri="{FF2B5EF4-FFF2-40B4-BE49-F238E27FC236}">
+                  <a16:creationId xmlns:a16="http://schemas.microsoft.com/office/drawing/2014/main" id="{66B74D76-1FF9-A39F-E0B5-3340DAD2698A}"/>
+                </a:ext>
+              </a:extLst>
+            </p:cNvPr>
+            <p:cNvSpPr txBox="1"/>
+            <p:nvPr/>
+          </p:nvSpPr>
+          <p:spPr>
+            <a:xfrm>
+              <a:off x="3579379" y="4431506"/>
+              <a:ext cx="5033242" cy="220028"/>
             </a:xfrm>
             <a:prstGeom prst="rect">
               <a:avLst/>
@@ -28941,21 +30359,27 @@
                   <a:ea typeface="Microsoft YaHei"/>
                   <a:cs typeface="Arial"/>
                 </a:rPr>
-                <a:t>从 RAG 到 Agent：先答得准 → 再想得清 → 后干得稳 —— 最后才谈协作</a:t>
-              </a:r>
-            </a:p>
-          </p:txBody>
-        </p:sp>
-        <p:sp>
-          <p:nvSpPr>
-            <p:cNvPr id="46" name="TextBox 46"/>
-            <p:cNvSpPr txBox="1"/>
-            <p:nvPr/>
-          </p:nvSpPr>
-          <p:spPr>
-            <a:xfrm>
-              <a:off x="4600994" y="5016341"/>
-              <a:ext cx="2990012" cy="161925"/>
+                <a:t>不是门派之争，是同一件事越来越难：让 AI 稳定、可控、低成本地交付</a:t>
+              </a:r>
+            </a:p>
+          </p:txBody>
+        </p:sp>
+        <p:sp>
+          <p:nvSpPr>
+            <p:cNvPr id="118" name="TextBox 64">
+              <a:extLst>
+                <a:ext uri="{FF2B5EF4-FFF2-40B4-BE49-F238E27FC236}">
+                  <a16:creationId xmlns:a16="http://schemas.microsoft.com/office/drawing/2014/main" id="{6DDAE085-50A4-1570-7187-26EB51306540}"/>
+                </a:ext>
+              </a:extLst>
+            </p:cNvPr>
+            <p:cNvSpPr txBox="1"/>
+            <p:nvPr/>
+          </p:nvSpPr>
+          <p:spPr>
+            <a:xfrm>
+              <a:off x="3953883" y="4692491"/>
+              <a:ext cx="4284235" cy="161925"/>
             </a:xfrm>
             <a:prstGeom prst="rect">
               <a:avLst/>
@@ -28981,25 +30405,31 @@
                   <a:ea typeface="Microsoft YaHei"/>
                   <a:cs typeface="Arial"/>
                 </a:rPr>
-                <a:t>每一层都解决上一层的短板：先稳准，再自主，后协作与可控</a:t>
-              </a:r>
-            </a:p>
-          </p:txBody>
-        </p:sp>
-        <p:sp>
-          <p:nvSpPr>
-            <p:cNvPr id="47" name="Rectangle 47"/>
+                <a:t>Prompt→Context→Loop→Harness→Graph：每一步解决上一步的短板，也暴露新的短板</a:t>
+              </a:r>
+            </a:p>
+          </p:txBody>
+        </p:sp>
+        <p:sp>
+          <p:nvSpPr>
+            <p:cNvPr id="119" name="Rectangle 65">
+              <a:extLst>
+                <a:ext uri="{FF2B5EF4-FFF2-40B4-BE49-F238E27FC236}">
+                  <a16:creationId xmlns:a16="http://schemas.microsoft.com/office/drawing/2014/main" id="{4CE0E29F-7C52-F8F9-376D-6B6B1D4A804A}"/>
+                </a:ext>
+              </a:extLst>
+            </p:cNvPr>
             <p:cNvSpPr/>
             <p:nvPr/>
           </p:nvSpPr>
           <p:spPr>
             <a:xfrm>
-              <a:off x="1047750" y="5334000"/>
-              <a:ext cx="10096500" cy="590550"/>
+              <a:off x="1047750" y="5048250"/>
+              <a:ext cx="10096500" cy="552450"/>
             </a:xfrm>
             <a:prstGeom prst="roundRect">
               <a:avLst>
-                <a:gd name="adj" fmla="val 4839"/>
+                <a:gd name="adj" fmla="val 5172"/>
               </a:avLst>
             </a:prstGeom>
             <a:solidFill>
@@ -29014,14 +30444,20 @@
         </p:sp>
         <p:sp>
           <p:nvSpPr>
-            <p:cNvPr id="48" name="TextBox 48"/>
-            <p:cNvSpPr txBox="1"/>
-            <p:nvPr/>
-          </p:nvSpPr>
-          <p:spPr>
-            <a:xfrm>
-              <a:off x="3125364" y="5472351"/>
-              <a:ext cx="5941272" cy="198025"/>
+            <p:cNvPr id="120" name="TextBox 66">
+              <a:extLst>
+                <a:ext uri="{FF2B5EF4-FFF2-40B4-BE49-F238E27FC236}">
+                  <a16:creationId xmlns:a16="http://schemas.microsoft.com/office/drawing/2014/main" id="{5E6F294D-D8B8-C629-6CD1-E2A932CD589A}"/>
+                </a:ext>
+              </a:extLst>
+            </p:cNvPr>
+            <p:cNvSpPr txBox="1"/>
+            <p:nvPr/>
+          </p:nvSpPr>
+          <p:spPr>
+            <a:xfrm>
+              <a:off x="2960724" y="5186601"/>
+              <a:ext cx="6270552" cy="198025"/>
             </a:xfrm>
             <a:prstGeom prst="rect">
               <a:avLst/>
@@ -29047,21 +30483,27 @@
                   <a:ea typeface="Microsoft YaHei"/>
                   <a:cs typeface="Arial"/>
                 </a:rPr>
-                <a:t>工程落地顺序：RAG 把答案喂准 → Loop 让它自己纠错 → Harness 兜住安全合规 → 再谈多 Agent</a:t>
-              </a:r>
-            </a:p>
-          </p:txBody>
-        </p:sp>
-        <p:sp>
-          <p:nvSpPr>
-            <p:cNvPr id="49" name="TextBox 49"/>
-            <p:cNvSpPr txBox="1"/>
-            <p:nvPr/>
-          </p:nvSpPr>
-          <p:spPr>
-            <a:xfrm>
-              <a:off x="4581520" y="5711666"/>
-              <a:ext cx="3028960" cy="161925"/>
+                <a:t>一句话人话：Prompt 问得再好也只是第一步；稳定交付靠的是「喂得对 → 循环验 → 外壳兜 → 排得清」</a:t>
+              </a:r>
+            </a:p>
+          </p:txBody>
+        </p:sp>
+        <p:sp>
+          <p:nvSpPr>
+            <p:cNvPr id="121" name="TextBox 67">
+              <a:extLst>
+                <a:ext uri="{FF2B5EF4-FFF2-40B4-BE49-F238E27FC236}">
+                  <a16:creationId xmlns:a16="http://schemas.microsoft.com/office/drawing/2014/main" id="{196C979C-CC70-896B-A87C-4A3D3FE6658B}"/>
+                </a:ext>
+              </a:extLst>
+            </p:cNvPr>
+            <p:cNvSpPr txBox="1"/>
+            <p:nvPr/>
+          </p:nvSpPr>
+          <p:spPr>
+            <a:xfrm>
+              <a:off x="3237518" y="5439489"/>
+              <a:ext cx="5716964" cy="154781"/>
             </a:xfrm>
             <a:prstGeom prst="rect">
               <a:avLst/>
@@ -29079,15 +30521,15 @@
             <a:p>
               <a:pPr algn="ctr"/>
               <a:r>
-                <a:rPr lang="zh-CN" sz="820" dirty="0">
-                  <a:solidFill>
-                    <a:srgbClr val="999999"/>
-                  </a:solidFill>
-                  <a:latin typeface="Arial"/>
-                  <a:ea typeface="Microsoft YaHei"/>
-                  <a:cs typeface="Arial"/>
-                </a:rPr>
-                <a:t>别跳级：多数失败的 Agent 项目，是连 RAG 的召回都没做稳</a:t>
+                <a:rPr lang="zh-CN" sz="790" dirty="0">
+                  <a:solidFill>
+                    <a:srgbClr val="555555"/>
+                  </a:solidFill>
+                  <a:latin typeface="Arial"/>
+                  <a:ea typeface="Microsoft YaHei"/>
+                  <a:cs typeface="Arial"/>
+                </a:rPr>
+                <a:t>本讲后文会逐个展开：五技能(P09)对 Prompt/Context，架构与治理(P07)对 Loop/Harness，多 Agent 协作对 Graph</a:t>
               </a:r>
             </a:p>
           </p:txBody>
@@ -29095,7 +30537,13 @@
       </p:grpSp>
       <p:grpSp>
         <p:nvGrpSpPr>
-          <p:cNvPr id="54" name="Group 54"/>
+          <p:cNvPr id="123" name="Group 73">
+            <a:extLst>
+              <a:ext uri="{FF2B5EF4-FFF2-40B4-BE49-F238E27FC236}">
+                <a16:creationId xmlns:a16="http://schemas.microsoft.com/office/drawing/2014/main" id="{705B4E3E-11D6-0A06-80DA-5A98FAFC8EBD}"/>
+              </a:ext>
+            </a:extLst>
+          </p:cNvPr>
           <p:cNvGrpSpPr/>
           <p:nvPr/>
         </p:nvGrpSpPr>
@@ -29109,7 +30557,13 @@
         </p:grpSpPr>
         <p:sp>
           <p:nvSpPr>
-            <p:cNvPr id="51" name="TextBox 51"/>
+            <p:cNvPr id="124" name="TextBox 70">
+              <a:extLst>
+                <a:ext uri="{FF2B5EF4-FFF2-40B4-BE49-F238E27FC236}">
+                  <a16:creationId xmlns:a16="http://schemas.microsoft.com/office/drawing/2014/main" id="{E907E815-CDE5-AA43-0A52-898149C13D3C}"/>
+                </a:ext>
+              </a:extLst>
+            </p:cNvPr>
             <p:cNvSpPr txBox="1"/>
             <p:nvPr/>
           </p:nvSpPr>
@@ -29149,7 +30603,13 @@
         </p:sp>
         <p:sp>
           <p:nvSpPr>
-            <p:cNvPr id="52" name="Rectangle 52"/>
+            <p:cNvPr id="125" name="Rectangle 71">
+              <a:extLst>
+                <a:ext uri="{FF2B5EF4-FFF2-40B4-BE49-F238E27FC236}">
+                  <a16:creationId xmlns:a16="http://schemas.microsoft.com/office/drawing/2014/main" id="{F2359939-E1B0-DE9B-20A2-42EDCDD477AB}"/>
+                </a:ext>
+              </a:extLst>
+            </p:cNvPr>
             <p:cNvSpPr/>
             <p:nvPr/>
           </p:nvSpPr>
@@ -29171,7 +30631,13 @@
         </p:sp>
         <p:sp>
           <p:nvSpPr>
-            <p:cNvPr id="53" name="TextBox 53"/>
+            <p:cNvPr id="126" name="TextBox 72">
+              <a:extLst>
+                <a:ext uri="{FF2B5EF4-FFF2-40B4-BE49-F238E27FC236}">
+                  <a16:creationId xmlns:a16="http://schemas.microsoft.com/office/drawing/2014/main" id="{E09163C2-6F72-847F-6D45-2845A6B23480}"/>
+                </a:ext>
+              </a:extLst>
+            </p:cNvPr>
             <p:cNvSpPr txBox="1"/>
             <p:nvPr/>
           </p:nvSpPr>
@@ -29369,9 +30835,9 @@
         <p:grpSpPr>
           <a:xfrm>
             <a:off x="1047750" y="1866900"/>
-            <a:ext cx="10096500" cy="4076700"/>
+            <a:ext cx="10096500" cy="3448050"/>
             <a:chOff x="1047750" y="1866900"/>
-            <a:chExt cx="10096500" cy="4076700"/>
+            <a:chExt cx="10096500" cy="3448050"/>
           </a:xfrm>
         </p:grpSpPr>
         <p:sp>
@@ -30252,72 +31718,6 @@
                   <a:cs typeface="Arial"/>
                 </a:rPr>
                 <a:t>关键节点人工审核 · 可打断 · 可接管 · 可回滚 —— 按风险分级引入，不是每个 Agent 都必须</a:t>
-              </a:r>
-            </a:p>
-          </p:txBody>
-        </p:sp>
-        <p:sp>
-          <p:nvSpPr>
-            <p:cNvPr id="32" name="Rectangle 32"/>
-            <p:cNvSpPr/>
-            <p:nvPr/>
-          </p:nvSpPr>
-          <p:spPr>
-            <a:xfrm>
-              <a:off x="1047750" y="5467350"/>
-              <a:ext cx="10096500" cy="476250"/>
-            </a:xfrm>
-            <a:prstGeom prst="roundRect">
-              <a:avLst>
-                <a:gd name="adj" fmla="val 6000"/>
-              </a:avLst>
-            </a:prstGeom>
-            <a:solidFill>
-              <a:srgbClr val="FFFFFF"/>
-            </a:solidFill>
-            <a:ln w="9525">
-              <a:solidFill>
-                <a:srgbClr val="999999"/>
-              </a:solidFill>
-            </a:ln>
-          </p:spPr>
-        </p:sp>
-        <p:sp>
-          <p:nvSpPr>
-            <p:cNvPr id="33" name="TextBox 33"/>
-            <p:cNvSpPr txBox="1"/>
-            <p:nvPr/>
-          </p:nvSpPr>
-          <p:spPr>
-            <a:xfrm>
-              <a:off x="4636225" y="5664041"/>
-              <a:ext cx="2919549" cy="161925"/>
-            </a:xfrm>
-            <a:prstGeom prst="rect">
-              <a:avLst/>
-            </a:prstGeom>
-            <a:noFill/>
-            <a:ln>
-              <a:noFill/>
-            </a:ln>
-          </p:spPr>
-          <p:txBody>
-            <a:bodyPr wrap="none" lIns="0" tIns="0" rIns="0" bIns="0" anchor="t" anchorCtr="0">
-              <a:spAutoFit/>
-            </a:bodyPr>
-            <a:lstStyle/>
-            <a:p>
-              <a:pPr algn="ctr"/>
-              <a:r>
-                <a:rPr lang="zh-CN" sz="820" dirty="0">
-                  <a:solidFill>
-                    <a:srgbClr val="999999"/>
-                  </a:solidFill>
-                  <a:latin typeface="Arial"/>
-                  <a:ea typeface="Microsoft YaHei"/>
-                  <a:cs typeface="Arial"/>
-                </a:rPr>
-                <a:t>参考：LangGraph / Claude Agent SDK / MCP 文档 · 2026</a:t>
               </a:r>
             </a:p>
           </p:txBody>
@@ -30475,21 +31875,33 @@
       </p:grpSpPr>
       <p:grpSp>
         <p:nvGrpSpPr>
-          <p:cNvPr id="5" name="Group 5"/>
+          <p:cNvPr id="47" name="Group 5">
+            <a:extLst>
+              <a:ext uri="{FF2B5EF4-FFF2-40B4-BE49-F238E27FC236}">
+                <a16:creationId xmlns:a16="http://schemas.microsoft.com/office/drawing/2014/main" id="{B6103EB2-43B2-2660-E963-E4FDF4BCCAA3}"/>
+              </a:ext>
+            </a:extLst>
+          </p:cNvPr>
           <p:cNvGrpSpPr/>
           <p:nvPr/>
         </p:nvGrpSpPr>
         <p:grpSpPr>
           <a:xfrm>
             <a:off x="595122" y="501491"/>
-            <a:ext cx="7134556" cy="738854"/>
+            <a:ext cx="6852474" cy="738854"/>
             <a:chOff x="595122" y="501491"/>
-            <a:chExt cx="7134556" cy="738854"/>
+            <a:chExt cx="6852474" cy="738854"/>
           </a:xfrm>
         </p:grpSpPr>
         <p:sp>
           <p:nvSpPr>
-            <p:cNvPr id="2" name="TextBox 2"/>
+            <p:cNvPr id="48" name="TextBox 2">
+              <a:extLst>
+                <a:ext uri="{FF2B5EF4-FFF2-40B4-BE49-F238E27FC236}">
+                  <a16:creationId xmlns:a16="http://schemas.microsoft.com/office/drawing/2014/main" id="{BD646C8C-B026-69AB-273C-1017EB9CC09F}"/>
+                </a:ext>
+              </a:extLst>
+            </p:cNvPr>
             <p:cNvSpPr txBox="1"/>
             <p:nvPr/>
           </p:nvSpPr>
@@ -30529,14 +31941,20 @@
         </p:sp>
         <p:sp>
           <p:nvSpPr>
-            <p:cNvPr id="3" name="TextBox 3"/>
+            <p:cNvPr id="49" name="TextBox 3">
+              <a:extLst>
+                <a:ext uri="{FF2B5EF4-FFF2-40B4-BE49-F238E27FC236}">
+                  <a16:creationId xmlns:a16="http://schemas.microsoft.com/office/drawing/2014/main" id="{AB5DCEE6-9883-8C9C-DDB0-9B35569E0C7B}"/>
+                </a:ext>
+              </a:extLst>
+            </p:cNvPr>
             <p:cNvSpPr txBox="1"/>
             <p:nvPr/>
           </p:nvSpPr>
           <p:spPr>
             <a:xfrm>
               <a:off x="595122" y="682942"/>
-              <a:ext cx="7134556" cy="557403"/>
+              <a:ext cx="6852474" cy="557403"/>
             </a:xfrm>
             <a:prstGeom prst="rect">
               <a:avLst/>
@@ -30562,14 +31980,20 @@
                   <a:ea typeface="Microsoft YaHei"/>
                   <a:cs typeface="Arial"/>
                 </a:rPr>
-                <a:t>AI Engineering Skills Map：本讲路线图</a:t>
-              </a:r>
-            </a:p>
-          </p:txBody>
-        </p:sp>
-        <p:sp>
-          <p:nvSpPr>
-            <p:cNvPr id="4" name="Rectangle 4"/>
+                <a:t>本讲地图：三条能力带 —— 你现在在哪？</a:t>
+              </a:r>
+            </a:p>
+          </p:txBody>
+        </p:sp>
+        <p:sp>
+          <p:nvSpPr>
+            <p:cNvPr id="50" name="Rectangle 4">
+              <a:extLst>
+                <a:ext uri="{FF2B5EF4-FFF2-40B4-BE49-F238E27FC236}">
+                  <a16:creationId xmlns:a16="http://schemas.microsoft.com/office/drawing/2014/main" id="{678260D2-1EF1-7CE8-21A7-7C70060A13CE}"/>
+                </a:ext>
+              </a:extLst>
+            </p:cNvPr>
             <p:cNvSpPr/>
             <p:nvPr/>
           </p:nvSpPr>
@@ -30592,21 +32016,33 @@
       </p:grpSp>
       <p:grpSp>
         <p:nvGrpSpPr>
-          <p:cNvPr id="42" name="Group 42"/>
+          <p:cNvPr id="51" name="Group 59">
+            <a:extLst>
+              <a:ext uri="{FF2B5EF4-FFF2-40B4-BE49-F238E27FC236}">
+                <a16:creationId xmlns:a16="http://schemas.microsoft.com/office/drawing/2014/main" id="{FC0CA560-30C6-FC15-6EEA-13C6B22BE6CC}"/>
+              </a:ext>
+            </a:extLst>
+          </p:cNvPr>
           <p:cNvGrpSpPr/>
           <p:nvPr/>
         </p:nvGrpSpPr>
         <p:grpSpPr>
           <a:xfrm>
             <a:off x="1047750" y="1905000"/>
-            <a:ext cx="10096500" cy="4267200"/>
+            <a:ext cx="10096500" cy="4248150"/>
             <a:chOff x="1047750" y="1905000"/>
-            <a:chExt cx="10096500" cy="4267200"/>
+            <a:chExt cx="10096500" cy="4248150"/>
           </a:xfrm>
         </p:grpSpPr>
         <p:sp>
           <p:nvSpPr>
-            <p:cNvPr id="6" name="Rectangle 6"/>
+            <p:cNvPr id="52" name="Rectangle 6">
+              <a:extLst>
+                <a:ext uri="{FF2B5EF4-FFF2-40B4-BE49-F238E27FC236}">
+                  <a16:creationId xmlns:a16="http://schemas.microsoft.com/office/drawing/2014/main" id="{621D9098-7D10-97E8-034A-0937479835F9}"/>
+                </a:ext>
+              </a:extLst>
+            </p:cNvPr>
             <p:cNvSpPr/>
             <p:nvPr/>
           </p:nvSpPr>
@@ -30630,14 +32066,20 @@
         </p:sp>
         <p:sp>
           <p:nvSpPr>
-            <p:cNvPr id="7" name="TextBox 7"/>
-            <p:cNvSpPr txBox="1"/>
-            <p:nvPr/>
-          </p:nvSpPr>
-          <p:spPr>
-            <a:xfrm>
-              <a:off x="3824017" y="2033826"/>
-              <a:ext cx="4543965" cy="198025"/>
+            <p:cNvPr id="53" name="TextBox 7">
+              <a:extLst>
+                <a:ext uri="{FF2B5EF4-FFF2-40B4-BE49-F238E27FC236}">
+                  <a16:creationId xmlns:a16="http://schemas.microsoft.com/office/drawing/2014/main" id="{218CB7FE-BC30-DE76-4D3F-8F5C505C0AAE}"/>
+                </a:ext>
+              </a:extLst>
+            </p:cNvPr>
+            <p:cNvSpPr txBox="1"/>
+            <p:nvPr/>
+          </p:nvSpPr>
+          <p:spPr>
+            <a:xfrm>
+              <a:off x="4201946" y="2033826"/>
+              <a:ext cx="3788108" cy="198025"/>
             </a:xfrm>
             <a:prstGeom prst="rect">
               <a:avLst/>
@@ -30663,25 +32105,31 @@
                   <a:ea typeface="Microsoft YaHei"/>
                   <a:cs typeface="Arial"/>
                 </a:rPr>
-                <a:t>Building &amp; deploying AI applications —— 应用构建与部署（最外层能力）</a:t>
-              </a:r>
-            </a:p>
-          </p:txBody>
-        </p:sp>
-        <p:sp>
-          <p:nvSpPr>
-            <p:cNvPr id="8" name="Rectangle 8"/>
+                <a:t>本讲地图：三条能力带 —— 先守地基，再练主线，后升系统思维</a:t>
+              </a:r>
+            </a:p>
+          </p:txBody>
+        </p:sp>
+        <p:sp>
+          <p:nvSpPr>
+            <p:cNvPr id="54" name="Rectangle 8">
+              <a:extLst>
+                <a:ext uri="{FF2B5EF4-FFF2-40B4-BE49-F238E27FC236}">
+                  <a16:creationId xmlns:a16="http://schemas.microsoft.com/office/drawing/2014/main" id="{F99EAEDF-074C-D053-26AF-4531C8E04039}"/>
+                </a:ext>
+              </a:extLst>
+            </p:cNvPr>
             <p:cNvSpPr/>
             <p:nvPr/>
           </p:nvSpPr>
           <p:spPr>
             <a:xfrm>
-              <a:off x="1047750" y="2381250"/>
-              <a:ext cx="2667000" cy="3143250"/>
+              <a:off x="1047750" y="2400300"/>
+              <a:ext cx="2762250" cy="3143250"/>
             </a:xfrm>
             <a:prstGeom prst="roundRect">
               <a:avLst>
-                <a:gd name="adj" fmla="val 1071"/>
+                <a:gd name="adj" fmla="val 1034"/>
               </a:avLst>
             </a:prstGeom>
             <a:solidFill>
@@ -30696,14 +32144,20 @@
         </p:sp>
         <p:sp>
           <p:nvSpPr>
-            <p:cNvPr id="9" name="Rectangle 9"/>
+            <p:cNvPr id="55" name="Rectangle 9">
+              <a:extLst>
+                <a:ext uri="{FF2B5EF4-FFF2-40B4-BE49-F238E27FC236}">
+                  <a16:creationId xmlns:a16="http://schemas.microsoft.com/office/drawing/2014/main" id="{AAC116F9-2E51-FD6F-1380-115D5D179631}"/>
+                </a:ext>
+              </a:extLst>
+            </p:cNvPr>
             <p:cNvSpPr/>
             <p:nvPr/>
           </p:nvSpPr>
           <p:spPr>
             <a:xfrm>
-              <a:off x="1047750" y="2381250"/>
-              <a:ext cx="2667000" cy="57150"/>
+              <a:off x="1047750" y="2400300"/>
+              <a:ext cx="2762250" cy="57150"/>
             </a:xfrm>
             <a:prstGeom prst="rect">
               <a:avLst/>
@@ -30718,14 +32172,20 @@
         </p:sp>
         <p:sp>
           <p:nvSpPr>
-            <p:cNvPr id="10" name="TextBox 10"/>
-            <p:cNvSpPr txBox="1"/>
-            <p:nvPr/>
-          </p:nvSpPr>
-          <p:spPr>
-            <a:xfrm>
-              <a:off x="1650353" y="2618899"/>
-              <a:ext cx="1461794" cy="190690"/>
+            <p:cNvPr id="56" name="TextBox 10">
+              <a:extLst>
+                <a:ext uri="{FF2B5EF4-FFF2-40B4-BE49-F238E27FC236}">
+                  <a16:creationId xmlns:a16="http://schemas.microsoft.com/office/drawing/2014/main" id="{0412B7BC-A051-7FD7-8B76-32B8ECB74838}"/>
+                </a:ext>
+              </a:extLst>
+            </p:cNvPr>
+            <p:cNvSpPr txBox="1"/>
+            <p:nvPr/>
+          </p:nvSpPr>
+          <p:spPr>
+            <a:xfrm>
+              <a:off x="1783568" y="2591752"/>
+              <a:ext cx="1290615" cy="205359"/>
             </a:xfrm>
             <a:prstGeom prst="rect">
               <a:avLst/>
@@ -30743,29 +32203,35 @@
             <a:p>
               <a:pPr algn="ctr"/>
               <a:r>
-                <a:rPr lang="en-US" sz="980" b="1" dirty="0">
+                <a:rPr lang="zh-CN" sz="1050" b="1" dirty="0">
                   <a:solidFill>
                     <a:srgbClr val="1A1A1A"/>
                   </a:solidFill>
                   <a:latin typeface="Arial"/>
-                  <a:ea typeface="Arial"/>
-                  <a:cs typeface="Arial"/>
-                </a:rPr>
-                <a:t>Software engineering</a:t>
-              </a:r>
-            </a:p>
-          </p:txBody>
-        </p:sp>
-        <p:sp>
-          <p:nvSpPr>
-            <p:cNvPr id="11" name="TextBox 11"/>
-            <p:cNvSpPr txBox="1"/>
-            <p:nvPr/>
-          </p:nvSpPr>
-          <p:spPr>
-            <a:xfrm>
-              <a:off x="1555223" y="2809399"/>
-              <a:ext cx="1652054" cy="190690"/>
+                  <a:ea typeface="Microsoft YaHei"/>
+                  <a:cs typeface="Arial"/>
+                </a:rPr>
+                <a:t>① 地基 · CS 基本功</a:t>
+              </a:r>
+            </a:p>
+          </p:txBody>
+        </p:sp>
+        <p:sp>
+          <p:nvSpPr>
+            <p:cNvPr id="57" name="TextBox 11">
+              <a:extLst>
+                <a:ext uri="{FF2B5EF4-FFF2-40B4-BE49-F238E27FC236}">
+                  <a16:creationId xmlns:a16="http://schemas.microsoft.com/office/drawing/2014/main" id="{19B4E2C2-24E5-2258-032A-2246FF3DFB69}"/>
+                </a:ext>
+              </a:extLst>
+            </p:cNvPr>
+            <p:cNvSpPr txBox="1"/>
+            <p:nvPr/>
+          </p:nvSpPr>
+          <p:spPr>
+            <a:xfrm>
+              <a:off x="2037753" y="2825591"/>
+              <a:ext cx="782244" cy="161925"/>
             </a:xfrm>
             <a:prstGeom prst="rect">
               <a:avLst/>
@@ -30783,7 +32249,379 @@
             <a:p>
               <a:pPr algn="ctr"/>
               <a:r>
-                <a:rPr lang="zh-CN" sz="980" b="1" dirty="0">
+                <a:rPr lang="zh-CN" sz="820" dirty="0">
+                  <a:solidFill>
+                    <a:srgbClr val="555555"/>
+                  </a:solidFill>
+                  <a:latin typeface="Arial"/>
+                  <a:ea typeface="Microsoft YaHei"/>
+                  <a:cs typeface="Arial"/>
+                </a:rPr>
+                <a:t>（不变的核心）</a:t>
+              </a:r>
+            </a:p>
+          </p:txBody>
+        </p:sp>
+        <p:sp>
+          <p:nvSpPr>
+            <p:cNvPr id="58" name="TextBox 12">
+              <a:extLst>
+                <a:ext uri="{FF2B5EF4-FFF2-40B4-BE49-F238E27FC236}">
+                  <a16:creationId xmlns:a16="http://schemas.microsoft.com/office/drawing/2014/main" id="{D68C7DD5-D7A5-A926-6C5D-A84BF4D56EA6}"/>
+                </a:ext>
+              </a:extLst>
+            </p:cNvPr>
+            <p:cNvSpPr txBox="1"/>
+            <p:nvPr/>
+          </p:nvSpPr>
+          <p:spPr>
+            <a:xfrm>
+              <a:off x="1827881" y="3164443"/>
+              <a:ext cx="1201989" cy="169069"/>
+            </a:xfrm>
+            <a:prstGeom prst="rect">
+              <a:avLst/>
+            </a:prstGeom>
+            <a:noFill/>
+            <a:ln>
+              <a:noFill/>
+            </a:ln>
+          </p:spPr>
+          <p:txBody>
+            <a:bodyPr wrap="none" lIns="0" tIns="0" rIns="0" bIns="0" anchor="t" anchorCtr="0">
+              <a:spAutoFit/>
+            </a:bodyPr>
+            <a:lstStyle/>
+            <a:p>
+              <a:pPr algn="ctr"/>
+              <a:r>
+                <a:rPr lang="zh-CN" sz="860" dirty="0">
+                  <a:solidFill>
+                    <a:srgbClr val="555555"/>
+                  </a:solidFill>
+                  <a:latin typeface="Arial"/>
+                  <a:ea typeface="Microsoft YaHei"/>
+                  <a:cs typeface="Arial"/>
+                </a:rPr>
+                <a:t>编程 · 数据结构 · 算法</a:t>
+              </a:r>
+            </a:p>
+          </p:txBody>
+        </p:sp>
+        <p:sp>
+          <p:nvSpPr>
+            <p:cNvPr id="59" name="Rectangle 13">
+              <a:extLst>
+                <a:ext uri="{FF2B5EF4-FFF2-40B4-BE49-F238E27FC236}">
+                  <a16:creationId xmlns:a16="http://schemas.microsoft.com/office/drawing/2014/main" id="{5BD7BF1C-1E4A-5D53-F126-EDD312744636}"/>
+                </a:ext>
+              </a:extLst>
+            </p:cNvPr>
+            <p:cNvSpPr/>
+            <p:nvPr/>
+          </p:nvSpPr>
+          <p:spPr>
+            <a:xfrm>
+              <a:off x="1238250" y="3209925"/>
+              <a:ext cx="66675" cy="66675"/>
+            </a:xfrm>
+            <a:prstGeom prst="rect">
+              <a:avLst/>
+            </a:prstGeom>
+            <a:solidFill>
+              <a:srgbClr val="E30613"/>
+            </a:solidFill>
+            <a:ln>
+              <a:noFill/>
+            </a:ln>
+          </p:spPr>
+        </p:sp>
+        <p:sp>
+          <p:nvSpPr>
+            <p:cNvPr id="60" name="TextBox 14">
+              <a:extLst>
+                <a:ext uri="{FF2B5EF4-FFF2-40B4-BE49-F238E27FC236}">
+                  <a16:creationId xmlns:a16="http://schemas.microsoft.com/office/drawing/2014/main" id="{884BE79E-9238-55EC-2DF2-7B325FCCE81E}"/>
+                </a:ext>
+              </a:extLst>
+            </p:cNvPr>
+            <p:cNvSpPr txBox="1"/>
+            <p:nvPr/>
+          </p:nvSpPr>
+          <p:spPr>
+            <a:xfrm>
+              <a:off x="1885767" y="3450193"/>
+              <a:ext cx="1086216" cy="169069"/>
+            </a:xfrm>
+            <a:prstGeom prst="rect">
+              <a:avLst/>
+            </a:prstGeom>
+            <a:noFill/>
+            <a:ln>
+              <a:noFill/>
+            </a:ln>
+          </p:spPr>
+          <p:txBody>
+            <a:bodyPr wrap="none" lIns="0" tIns="0" rIns="0" bIns="0" anchor="t" anchorCtr="0">
+              <a:spAutoFit/>
+            </a:bodyPr>
+            <a:lstStyle/>
+            <a:p>
+              <a:pPr algn="ctr"/>
+              <a:r>
+                <a:rPr lang="zh-CN" sz="860" dirty="0">
+                  <a:solidFill>
+                    <a:srgbClr val="555555"/>
+                  </a:solidFill>
+                  <a:latin typeface="Arial"/>
+                  <a:ea typeface="Microsoft YaHei"/>
+                  <a:cs typeface="Arial"/>
+                </a:rPr>
+                <a:t>系统 · 网络 · 数据库</a:t>
+              </a:r>
+            </a:p>
+          </p:txBody>
+        </p:sp>
+        <p:sp>
+          <p:nvSpPr>
+            <p:cNvPr id="61" name="Rectangle 15">
+              <a:extLst>
+                <a:ext uri="{FF2B5EF4-FFF2-40B4-BE49-F238E27FC236}">
+                  <a16:creationId xmlns:a16="http://schemas.microsoft.com/office/drawing/2014/main" id="{7752A4DE-6C8B-7919-90AB-7B2192D6617C}"/>
+                </a:ext>
+              </a:extLst>
+            </p:cNvPr>
+            <p:cNvSpPr/>
+            <p:nvPr/>
+          </p:nvSpPr>
+          <p:spPr>
+            <a:xfrm>
+              <a:off x="1238250" y="3495675"/>
+              <a:ext cx="66675" cy="66675"/>
+            </a:xfrm>
+            <a:prstGeom prst="rect">
+              <a:avLst/>
+            </a:prstGeom>
+            <a:solidFill>
+              <a:srgbClr val="E30613"/>
+            </a:solidFill>
+            <a:ln>
+              <a:noFill/>
+            </a:ln>
+          </p:spPr>
+        </p:sp>
+        <p:sp>
+          <p:nvSpPr>
+            <p:cNvPr id="62" name="TextBox 16">
+              <a:extLst>
+                <a:ext uri="{FF2B5EF4-FFF2-40B4-BE49-F238E27FC236}">
+                  <a16:creationId xmlns:a16="http://schemas.microsoft.com/office/drawing/2014/main" id="{3960EA69-7664-AE95-04C6-B8042707EC09}"/>
+                </a:ext>
+              </a:extLst>
+            </p:cNvPr>
+            <p:cNvSpPr txBox="1"/>
+            <p:nvPr/>
+          </p:nvSpPr>
+          <p:spPr>
+            <a:xfrm>
+              <a:off x="1885767" y="3735943"/>
+              <a:ext cx="1086216" cy="169069"/>
+            </a:xfrm>
+            <a:prstGeom prst="rect">
+              <a:avLst/>
+            </a:prstGeom>
+            <a:noFill/>
+            <a:ln>
+              <a:noFill/>
+            </a:ln>
+          </p:spPr>
+          <p:txBody>
+            <a:bodyPr wrap="none" lIns="0" tIns="0" rIns="0" bIns="0" anchor="t" anchorCtr="0">
+              <a:spAutoFit/>
+            </a:bodyPr>
+            <a:lstStyle/>
+            <a:p>
+              <a:pPr algn="ctr"/>
+              <a:r>
+                <a:rPr lang="zh-CN" sz="860" dirty="0">
+                  <a:solidFill>
+                    <a:srgbClr val="555555"/>
+                  </a:solidFill>
+                  <a:latin typeface="Arial"/>
+                  <a:ea typeface="Microsoft YaHei"/>
+                  <a:cs typeface="Arial"/>
+                </a:rPr>
+                <a:t>测试 · 调试 · 工程化</a:t>
+              </a:r>
+            </a:p>
+          </p:txBody>
+        </p:sp>
+        <p:sp>
+          <p:nvSpPr>
+            <p:cNvPr id="63" name="Rectangle 17">
+              <a:extLst>
+                <a:ext uri="{FF2B5EF4-FFF2-40B4-BE49-F238E27FC236}">
+                  <a16:creationId xmlns:a16="http://schemas.microsoft.com/office/drawing/2014/main" id="{100FEBC9-9675-2874-4C86-CBAF4964137B}"/>
+                </a:ext>
+              </a:extLst>
+            </p:cNvPr>
+            <p:cNvSpPr/>
+            <p:nvPr/>
+          </p:nvSpPr>
+          <p:spPr>
+            <a:xfrm>
+              <a:off x="1238250" y="3781425"/>
+              <a:ext cx="66675" cy="66675"/>
+            </a:xfrm>
+            <a:prstGeom prst="rect">
+              <a:avLst/>
+            </a:prstGeom>
+            <a:solidFill>
+              <a:srgbClr val="E30613"/>
+            </a:solidFill>
+            <a:ln>
+              <a:noFill/>
+            </a:ln>
+          </p:spPr>
+        </p:sp>
+        <p:sp>
+          <p:nvSpPr>
+            <p:cNvPr id="64" name="TextBox 18">
+              <a:extLst>
+                <a:ext uri="{FF2B5EF4-FFF2-40B4-BE49-F238E27FC236}">
+                  <a16:creationId xmlns:a16="http://schemas.microsoft.com/office/drawing/2014/main" id="{7215CDA9-88AE-07FA-8387-C67C35DED069}"/>
+                </a:ext>
+              </a:extLst>
+            </p:cNvPr>
+            <p:cNvSpPr txBox="1"/>
+            <p:nvPr/>
+          </p:nvSpPr>
+          <p:spPr>
+            <a:xfrm>
+              <a:off x="2010223" y="4021693"/>
+              <a:ext cx="837303" cy="169069"/>
+            </a:xfrm>
+            <a:prstGeom prst="rect">
+              <a:avLst/>
+            </a:prstGeom>
+            <a:noFill/>
+            <a:ln>
+              <a:noFill/>
+            </a:ln>
+          </p:spPr>
+          <p:txBody>
+            <a:bodyPr wrap="none" lIns="0" tIns="0" rIns="0" bIns="0" anchor="t" anchorCtr="0">
+              <a:spAutoFit/>
+            </a:bodyPr>
+            <a:lstStyle/>
+            <a:p>
+              <a:pPr algn="ctr"/>
+              <a:r>
+                <a:rPr lang="zh-CN" sz="860" dirty="0">
+                  <a:solidFill>
+                    <a:srgbClr val="555555"/>
+                  </a:solidFill>
+                  <a:latin typeface="Arial"/>
+                  <a:ea typeface="Microsoft YaHei"/>
+                  <a:cs typeface="Arial"/>
+                </a:rPr>
+                <a:t>读代码 · 架构感</a:t>
+              </a:r>
+            </a:p>
+          </p:txBody>
+        </p:sp>
+        <p:sp>
+          <p:nvSpPr>
+            <p:cNvPr id="65" name="Rectangle 19">
+              <a:extLst>
+                <a:ext uri="{FF2B5EF4-FFF2-40B4-BE49-F238E27FC236}">
+                  <a16:creationId xmlns:a16="http://schemas.microsoft.com/office/drawing/2014/main" id="{E9A88CB0-E4BE-2411-9C19-EE74682BA9F4}"/>
+                </a:ext>
+              </a:extLst>
+            </p:cNvPr>
+            <p:cNvSpPr/>
+            <p:nvPr/>
+          </p:nvSpPr>
+          <p:spPr>
+            <a:xfrm>
+              <a:off x="1238250" y="4067175"/>
+              <a:ext cx="66675" cy="66675"/>
+            </a:xfrm>
+            <a:prstGeom prst="rect">
+              <a:avLst/>
+            </a:prstGeom>
+            <a:solidFill>
+              <a:srgbClr val="E30613"/>
+            </a:solidFill>
+            <a:ln>
+              <a:noFill/>
+            </a:ln>
+          </p:spPr>
+        </p:sp>
+        <p:sp>
+          <p:nvSpPr>
+            <p:cNvPr id="66" name="Rectangle 20">
+              <a:extLst>
+                <a:ext uri="{FF2B5EF4-FFF2-40B4-BE49-F238E27FC236}">
+                  <a16:creationId xmlns:a16="http://schemas.microsoft.com/office/drawing/2014/main" id="{023850DD-3F73-34F2-27B6-C635175D671A}"/>
+                </a:ext>
+              </a:extLst>
+            </p:cNvPr>
+            <p:cNvSpPr/>
+            <p:nvPr/>
+          </p:nvSpPr>
+          <p:spPr>
+            <a:xfrm>
+              <a:off x="1200150" y="4686300"/>
+              <a:ext cx="2457450" cy="628650"/>
+            </a:xfrm>
+            <a:prstGeom prst="roundRect">
+              <a:avLst>
+                <a:gd name="adj" fmla="val 4545"/>
+              </a:avLst>
+            </a:prstGeom>
+            <a:solidFill>
+              <a:srgbClr val="F5F5F5"/>
+            </a:solidFill>
+            <a:ln>
+              <a:noFill/>
+            </a:ln>
+          </p:spPr>
+        </p:sp>
+        <p:sp>
+          <p:nvSpPr>
+            <p:cNvPr id="67" name="TextBox 21">
+              <a:extLst>
+                <a:ext uri="{FF2B5EF4-FFF2-40B4-BE49-F238E27FC236}">
+                  <a16:creationId xmlns:a16="http://schemas.microsoft.com/office/drawing/2014/main" id="{70C8A2C6-31FF-9126-FE75-D5806492E9EB}"/>
+                </a:ext>
+              </a:extLst>
+            </p:cNvPr>
+            <p:cNvSpPr txBox="1"/>
+            <p:nvPr/>
+          </p:nvSpPr>
+          <p:spPr>
+            <a:xfrm>
+              <a:off x="1770751" y="4836795"/>
+              <a:ext cx="1316248" cy="176212"/>
+            </a:xfrm>
+            <a:prstGeom prst="rect">
+              <a:avLst/>
+            </a:prstGeom>
+            <a:noFill/>
+            <a:ln>
+              <a:noFill/>
+            </a:ln>
+          </p:spPr>
+          <p:txBody>
+            <a:bodyPr wrap="none" lIns="0" tIns="0" rIns="0" bIns="0" anchor="t" anchorCtr="0">
+              <a:spAutoFit/>
+            </a:bodyPr>
+            <a:lstStyle/>
+            <a:p>
+              <a:pPr algn="ctr"/>
+              <a:r>
+                <a:rPr lang="zh-CN" sz="900" b="1" dirty="0">
                   <a:solidFill>
                     <a:srgbClr val="1A1A1A"/>
                   </a:solidFill>
@@ -30791,21 +32629,27 @@
                   <a:ea typeface="Microsoft YaHei"/>
                   <a:cs typeface="Arial"/>
                 </a:rPr>
-                <a:t>fundamentals（CS 底座）</a:t>
-              </a:r>
-            </a:p>
-          </p:txBody>
-        </p:sp>
-        <p:sp>
-          <p:nvSpPr>
-            <p:cNvPr id="12" name="TextBox 12"/>
-            <p:cNvSpPr txBox="1"/>
-            <p:nvPr/>
-          </p:nvSpPr>
-          <p:spPr>
-            <a:xfrm>
-              <a:off x="1943348" y="3217545"/>
-              <a:ext cx="875805" cy="176212"/>
+                <a:t>AI 越快，越需要判断力</a:t>
+              </a:r>
+            </a:p>
+          </p:txBody>
+        </p:sp>
+        <p:sp>
+          <p:nvSpPr>
+            <p:cNvPr id="68" name="TextBox 22">
+              <a:extLst>
+                <a:ext uri="{FF2B5EF4-FFF2-40B4-BE49-F238E27FC236}">
+                  <a16:creationId xmlns:a16="http://schemas.microsoft.com/office/drawing/2014/main" id="{4059E043-B444-C451-88C4-122320A1D086}"/>
+                </a:ext>
+              </a:extLst>
+            </p:cNvPr>
+            <p:cNvSpPr txBox="1"/>
+            <p:nvPr/>
+          </p:nvSpPr>
+          <p:spPr>
+            <a:xfrm>
+              <a:off x="1903133" y="5069443"/>
+              <a:ext cx="1051484" cy="169069"/>
             </a:xfrm>
             <a:prstGeom prst="rect">
               <a:avLst/>
@@ -30823,7 +32667,7 @@
             <a:p>
               <a:pPr algn="ctr"/>
               <a:r>
-                <a:rPr lang="zh-CN" sz="900" dirty="0">
+                <a:rPr lang="zh-CN" sz="860" dirty="0">
                   <a:solidFill>
                     <a:srgbClr val="555555"/>
                   </a:solidFill>
@@ -30831,221 +32675,27 @@
                   <a:ea typeface="Microsoft YaHei"/>
                   <a:cs typeface="Arial"/>
                 </a:rPr>
-                <a:t>数据结构 · 算法</a:t>
-              </a:r>
-            </a:p>
-          </p:txBody>
-        </p:sp>
-        <p:sp>
-          <p:nvSpPr>
-            <p:cNvPr id="13" name="TextBox 13"/>
-            <p:cNvSpPr txBox="1"/>
-            <p:nvPr/>
-          </p:nvSpPr>
-          <p:spPr>
-            <a:xfrm>
-              <a:off x="1691945" y="3503295"/>
-              <a:ext cx="1378610" cy="176212"/>
-            </a:xfrm>
-            <a:prstGeom prst="rect">
-              <a:avLst/>
-            </a:prstGeom>
-            <a:noFill/>
-            <a:ln>
-              <a:noFill/>
-            </a:ln>
-          </p:spPr>
-          <p:txBody>
-            <a:bodyPr wrap="none" lIns="0" tIns="0" rIns="0" bIns="0" anchor="t" anchorCtr="0">
-              <a:spAutoFit/>
-            </a:bodyPr>
-            <a:lstStyle/>
-            <a:p>
-              <a:pPr algn="ctr"/>
-              <a:r>
-                <a:rPr lang="zh-CN" sz="900" dirty="0">
-                  <a:solidFill>
-                    <a:srgbClr val="555555"/>
-                  </a:solidFill>
-                  <a:latin typeface="Arial"/>
-                  <a:ea typeface="Microsoft YaHei"/>
-                  <a:cs typeface="Arial"/>
-                </a:rPr>
-                <a:t>操作系统 · 网络 · 数据库</a:t>
-              </a:r>
-            </a:p>
-          </p:txBody>
-        </p:sp>
-        <p:sp>
-          <p:nvSpPr>
-            <p:cNvPr id="14" name="TextBox 14"/>
-            <p:cNvSpPr txBox="1"/>
-            <p:nvPr/>
-          </p:nvSpPr>
-          <p:spPr>
-            <a:xfrm>
-              <a:off x="1813103" y="3789045"/>
-              <a:ext cx="1136294" cy="176212"/>
-            </a:xfrm>
-            <a:prstGeom prst="rect">
-              <a:avLst/>
-            </a:prstGeom>
-            <a:noFill/>
-            <a:ln>
-              <a:noFill/>
-            </a:ln>
-          </p:spPr>
-          <p:txBody>
-            <a:bodyPr wrap="none" lIns="0" tIns="0" rIns="0" bIns="0" anchor="t" anchorCtr="0">
-              <a:spAutoFit/>
-            </a:bodyPr>
-            <a:lstStyle/>
-            <a:p>
-              <a:pPr algn="ctr"/>
-              <a:r>
-                <a:rPr lang="zh-CN" sz="900" dirty="0">
-                  <a:solidFill>
-                    <a:srgbClr val="555555"/>
-                  </a:solidFill>
-                  <a:latin typeface="Arial"/>
-                  <a:ea typeface="Microsoft YaHei"/>
-                  <a:cs typeface="Arial"/>
-                </a:rPr>
-                <a:t>测试 · 调试 · 工程化</a:t>
-              </a:r>
-            </a:p>
-          </p:txBody>
-        </p:sp>
-        <p:sp>
-          <p:nvSpPr>
-            <p:cNvPr id="15" name="TextBox 15"/>
-            <p:cNvSpPr txBox="1"/>
-            <p:nvPr/>
-          </p:nvSpPr>
-          <p:spPr>
-            <a:xfrm>
-              <a:off x="1952434" y="4074795"/>
-              <a:ext cx="857631" cy="176212"/>
-            </a:xfrm>
-            <a:prstGeom prst="rect">
-              <a:avLst/>
-            </a:prstGeom>
-            <a:noFill/>
-            <a:ln>
-              <a:noFill/>
-            </a:ln>
-          </p:spPr>
-          <p:txBody>
-            <a:bodyPr wrap="none" lIns="0" tIns="0" rIns="0" bIns="0" anchor="t" anchorCtr="0">
-              <a:spAutoFit/>
-            </a:bodyPr>
-            <a:lstStyle/>
-            <a:p>
-              <a:pPr algn="ctr"/>
-              <a:r>
-                <a:rPr lang="zh-CN" sz="900" dirty="0">
-                  <a:solidFill>
-                    <a:srgbClr val="555555"/>
-                  </a:solidFill>
-                  <a:latin typeface="Arial"/>
-                  <a:ea typeface="Microsoft YaHei"/>
-                  <a:cs typeface="Arial"/>
-                </a:rPr>
-                <a:t>架构与代码阅读</a:t>
-              </a:r>
-            </a:p>
-          </p:txBody>
-        </p:sp>
-        <p:sp>
-          <p:nvSpPr>
-            <p:cNvPr id="16" name="TextBox 16"/>
-            <p:cNvSpPr txBox="1"/>
-            <p:nvPr/>
-          </p:nvSpPr>
-          <p:spPr>
-            <a:xfrm>
-              <a:off x="1913395" y="4421743"/>
-              <a:ext cx="935711" cy="169069"/>
-            </a:xfrm>
-            <a:prstGeom prst="rect">
-              <a:avLst/>
-            </a:prstGeom>
-            <a:noFill/>
-            <a:ln>
-              <a:noFill/>
-            </a:ln>
-          </p:spPr>
-          <p:txBody>
-            <a:bodyPr wrap="none" lIns="0" tIns="0" rIns="0" bIns="0" anchor="t" anchorCtr="0">
-              <a:spAutoFit/>
-            </a:bodyPr>
-            <a:lstStyle/>
-            <a:p>
-              <a:pPr algn="ctr"/>
-              <a:r>
-                <a:rPr lang="zh-CN" sz="860" b="1" dirty="0">
-                  <a:solidFill>
-                    <a:srgbClr val="E30613"/>
-                  </a:solidFill>
-                  <a:latin typeface="Arial"/>
-                  <a:ea typeface="Microsoft YaHei"/>
-                  <a:cs typeface="Arial"/>
-                </a:rPr>
-                <a:t>这是不变的核心：</a:t>
-              </a:r>
-            </a:p>
-          </p:txBody>
-        </p:sp>
-        <p:sp>
-          <p:nvSpPr>
-            <p:cNvPr id="17" name="TextBox 17"/>
-            <p:cNvSpPr txBox="1"/>
-            <p:nvPr/>
-          </p:nvSpPr>
-          <p:spPr>
-            <a:xfrm>
-              <a:off x="1878007" y="4650343"/>
-              <a:ext cx="1006485" cy="169069"/>
-            </a:xfrm>
-            <a:prstGeom prst="rect">
-              <a:avLst/>
-            </a:prstGeom>
-            <a:noFill/>
-            <a:ln>
-              <a:noFill/>
-            </a:ln>
-          </p:spPr>
-          <p:txBody>
-            <a:bodyPr wrap="none" lIns="0" tIns="0" rIns="0" bIns="0" anchor="t" anchorCtr="0">
-              <a:spAutoFit/>
-            </a:bodyPr>
-            <a:lstStyle/>
-            <a:p>
-              <a:pPr algn="ctr"/>
-              <a:r>
-                <a:rPr lang="zh-CN" sz="860" dirty="0">
-                  <a:solidFill>
-                    <a:srgbClr val="555555"/>
-                  </a:solidFill>
-                  <a:latin typeface="Arial"/>
-                  <a:ea typeface="Microsoft YaHei"/>
-                  <a:cs typeface="Arial"/>
-                </a:rPr>
-                <a:t>AI 越快，越需要它</a:t>
-              </a:r>
-            </a:p>
-          </p:txBody>
-        </p:sp>
-        <p:sp>
-          <p:nvSpPr>
-            <p:cNvPr id="18" name="Rectangle 18"/>
+                <a:t>地基只会越来越值钱</a:t>
+              </a:r>
+            </a:p>
+          </p:txBody>
+        </p:sp>
+        <p:sp>
+          <p:nvSpPr>
+            <p:cNvPr id="69" name="Rectangle 23">
+              <a:extLst>
+                <a:ext uri="{FF2B5EF4-FFF2-40B4-BE49-F238E27FC236}">
+                  <a16:creationId xmlns:a16="http://schemas.microsoft.com/office/drawing/2014/main" id="{A34104AF-0C1F-4C32-143A-A80C66F095C1}"/>
+                </a:ext>
+              </a:extLst>
+            </p:cNvPr>
             <p:cNvSpPr/>
             <p:nvPr/>
           </p:nvSpPr>
           <p:spPr>
             <a:xfrm>
-              <a:off x="3905250" y="2381250"/>
-              <a:ext cx="4667250" cy="3143250"/>
+              <a:off x="4000500" y="2400300"/>
+              <a:ext cx="4762500" cy="3143250"/>
             </a:xfrm>
             <a:prstGeom prst="roundRect">
               <a:avLst>
@@ -31064,14 +32714,20 @@
         </p:sp>
         <p:sp>
           <p:nvSpPr>
-            <p:cNvPr id="19" name="Rectangle 19"/>
+            <p:cNvPr id="70" name="Rectangle 24">
+              <a:extLst>
+                <a:ext uri="{FF2B5EF4-FFF2-40B4-BE49-F238E27FC236}">
+                  <a16:creationId xmlns:a16="http://schemas.microsoft.com/office/drawing/2014/main" id="{383B9C2F-36CF-7330-92FE-1FF00C1760C4}"/>
+                </a:ext>
+              </a:extLst>
+            </p:cNvPr>
             <p:cNvSpPr/>
             <p:nvPr/>
           </p:nvSpPr>
           <p:spPr>
             <a:xfrm>
-              <a:off x="3905250" y="2381250"/>
-              <a:ext cx="4667250" cy="57150"/>
+              <a:off x="4000500" y="2400300"/>
+              <a:ext cx="4762500" cy="57150"/>
             </a:xfrm>
             <a:prstGeom prst="rect">
               <a:avLst/>
@@ -31086,14 +32742,20 @@
         </p:sp>
         <p:sp>
           <p:nvSpPr>
-            <p:cNvPr id="20" name="TextBox 20"/>
-            <p:cNvSpPr txBox="1"/>
-            <p:nvPr/>
-          </p:nvSpPr>
-          <p:spPr>
-            <a:xfrm>
-              <a:off x="4968338" y="2556510"/>
-              <a:ext cx="2541075" cy="234696"/>
+            <p:cNvPr id="71" name="TextBox 25">
+              <a:extLst>
+                <a:ext uri="{FF2B5EF4-FFF2-40B4-BE49-F238E27FC236}">
+                  <a16:creationId xmlns:a16="http://schemas.microsoft.com/office/drawing/2014/main" id="{0C8D78FB-1CC0-C922-65C6-AFDD10CDCD68}"/>
+                </a:ext>
+              </a:extLst>
+            </p:cNvPr>
+            <p:cNvSpPr txBox="1"/>
+            <p:nvPr/>
+          </p:nvSpPr>
+          <p:spPr>
+            <a:xfrm>
+              <a:off x="5242678" y="2587704"/>
+              <a:ext cx="2278145" cy="212693"/>
             </a:xfrm>
             <a:prstGeom prst="rect">
               <a:avLst/>
@@ -31111,7 +32773,7 @@
             <a:p>
               <a:pPr algn="ctr"/>
               <a:r>
-                <a:rPr lang="zh-CN" sz="1200" b="1" dirty="0">
+                <a:rPr lang="zh-CN" sz="1090" b="1" dirty="0">
                   <a:solidFill>
                     <a:srgbClr val="E30613"/>
                   </a:solidFill>
@@ -31119,25 +32781,31 @@
                   <a:ea typeface="Microsoft YaHei"/>
                   <a:cs typeface="Arial"/>
                 </a:rPr>
-                <a:t>Using coding agents ★ 本讲重点</a:t>
-              </a:r>
-            </a:p>
-          </p:txBody>
-        </p:sp>
-        <p:sp>
-          <p:nvSpPr>
-            <p:cNvPr id="21" name="Rectangle 21"/>
+                <a:t>② 主线 · 让 AI 干活（本讲主体）</a:t>
+              </a:r>
+            </a:p>
+          </p:txBody>
+        </p:sp>
+        <p:sp>
+          <p:nvSpPr>
+            <p:cNvPr id="72" name="Rectangle 26">
+              <a:extLst>
+                <a:ext uri="{FF2B5EF4-FFF2-40B4-BE49-F238E27FC236}">
+                  <a16:creationId xmlns:a16="http://schemas.microsoft.com/office/drawing/2014/main" id="{CA878B68-75B1-FAC2-4AA9-AAA677F82723}"/>
+                </a:ext>
+              </a:extLst>
+            </p:cNvPr>
             <p:cNvSpPr/>
             <p:nvPr/>
           </p:nvSpPr>
           <p:spPr>
             <a:xfrm>
-              <a:off x="4171950" y="2933700"/>
-              <a:ext cx="4133850" cy="361950"/>
+              <a:off x="4210050" y="3009900"/>
+              <a:ext cx="4343400" cy="381000"/>
             </a:xfrm>
             <a:prstGeom prst="roundRect">
               <a:avLst>
-                <a:gd name="adj" fmla="val 7895"/>
+                <a:gd name="adj" fmla="val 7500"/>
               </a:avLst>
             </a:prstGeom>
             <a:solidFill>
@@ -31152,14 +32820,20 @@
         </p:sp>
         <p:sp>
           <p:nvSpPr>
-            <p:cNvPr id="22" name="TextBox 22"/>
-            <p:cNvSpPr txBox="1"/>
-            <p:nvPr/>
-          </p:nvSpPr>
-          <p:spPr>
-            <a:xfrm>
-              <a:off x="4329112" y="3069193"/>
-              <a:ext cx="3174302" cy="169069"/>
+            <p:cNvPr id="73" name="TextBox 27">
+              <a:extLst>
+                <a:ext uri="{FF2B5EF4-FFF2-40B4-BE49-F238E27FC236}">
+                  <a16:creationId xmlns:a16="http://schemas.microsoft.com/office/drawing/2014/main" id="{DF0A91E6-FCC1-4571-58D4-89D23116F109}"/>
+                </a:ext>
+              </a:extLst>
+            </p:cNvPr>
+            <p:cNvSpPr txBox="1"/>
+            <p:nvPr/>
+          </p:nvSpPr>
+          <p:spPr>
+            <a:xfrm>
+              <a:off x="4395788" y="3160395"/>
+              <a:ext cx="970255" cy="176212"/>
             </a:xfrm>
             <a:prstGeom prst="rect">
               <a:avLst/>
@@ -31177,7 +32851,7 @@
             <a:p>
               <a:pPr algn="l"/>
               <a:r>
-                <a:rPr lang="zh-CN" sz="860" b="1" dirty="0">
+                <a:rPr lang="zh-CN" sz="900" b="1" dirty="0">
                   <a:solidFill>
                     <a:srgbClr val="1A1A1A"/>
                   </a:solidFill>
@@ -31185,25 +32859,77 @@
                   <a:ea typeface="Microsoft YaHei"/>
                   <a:cs typeface="Arial"/>
                 </a:rPr>
-                <a:t>① Directing the workflow 引导：精准 Prompt · 验收标准</a:t>
-              </a:r>
-            </a:p>
-          </p:txBody>
-        </p:sp>
-        <p:sp>
-          <p:nvSpPr>
-            <p:cNvPr id="23" name="Rectangle 23"/>
+                <a:t>① 告诉 Directing</a:t>
+              </a:r>
+            </a:p>
+          </p:txBody>
+        </p:sp>
+        <p:sp>
+          <p:nvSpPr>
+            <p:cNvPr id="74" name="TextBox 28">
+              <a:extLst>
+                <a:ext uri="{FF2B5EF4-FFF2-40B4-BE49-F238E27FC236}">
+                  <a16:creationId xmlns:a16="http://schemas.microsoft.com/office/drawing/2014/main" id="{A5E2797C-F31A-B5BC-EEF5-AC71FFA1DF10}"/>
+                </a:ext>
+              </a:extLst>
+            </p:cNvPr>
+            <p:cNvSpPr txBox="1"/>
+            <p:nvPr/>
+          </p:nvSpPr>
+          <p:spPr>
+            <a:xfrm>
+              <a:off x="5938838" y="3168491"/>
+              <a:ext cx="1681909" cy="161925"/>
+            </a:xfrm>
+            <a:prstGeom prst="rect">
+              <a:avLst/>
+            </a:prstGeom>
+            <a:noFill/>
+            <a:ln>
+              <a:noFill/>
+            </a:ln>
+          </p:spPr>
+          <p:txBody>
+            <a:bodyPr wrap="none" lIns="0" tIns="0" rIns="0" bIns="0" anchor="t" anchorCtr="0">
+              <a:spAutoFit/>
+            </a:bodyPr>
+            <a:lstStyle/>
+            <a:p>
+              <a:pPr algn="l"/>
+              <a:r>
+                <a:rPr lang="zh-CN" sz="820" dirty="0">
+                  <a:solidFill>
+                    <a:srgbClr val="555555"/>
+                  </a:solidFill>
+                  <a:latin typeface="Arial"/>
+                  <a:ea typeface="Microsoft YaHei"/>
+                  <a:cs typeface="Arial"/>
+                </a:rPr>
+                <a:t>把「要什么」说清楚 · 给验收标准</a:t>
+              </a:r>
+            </a:p>
+          </p:txBody>
+        </p:sp>
+        <p:sp>
+          <p:nvSpPr>
+            <p:cNvPr id="75" name="Rectangle 29">
+              <a:extLst>
+                <a:ext uri="{FF2B5EF4-FFF2-40B4-BE49-F238E27FC236}">
+                  <a16:creationId xmlns:a16="http://schemas.microsoft.com/office/drawing/2014/main" id="{D39AEA24-A38D-3C4F-E808-E4D4F55910CA}"/>
+                </a:ext>
+              </a:extLst>
+            </p:cNvPr>
             <p:cNvSpPr/>
             <p:nvPr/>
           </p:nvSpPr>
           <p:spPr>
             <a:xfrm>
-              <a:off x="4171950" y="3371850"/>
-              <a:ext cx="4133850" cy="361950"/>
+              <a:off x="4210050" y="3467100"/>
+              <a:ext cx="4343400" cy="381000"/>
             </a:xfrm>
             <a:prstGeom prst="roundRect">
               <a:avLst>
-                <a:gd name="adj" fmla="val 7895"/>
+                <a:gd name="adj" fmla="val 7500"/>
               </a:avLst>
             </a:prstGeom>
             <a:solidFill>
@@ -31218,14 +32944,20 @@
         </p:sp>
         <p:sp>
           <p:nvSpPr>
-            <p:cNvPr id="24" name="TextBox 24"/>
-            <p:cNvSpPr txBox="1"/>
-            <p:nvPr/>
-          </p:nvSpPr>
-          <p:spPr>
-            <a:xfrm>
-              <a:off x="4329112" y="3507343"/>
-              <a:ext cx="3011200" cy="169069"/>
+            <p:cNvPr id="76" name="TextBox 30">
+              <a:extLst>
+                <a:ext uri="{FF2B5EF4-FFF2-40B4-BE49-F238E27FC236}">
+                  <a16:creationId xmlns:a16="http://schemas.microsoft.com/office/drawing/2014/main" id="{E36C5FB5-0B04-EA56-30B8-D174FB1667C5}"/>
+                </a:ext>
+              </a:extLst>
+            </p:cNvPr>
+            <p:cNvSpPr txBox="1"/>
+            <p:nvPr/>
+          </p:nvSpPr>
+          <p:spPr>
+            <a:xfrm>
+              <a:off x="4395788" y="3617595"/>
+              <a:ext cx="900541" cy="176212"/>
             </a:xfrm>
             <a:prstGeom prst="rect">
               <a:avLst/>
@@ -31243,7 +32975,7 @@
             <a:p>
               <a:pPr algn="l"/>
               <a:r>
-                <a:rPr lang="zh-CN" sz="860" b="1" dirty="0">
+                <a:rPr lang="zh-CN" sz="900" b="1" dirty="0">
                   <a:solidFill>
                     <a:srgbClr val="1A1A1A"/>
                   </a:solidFill>
@@ -31251,25 +32983,77 @@
                   <a:ea typeface="Microsoft YaHei"/>
                   <a:cs typeface="Arial"/>
                 </a:rPr>
-                <a:t>② Enabling agent autonomy 授权：决策空间 · 反馈闭环</a:t>
-              </a:r>
-            </a:p>
-          </p:txBody>
-        </p:sp>
-        <p:sp>
-          <p:nvSpPr>
-            <p:cNvPr id="25" name="Rectangle 25"/>
+                <a:t>② 放手 Enabling</a:t>
+              </a:r>
+            </a:p>
+          </p:txBody>
+        </p:sp>
+        <p:sp>
+          <p:nvSpPr>
+            <p:cNvPr id="77" name="TextBox 31">
+              <a:extLst>
+                <a:ext uri="{FF2B5EF4-FFF2-40B4-BE49-F238E27FC236}">
+                  <a16:creationId xmlns:a16="http://schemas.microsoft.com/office/drawing/2014/main" id="{A24DEE4B-657B-EEC0-7288-C5377352B7D6}"/>
+                </a:ext>
+              </a:extLst>
+            </p:cNvPr>
+            <p:cNvSpPr txBox="1"/>
+            <p:nvPr/>
+          </p:nvSpPr>
+          <p:spPr>
+            <a:xfrm>
+              <a:off x="5938838" y="3625691"/>
+              <a:ext cx="1461132" cy="161925"/>
+            </a:xfrm>
+            <a:prstGeom prst="rect">
+              <a:avLst/>
+            </a:prstGeom>
+            <a:noFill/>
+            <a:ln>
+              <a:noFill/>
+            </a:ln>
+          </p:spPr>
+          <p:txBody>
+            <a:bodyPr wrap="none" lIns="0" tIns="0" rIns="0" bIns="0" anchor="t" anchorCtr="0">
+              <a:spAutoFit/>
+            </a:bodyPr>
+            <a:lstStyle/>
+            <a:p>
+              <a:pPr algn="l"/>
+              <a:r>
+                <a:rPr lang="zh-CN" sz="820" dirty="0">
+                  <a:solidFill>
+                    <a:srgbClr val="555555"/>
+                  </a:solidFill>
+                  <a:latin typeface="Arial"/>
+                  <a:ea typeface="Microsoft YaHei"/>
+                  <a:cs typeface="Arial"/>
+                </a:rPr>
+                <a:t>让它自己想办法 · 给反馈闭环</a:t>
+              </a:r>
+            </a:p>
+          </p:txBody>
+        </p:sp>
+        <p:sp>
+          <p:nvSpPr>
+            <p:cNvPr id="78" name="Rectangle 32">
+              <a:extLst>
+                <a:ext uri="{FF2B5EF4-FFF2-40B4-BE49-F238E27FC236}">
+                  <a16:creationId xmlns:a16="http://schemas.microsoft.com/office/drawing/2014/main" id="{3B6791C1-A1A2-E43B-18B1-454721DAC908}"/>
+                </a:ext>
+              </a:extLst>
+            </p:cNvPr>
             <p:cNvSpPr/>
             <p:nvPr/>
           </p:nvSpPr>
           <p:spPr>
             <a:xfrm>
-              <a:off x="4171950" y="3810000"/>
-              <a:ext cx="4133850" cy="361950"/>
+              <a:off x="4210050" y="3924300"/>
+              <a:ext cx="4343400" cy="381000"/>
             </a:xfrm>
             <a:prstGeom prst="roundRect">
               <a:avLst>
-                <a:gd name="adj" fmla="val 7895"/>
+                <a:gd name="adj" fmla="val 7500"/>
               </a:avLst>
             </a:prstGeom>
             <a:solidFill>
@@ -31284,14 +33068,20 @@
         </p:sp>
         <p:sp>
           <p:nvSpPr>
-            <p:cNvPr id="26" name="TextBox 26"/>
-            <p:cNvSpPr txBox="1"/>
-            <p:nvPr/>
-          </p:nvSpPr>
-          <p:spPr>
-            <a:xfrm>
-              <a:off x="4329112" y="3945493"/>
-              <a:ext cx="2769737" cy="169069"/>
+            <p:cNvPr id="79" name="TextBox 33">
+              <a:extLst>
+                <a:ext uri="{FF2B5EF4-FFF2-40B4-BE49-F238E27FC236}">
+                  <a16:creationId xmlns:a16="http://schemas.microsoft.com/office/drawing/2014/main" id="{C0732F28-831B-BC68-8153-76425EB7C095}"/>
+                </a:ext>
+              </a:extLst>
+            </p:cNvPr>
+            <p:cNvSpPr txBox="1"/>
+            <p:nvPr/>
+          </p:nvSpPr>
+          <p:spPr>
+            <a:xfrm>
+              <a:off x="4395788" y="4074795"/>
+              <a:ext cx="995858" cy="176212"/>
             </a:xfrm>
             <a:prstGeom prst="rect">
               <a:avLst/>
@@ -31309,7 +33099,7 @@
             <a:p>
               <a:pPr algn="l"/>
               <a:r>
-                <a:rPr lang="zh-CN" sz="860" b="1" dirty="0">
+                <a:rPr lang="zh-CN" sz="900" b="1" dirty="0">
                   <a:solidFill>
                     <a:srgbClr val="1A1A1A"/>
                   </a:solidFill>
@@ -31317,25 +33107,77 @@
                   <a:ea typeface="Microsoft YaHei"/>
                   <a:cs typeface="Arial"/>
                 </a:rPr>
-                <a:t>③ Reviewing the work 审查：输出≠正确 · 评估框架</a:t>
-              </a:r>
-            </a:p>
-          </p:txBody>
-        </p:sp>
-        <p:sp>
-          <p:nvSpPr>
-            <p:cNvPr id="27" name="Rectangle 27"/>
+                <a:t>③ 审查 Reviewing</a:t>
+              </a:r>
+            </a:p>
+          </p:txBody>
+        </p:sp>
+        <p:sp>
+          <p:nvSpPr>
+            <p:cNvPr id="80" name="TextBox 34">
+              <a:extLst>
+                <a:ext uri="{FF2B5EF4-FFF2-40B4-BE49-F238E27FC236}">
+                  <a16:creationId xmlns:a16="http://schemas.microsoft.com/office/drawing/2014/main" id="{A5376A56-D435-1917-A735-FA44194BBC8C}"/>
+                </a:ext>
+              </a:extLst>
+            </p:cNvPr>
+            <p:cNvSpPr txBox="1"/>
+            <p:nvPr/>
+          </p:nvSpPr>
+          <p:spPr>
+            <a:xfrm>
+              <a:off x="5938838" y="4082891"/>
+              <a:ext cx="1571521" cy="161925"/>
+            </a:xfrm>
+            <a:prstGeom prst="rect">
+              <a:avLst/>
+            </a:prstGeom>
+            <a:noFill/>
+            <a:ln>
+              <a:noFill/>
+            </a:ln>
+          </p:spPr>
+          <p:txBody>
+            <a:bodyPr wrap="none" lIns="0" tIns="0" rIns="0" bIns="0" anchor="t" anchorCtr="0">
+              <a:spAutoFit/>
+            </a:bodyPr>
+            <a:lstStyle/>
+            <a:p>
+              <a:pPr algn="l"/>
+              <a:r>
+                <a:rPr lang="zh-CN" sz="820" dirty="0">
+                  <a:solidFill>
+                    <a:srgbClr val="555555"/>
+                  </a:solidFill>
+                  <a:latin typeface="Arial"/>
+                  <a:ea typeface="Microsoft YaHei"/>
+                  <a:cs typeface="Arial"/>
+                </a:rPr>
+                <a:t>检查它做得对不对 · 不轻信输出</a:t>
+              </a:r>
+            </a:p>
+          </p:txBody>
+        </p:sp>
+        <p:sp>
+          <p:nvSpPr>
+            <p:cNvPr id="81" name="Rectangle 35">
+              <a:extLst>
+                <a:ext uri="{FF2B5EF4-FFF2-40B4-BE49-F238E27FC236}">
+                  <a16:creationId xmlns:a16="http://schemas.microsoft.com/office/drawing/2014/main" id="{B8213ECC-15FB-FEDE-281A-BC991B62B9C7}"/>
+                </a:ext>
+              </a:extLst>
+            </p:cNvPr>
             <p:cNvSpPr/>
             <p:nvPr/>
           </p:nvSpPr>
           <p:spPr>
             <a:xfrm>
-              <a:off x="4171950" y="4248150"/>
-              <a:ext cx="4133850" cy="361950"/>
+              <a:off x="4210050" y="4381500"/>
+              <a:ext cx="4343400" cy="381000"/>
             </a:xfrm>
             <a:prstGeom prst="roundRect">
               <a:avLst>
-                <a:gd name="adj" fmla="val 7895"/>
+                <a:gd name="adj" fmla="val 7500"/>
               </a:avLst>
             </a:prstGeom>
             <a:solidFill>
@@ -31350,14 +33192,20 @@
         </p:sp>
         <p:sp>
           <p:nvSpPr>
-            <p:cNvPr id="28" name="TextBox 28"/>
-            <p:cNvSpPr txBox="1"/>
-            <p:nvPr/>
-          </p:nvSpPr>
-          <p:spPr>
-            <a:xfrm>
-              <a:off x="4329112" y="4383643"/>
-              <a:ext cx="2654101" cy="169069"/>
+            <p:cNvPr id="82" name="TextBox 36">
+              <a:extLst>
+                <a:ext uri="{FF2B5EF4-FFF2-40B4-BE49-F238E27FC236}">
+                  <a16:creationId xmlns:a16="http://schemas.microsoft.com/office/drawing/2014/main" id="{D8A75773-004B-73A7-1B15-F1F098CE0D95}"/>
+                </a:ext>
+              </a:extLst>
+            </p:cNvPr>
+            <p:cNvSpPr txBox="1"/>
+            <p:nvPr/>
+          </p:nvSpPr>
+          <p:spPr>
+            <a:xfrm>
+              <a:off x="4395788" y="4531995"/>
+              <a:ext cx="1135395" cy="176212"/>
             </a:xfrm>
             <a:prstGeom prst="rect">
               <a:avLst/>
@@ -31375,7 +33223,7 @@
             <a:p>
               <a:pPr algn="l"/>
               <a:r>
-                <a:rPr lang="zh-CN" sz="860" b="1" dirty="0">
+                <a:rPr lang="zh-CN" sz="900" b="1" dirty="0">
                   <a:solidFill>
                     <a:srgbClr val="1A1A1A"/>
                   </a:solidFill>
@@ -31383,25 +33231,77 @@
                   <a:ea typeface="Microsoft YaHei"/>
                   <a:cs typeface="Arial"/>
                 </a:rPr>
-                <a:t>④ Customizing &amp; env 定制：MCP · 工具链 · 权限</a:t>
-              </a:r>
-            </a:p>
-          </p:txBody>
-        </p:sp>
-        <p:sp>
-          <p:nvSpPr>
-            <p:cNvPr id="29" name="Rectangle 29"/>
+                <a:t>④ 定制 Customizing</a:t>
+              </a:r>
+            </a:p>
+          </p:txBody>
+        </p:sp>
+        <p:sp>
+          <p:nvSpPr>
+            <p:cNvPr id="83" name="TextBox 37">
+              <a:extLst>
+                <a:ext uri="{FF2B5EF4-FFF2-40B4-BE49-F238E27FC236}">
+                  <a16:creationId xmlns:a16="http://schemas.microsoft.com/office/drawing/2014/main" id="{A871338A-381E-827D-9EF3-C2B6960022F8}"/>
+                </a:ext>
+              </a:extLst>
+            </p:cNvPr>
+            <p:cNvSpPr txBox="1"/>
+            <p:nvPr/>
+          </p:nvSpPr>
+          <p:spPr>
+            <a:xfrm>
+              <a:off x="5938838" y="4540091"/>
+              <a:ext cx="1659936" cy="161925"/>
+            </a:xfrm>
+            <a:prstGeom prst="rect">
+              <a:avLst/>
+            </a:prstGeom>
+            <a:noFill/>
+            <a:ln>
+              <a:noFill/>
+            </a:ln>
+          </p:spPr>
+          <p:txBody>
+            <a:bodyPr wrap="none" lIns="0" tIns="0" rIns="0" bIns="0" anchor="t" anchorCtr="0">
+              <a:spAutoFit/>
+            </a:bodyPr>
+            <a:lstStyle/>
+            <a:p>
+              <a:pPr algn="l"/>
+              <a:r>
+                <a:rPr lang="zh-CN" sz="820" dirty="0">
+                  <a:solidFill>
+                    <a:srgbClr val="555555"/>
+                  </a:solidFill>
+                  <a:latin typeface="Arial"/>
+                  <a:ea typeface="Microsoft YaHei"/>
+                  <a:cs typeface="Arial"/>
+                </a:rPr>
+                <a:t>接上你的工具 · MCP · 最小权限</a:t>
+              </a:r>
+            </a:p>
+          </p:txBody>
+        </p:sp>
+        <p:sp>
+          <p:nvSpPr>
+            <p:cNvPr id="84" name="Rectangle 38">
+              <a:extLst>
+                <a:ext uri="{FF2B5EF4-FFF2-40B4-BE49-F238E27FC236}">
+                  <a16:creationId xmlns:a16="http://schemas.microsoft.com/office/drawing/2014/main" id="{5C93E8C9-36BF-A6E7-2829-51B32C6FA166}"/>
+                </a:ext>
+              </a:extLst>
+            </p:cNvPr>
             <p:cNvSpPr/>
             <p:nvPr/>
           </p:nvSpPr>
           <p:spPr>
             <a:xfrm>
-              <a:off x="4171950" y="4686300"/>
-              <a:ext cx="4133850" cy="361950"/>
+              <a:off x="4210050" y="4838700"/>
+              <a:ext cx="4343400" cy="381000"/>
             </a:xfrm>
             <a:prstGeom prst="roundRect">
               <a:avLst>
-                <a:gd name="adj" fmla="val 7895"/>
+                <a:gd name="adj" fmla="val 7500"/>
               </a:avLst>
             </a:prstGeom>
             <a:solidFill>
@@ -31416,14 +33316,20 @@
         </p:sp>
         <p:sp>
           <p:nvSpPr>
-            <p:cNvPr id="30" name="TextBox 30"/>
-            <p:cNvSpPr txBox="1"/>
-            <p:nvPr/>
-          </p:nvSpPr>
-          <p:spPr>
-            <a:xfrm>
-              <a:off x="4329112" y="4821793"/>
-              <a:ext cx="3185711" cy="169069"/>
+            <p:cNvPr id="85" name="TextBox 39">
+              <a:extLst>
+                <a:ext uri="{FF2B5EF4-FFF2-40B4-BE49-F238E27FC236}">
+                  <a16:creationId xmlns:a16="http://schemas.microsoft.com/office/drawing/2014/main" id="{DEAD1AE5-F8A5-EC11-1979-151117B802A8}"/>
+                </a:ext>
+              </a:extLst>
+            </p:cNvPr>
+            <p:cNvSpPr txBox="1"/>
+            <p:nvPr/>
+          </p:nvSpPr>
+          <p:spPr>
+            <a:xfrm>
+              <a:off x="4395788" y="4989195"/>
+              <a:ext cx="1141788" cy="176212"/>
             </a:xfrm>
             <a:prstGeom prst="rect">
               <a:avLst/>
@@ -31441,7 +33347,7 @@
             <a:p>
               <a:pPr algn="l"/>
               <a:r>
-                <a:rPr lang="zh-CN" sz="860" b="1" dirty="0">
+                <a:rPr lang="zh-CN" sz="900" b="1" dirty="0">
                   <a:solidFill>
                     <a:srgbClr val="1A1A1A"/>
                   </a:solidFill>
@@ -31449,25 +33355,123 @@
                   <a:ea typeface="Microsoft YaHei"/>
                   <a:cs typeface="Arial"/>
                 </a:rPr>
-                <a:t>⑤ Coding agent foundations 原理：Token · 上下文 · 采样</a:t>
-              </a:r>
-            </a:p>
-          </p:txBody>
-        </p:sp>
-        <p:sp>
-          <p:nvSpPr>
-            <p:cNvPr id="31" name="Rectangle 31"/>
+                <a:t>⑤ 原理 Foundations</a:t>
+              </a:r>
+            </a:p>
+          </p:txBody>
+        </p:sp>
+        <p:sp>
+          <p:nvSpPr>
+            <p:cNvPr id="86" name="TextBox 40">
+              <a:extLst>
+                <a:ext uri="{FF2B5EF4-FFF2-40B4-BE49-F238E27FC236}">
+                  <a16:creationId xmlns:a16="http://schemas.microsoft.com/office/drawing/2014/main" id="{38D312D9-1A5D-3C21-2D74-B65E30BAA829}"/>
+                </a:ext>
+              </a:extLst>
+            </p:cNvPr>
+            <p:cNvSpPr txBox="1"/>
+            <p:nvPr/>
+          </p:nvSpPr>
+          <p:spPr>
+            <a:xfrm>
+              <a:off x="5938838" y="4997291"/>
+              <a:ext cx="1365928" cy="161925"/>
+            </a:xfrm>
+            <a:prstGeom prst="rect">
+              <a:avLst/>
+            </a:prstGeom>
+            <a:noFill/>
+            <a:ln>
+              <a:noFill/>
+            </a:ln>
+          </p:spPr>
+          <p:txBody>
+            <a:bodyPr wrap="none" lIns="0" tIns="0" rIns="0" bIns="0" anchor="t" anchorCtr="0">
+              <a:spAutoFit/>
+            </a:bodyPr>
+            <a:lstStyle/>
+            <a:p>
+              <a:pPr algn="l"/>
+              <a:r>
+                <a:rPr lang="zh-CN" sz="820" dirty="0">
+                  <a:solidFill>
+                    <a:srgbClr val="555555"/>
+                  </a:solidFill>
+                  <a:latin typeface="Arial"/>
+                  <a:ea typeface="Microsoft YaHei"/>
+                  <a:cs typeface="Arial"/>
+                </a:rPr>
+                <a:t>懂 Token/上下文/模型极限</a:t>
+              </a:r>
+            </a:p>
+          </p:txBody>
+        </p:sp>
+        <p:sp>
+          <p:nvSpPr>
+            <p:cNvPr id="87" name="TextBox 41">
+              <a:extLst>
+                <a:ext uri="{FF2B5EF4-FFF2-40B4-BE49-F238E27FC236}">
+                  <a16:creationId xmlns:a16="http://schemas.microsoft.com/office/drawing/2014/main" id="{931D683B-F4AE-D426-9F2E-F1374C59F696}"/>
+                </a:ext>
+              </a:extLst>
+            </p:cNvPr>
+            <p:cNvSpPr txBox="1"/>
+            <p:nvPr/>
+          </p:nvSpPr>
+          <p:spPr>
+            <a:xfrm>
+              <a:off x="5499296" y="5378291"/>
+              <a:ext cx="1764909" cy="161925"/>
+            </a:xfrm>
+            <a:prstGeom prst="rect">
+              <a:avLst/>
+            </a:prstGeom>
+            <a:noFill/>
+            <a:ln>
+              <a:noFill/>
+            </a:ln>
+          </p:spPr>
+          <p:txBody>
+            <a:bodyPr wrap="none" lIns="0" tIns="0" rIns="0" bIns="0" anchor="t" anchorCtr="0">
+              <a:spAutoFit/>
+            </a:bodyPr>
+            <a:lstStyle/>
+            <a:p>
+              <a:pPr algn="ctr"/>
+              <a:r>
+                <a:rPr lang="zh-CN" sz="820" dirty="0">
+                  <a:solidFill>
+                    <a:srgbClr val="999999"/>
+                  </a:solidFill>
+                  <a:latin typeface="Arial"/>
+                  <a:ea typeface="Microsoft YaHei"/>
+                  <a:cs typeface="Arial"/>
+                </a:rPr>
+                <a:t>＝ 下一页(P09)五个技能逐个展开</a:t>
+              </a:r>
+            </a:p>
+          </p:txBody>
+        </p:sp>
+        <p:sp>
+          <p:nvSpPr>
+            <p:cNvPr id="88" name="Rectangle 42">
+              <a:extLst>
+                <a:ext uri="{FF2B5EF4-FFF2-40B4-BE49-F238E27FC236}">
+                  <a16:creationId xmlns:a16="http://schemas.microsoft.com/office/drawing/2014/main" id="{862CA28F-BD0C-B1AB-6AFF-B353524EFFFC}"/>
+                </a:ext>
+              </a:extLst>
+            </p:cNvPr>
             <p:cNvSpPr/>
             <p:nvPr/>
           </p:nvSpPr>
           <p:spPr>
             <a:xfrm>
-              <a:off x="8763000" y="2381250"/>
-              <a:ext cx="2381250" cy="3143250"/>
+              <a:off x="8953500" y="2400300"/>
+              <a:ext cx="2190750" cy="3143250"/>
             </a:xfrm>
             <a:prstGeom prst="roundRect">
               <a:avLst>
-                <a:gd name="adj" fmla="val 1200"/>
+                <a:gd name="adj" fmla="val 1304"/>
               </a:avLst>
             </a:prstGeom>
             <a:solidFill>
@@ -31482,14 +33486,20 @@
         </p:sp>
         <p:sp>
           <p:nvSpPr>
-            <p:cNvPr id="32" name="Rectangle 32"/>
+            <p:cNvPr id="89" name="Rectangle 43">
+              <a:extLst>
+                <a:ext uri="{FF2B5EF4-FFF2-40B4-BE49-F238E27FC236}">
+                  <a16:creationId xmlns:a16="http://schemas.microsoft.com/office/drawing/2014/main" id="{3B84D5F6-30BB-132C-76E3-B7435ABF4E8A}"/>
+                </a:ext>
+              </a:extLst>
+            </p:cNvPr>
             <p:cNvSpPr/>
             <p:nvPr/>
           </p:nvSpPr>
           <p:spPr>
             <a:xfrm>
-              <a:off x="8763000" y="2381250"/>
-              <a:ext cx="2381250" cy="57150"/>
+              <a:off x="8953500" y="2400300"/>
+              <a:ext cx="2190750" cy="57150"/>
             </a:xfrm>
             <a:prstGeom prst="rect">
               <a:avLst/>
@@ -31504,14 +33514,20 @@
         </p:sp>
         <p:sp>
           <p:nvSpPr>
-            <p:cNvPr id="33" name="TextBox 33"/>
-            <p:cNvSpPr txBox="1"/>
-            <p:nvPr/>
-          </p:nvSpPr>
-          <p:spPr>
-            <a:xfrm>
-              <a:off x="9344928" y="2610802"/>
-              <a:ext cx="1217395" cy="205359"/>
+            <p:cNvPr id="90" name="TextBox 44">
+              <a:extLst>
+                <a:ext uri="{FF2B5EF4-FFF2-40B4-BE49-F238E27FC236}">
+                  <a16:creationId xmlns:a16="http://schemas.microsoft.com/office/drawing/2014/main" id="{EC87D227-BAA1-2275-810D-F8D9C70E5F57}"/>
+                </a:ext>
+              </a:extLst>
+            </p:cNvPr>
+            <p:cNvSpPr txBox="1"/>
+            <p:nvPr/>
+          </p:nvSpPr>
+          <p:spPr>
+            <a:xfrm>
+              <a:off x="9509615" y="2580799"/>
+              <a:ext cx="1078520" cy="190690"/>
             </a:xfrm>
             <a:prstGeom prst="rect">
               <a:avLst/>
@@ -31529,29 +33545,35 @@
             <a:p>
               <a:pPr algn="ctr"/>
               <a:r>
-                <a:rPr lang="en-US" sz="1050" b="1" dirty="0">
+                <a:rPr lang="zh-CN" sz="980" b="1" dirty="0">
                   <a:solidFill>
                     <a:srgbClr val="1A1A1A"/>
                   </a:solidFill>
                   <a:latin typeface="Arial"/>
-                  <a:ea typeface="Arial"/>
-                  <a:cs typeface="Arial"/>
-                </a:rPr>
-                <a:t>Shaping the build</a:t>
-              </a:r>
-            </a:p>
-          </p:txBody>
-        </p:sp>
-        <p:sp>
-          <p:nvSpPr>
-            <p:cNvPr id="34" name="TextBox 34"/>
-            <p:cNvSpPr txBox="1"/>
-            <p:nvPr/>
-          </p:nvSpPr>
-          <p:spPr>
-            <a:xfrm>
-              <a:off x="9464230" y="2817495"/>
-              <a:ext cx="978789" cy="176212"/>
+                  <a:ea typeface="Microsoft YaHei"/>
+                  <a:cs typeface="Arial"/>
+                </a:rPr>
+                <a:t>③ 进阶 · 设计思维</a:t>
+              </a:r>
+            </a:p>
+          </p:txBody>
+        </p:sp>
+        <p:sp>
+          <p:nvSpPr>
+            <p:cNvPr id="91" name="TextBox 45">
+              <a:extLst>
+                <a:ext uri="{FF2B5EF4-FFF2-40B4-BE49-F238E27FC236}">
+                  <a16:creationId xmlns:a16="http://schemas.microsoft.com/office/drawing/2014/main" id="{8592D38F-F369-B049-7C01-79D42A1320AA}"/>
+                </a:ext>
+              </a:extLst>
+            </p:cNvPr>
+            <p:cNvSpPr txBox="1"/>
+            <p:nvPr/>
+          </p:nvSpPr>
+          <p:spPr>
+            <a:xfrm>
+              <a:off x="9696793" y="2954893"/>
+              <a:ext cx="704164" cy="169069"/>
             </a:xfrm>
             <a:prstGeom prst="rect">
               <a:avLst/>
@@ -31569,7 +33591,7 @@
             <a:p>
               <a:pPr algn="ctr"/>
               <a:r>
-                <a:rPr lang="zh-CN" sz="900" dirty="0">
+                <a:rPr lang="zh-CN" sz="860" dirty="0">
                   <a:solidFill>
                     <a:srgbClr val="555555"/>
                   </a:solidFill>
@@ -31577,21 +33599,55 @@
                   <a:ea typeface="Microsoft YaHei"/>
                   <a:cs typeface="Arial"/>
                 </a:rPr>
-                <a:t>（架构设计思维）</a:t>
-              </a:r>
-            </a:p>
-          </p:txBody>
-        </p:sp>
-        <p:sp>
-          <p:nvSpPr>
-            <p:cNvPr id="35" name="TextBox 35"/>
-            <p:cNvSpPr txBox="1"/>
-            <p:nvPr/>
-          </p:nvSpPr>
-          <p:spPr>
-            <a:xfrm>
-              <a:off x="9585388" y="3236595"/>
-              <a:ext cx="736473" cy="176212"/>
+                <a:t>把大问题切小</a:t>
+              </a:r>
+            </a:p>
+          </p:txBody>
+        </p:sp>
+        <p:sp>
+          <p:nvSpPr>
+            <p:cNvPr id="92" name="Rectangle 46">
+              <a:extLst>
+                <a:ext uri="{FF2B5EF4-FFF2-40B4-BE49-F238E27FC236}">
+                  <a16:creationId xmlns:a16="http://schemas.microsoft.com/office/drawing/2014/main" id="{2B6B27F7-4EF1-3AFE-AA4E-60A0AD712979}"/>
+                </a:ext>
+              </a:extLst>
+            </p:cNvPr>
+            <p:cNvSpPr/>
+            <p:nvPr/>
+          </p:nvSpPr>
+          <p:spPr>
+            <a:xfrm>
+              <a:off x="9144000" y="2990850"/>
+              <a:ext cx="66675" cy="66675"/>
+            </a:xfrm>
+            <a:prstGeom prst="rect">
+              <a:avLst/>
+            </a:prstGeom>
+            <a:solidFill>
+              <a:srgbClr val="E30613"/>
+            </a:solidFill>
+            <a:ln>
+              <a:noFill/>
+            </a:ln>
+          </p:spPr>
+        </p:sp>
+        <p:sp>
+          <p:nvSpPr>
+            <p:cNvPr id="93" name="TextBox 47">
+              <a:extLst>
+                <a:ext uri="{FF2B5EF4-FFF2-40B4-BE49-F238E27FC236}">
+                  <a16:creationId xmlns:a16="http://schemas.microsoft.com/office/drawing/2014/main" id="{3D3D5334-08E4-74FA-840D-3884A8D7F785}"/>
+                </a:ext>
+              </a:extLst>
+            </p:cNvPr>
+            <p:cNvSpPr txBox="1"/>
+            <p:nvPr/>
+          </p:nvSpPr>
+          <p:spPr>
+            <a:xfrm>
+              <a:off x="9696793" y="3259693"/>
+              <a:ext cx="704164" cy="169069"/>
             </a:xfrm>
             <a:prstGeom prst="rect">
               <a:avLst/>
@@ -31609,7 +33665,7 @@
             <a:p>
               <a:pPr algn="ctr"/>
               <a:r>
-                <a:rPr lang="zh-CN" sz="900" dirty="0">
+                <a:rPr lang="zh-CN" sz="860" dirty="0">
                   <a:solidFill>
                     <a:srgbClr val="555555"/>
                   </a:solidFill>
@@ -31617,21 +33673,55 @@
                   <a:ea typeface="Microsoft YaHei"/>
                   <a:cs typeface="Arial"/>
                 </a:rPr>
-                <a:t>把大问题切分</a:t>
-              </a:r>
-            </a:p>
-          </p:txBody>
-        </p:sp>
-        <p:sp>
-          <p:nvSpPr>
-            <p:cNvPr id="36" name="TextBox 36"/>
-            <p:cNvSpPr txBox="1"/>
-            <p:nvPr/>
-          </p:nvSpPr>
-          <p:spPr>
-            <a:xfrm>
-              <a:off x="9524810" y="3522345"/>
-              <a:ext cx="857631" cy="176212"/>
+                <a:t>定接口与边界</a:t>
+              </a:r>
+            </a:p>
+          </p:txBody>
+        </p:sp>
+        <p:sp>
+          <p:nvSpPr>
+            <p:cNvPr id="94" name="Rectangle 48">
+              <a:extLst>
+                <a:ext uri="{FF2B5EF4-FFF2-40B4-BE49-F238E27FC236}">
+                  <a16:creationId xmlns:a16="http://schemas.microsoft.com/office/drawing/2014/main" id="{BBBE7F62-B168-0EA4-CA7A-772B35BE72D4}"/>
+                </a:ext>
+              </a:extLst>
+            </p:cNvPr>
+            <p:cNvSpPr/>
+            <p:nvPr/>
+          </p:nvSpPr>
+          <p:spPr>
+            <a:xfrm>
+              <a:off x="9144000" y="3295650"/>
+              <a:ext cx="66675" cy="66675"/>
+            </a:xfrm>
+            <a:prstGeom prst="rect">
+              <a:avLst/>
+            </a:prstGeom>
+            <a:solidFill>
+              <a:srgbClr val="E30613"/>
+            </a:solidFill>
+            <a:ln>
+              <a:noFill/>
+            </a:ln>
+          </p:spPr>
+        </p:sp>
+        <p:sp>
+          <p:nvSpPr>
+            <p:cNvPr id="95" name="TextBox 49">
+              <a:extLst>
+                <a:ext uri="{FF2B5EF4-FFF2-40B4-BE49-F238E27FC236}">
+                  <a16:creationId xmlns:a16="http://schemas.microsoft.com/office/drawing/2014/main" id="{D002C47B-B051-CE00-C8F0-5DE28BB1A3BC}"/>
+                </a:ext>
+              </a:extLst>
+            </p:cNvPr>
+            <p:cNvSpPr txBox="1"/>
+            <p:nvPr/>
+          </p:nvSpPr>
+          <p:spPr>
+            <a:xfrm>
+              <a:off x="9581020" y="3564493"/>
+              <a:ext cx="935711" cy="169069"/>
             </a:xfrm>
             <a:prstGeom prst="rect">
               <a:avLst/>
@@ -31649,7 +33739,7 @@
             <a:p>
               <a:pPr algn="ctr"/>
               <a:r>
-                <a:rPr lang="zh-CN" sz="900" dirty="0">
+                <a:rPr lang="zh-CN" sz="860" dirty="0">
                   <a:solidFill>
                     <a:srgbClr val="555555"/>
                   </a:solidFill>
@@ -31657,21 +33747,55 @@
                   <a:ea typeface="Microsoft YaHei"/>
                   <a:cs typeface="Arial"/>
                 </a:rPr>
-                <a:t>定义接口与约束</a:t>
-              </a:r>
-            </a:p>
-          </p:txBody>
-        </p:sp>
-        <p:sp>
-          <p:nvSpPr>
-            <p:cNvPr id="37" name="TextBox 37"/>
-            <p:cNvSpPr txBox="1"/>
-            <p:nvPr/>
-          </p:nvSpPr>
-          <p:spPr>
-            <a:xfrm>
-              <a:off x="9394565" y="3808095"/>
-              <a:ext cx="1118121" cy="176212"/>
+                <a:t>容错：失败要兜底</a:t>
+              </a:r>
+            </a:p>
+          </p:txBody>
+        </p:sp>
+        <p:sp>
+          <p:nvSpPr>
+            <p:cNvPr id="96" name="Rectangle 50">
+              <a:extLst>
+                <a:ext uri="{FF2B5EF4-FFF2-40B4-BE49-F238E27FC236}">
+                  <a16:creationId xmlns:a16="http://schemas.microsoft.com/office/drawing/2014/main" id="{AD9E974D-8C1C-01E2-3F57-7B69D0E6BD37}"/>
+                </a:ext>
+              </a:extLst>
+            </p:cNvPr>
+            <p:cNvSpPr/>
+            <p:nvPr/>
+          </p:nvSpPr>
+          <p:spPr>
+            <a:xfrm>
+              <a:off x="9144000" y="3600450"/>
+              <a:ext cx="66675" cy="66675"/>
+            </a:xfrm>
+            <a:prstGeom prst="rect">
+              <a:avLst/>
+            </a:prstGeom>
+            <a:solidFill>
+              <a:srgbClr val="E30613"/>
+            </a:solidFill>
+            <a:ln>
+              <a:noFill/>
+            </a:ln>
+          </p:spPr>
+        </p:sp>
+        <p:sp>
+          <p:nvSpPr>
+            <p:cNvPr id="97" name="TextBox 51">
+              <a:extLst>
+                <a:ext uri="{FF2B5EF4-FFF2-40B4-BE49-F238E27FC236}">
+                  <a16:creationId xmlns:a16="http://schemas.microsoft.com/office/drawing/2014/main" id="{DB835AB4-C991-AF06-8246-838A42F04BA5}"/>
+                </a:ext>
+              </a:extLst>
+            </p:cNvPr>
+            <p:cNvSpPr txBox="1"/>
+            <p:nvPr/>
+          </p:nvSpPr>
+          <p:spPr>
+            <a:xfrm>
+              <a:off x="9638906" y="3869293"/>
+              <a:ext cx="819937" cy="169069"/>
             </a:xfrm>
             <a:prstGeom prst="rect">
               <a:avLst/>
@@ -31689,7 +33813,7 @@
             <a:p>
               <a:pPr algn="ctr"/>
               <a:r>
-                <a:rPr lang="zh-CN" sz="900" dirty="0">
+                <a:rPr lang="zh-CN" sz="860" dirty="0">
                   <a:solidFill>
                     <a:srgbClr val="555555"/>
                   </a:solidFill>
@@ -31697,105 +33821,227 @@
                   <a:ea typeface="Microsoft YaHei"/>
                   <a:cs typeface="Arial"/>
                 </a:rPr>
-                <a:t>权衡取舍 · 设计权衡</a:t>
-              </a:r>
-            </a:p>
-          </p:txBody>
-        </p:sp>
-        <p:sp>
-          <p:nvSpPr>
-            <p:cNvPr id="38" name="TextBox 38"/>
-            <p:cNvSpPr txBox="1"/>
-            <p:nvPr/>
-          </p:nvSpPr>
-          <p:spPr>
-            <a:xfrm>
-              <a:off x="9543656" y="4421743"/>
-              <a:ext cx="819937" cy="169069"/>
-            </a:xfrm>
-            <a:prstGeom prst="rect">
-              <a:avLst/>
-            </a:prstGeom>
-            <a:noFill/>
-            <a:ln>
-              <a:noFill/>
-            </a:ln>
-          </p:spPr>
-          <p:txBody>
-            <a:bodyPr wrap="none" lIns="0" tIns="0" rIns="0" bIns="0" anchor="t" anchorCtr="0">
-              <a:spAutoFit/>
-            </a:bodyPr>
-            <a:lstStyle/>
-            <a:p>
-              <a:pPr algn="ctr"/>
-              <a:r>
-                <a:rPr lang="zh-CN" sz="860" b="1" dirty="0">
-                  <a:solidFill>
-                    <a:srgbClr val="E30613"/>
-                  </a:solidFill>
-                  <a:latin typeface="Arial"/>
-                  <a:ea typeface="Microsoft YaHei"/>
-                  <a:cs typeface="Arial"/>
-                </a:rPr>
-                <a:t>决定「做什么、</a:t>
-              </a:r>
-            </a:p>
-          </p:txBody>
-        </p:sp>
-        <p:sp>
-          <p:nvSpPr>
-            <p:cNvPr id="39" name="TextBox 39"/>
-            <p:cNvSpPr txBox="1"/>
-            <p:nvPr/>
-          </p:nvSpPr>
-          <p:spPr>
-            <a:xfrm>
-              <a:off x="9659430" y="4631293"/>
-              <a:ext cx="588391" cy="169069"/>
-            </a:xfrm>
-            <a:prstGeom prst="rect">
-              <a:avLst/>
-            </a:prstGeom>
-            <a:noFill/>
-            <a:ln>
-              <a:noFill/>
-            </a:ln>
-          </p:spPr>
-          <p:txBody>
-            <a:bodyPr wrap="none" lIns="0" tIns="0" rIns="0" bIns="0" anchor="t" anchorCtr="0">
-              <a:spAutoFit/>
-            </a:bodyPr>
-            <a:lstStyle/>
-            <a:p>
-              <a:pPr algn="ctr"/>
-              <a:r>
-                <a:rPr lang="zh-CN" sz="860" b="1" dirty="0">
-                  <a:solidFill>
-                    <a:srgbClr val="E30613"/>
-                  </a:solidFill>
-                  <a:latin typeface="Arial"/>
-                  <a:ea typeface="Microsoft YaHei"/>
-                  <a:cs typeface="Arial"/>
-                </a:rPr>
-                <a:t>不做什么」</a:t>
-              </a:r>
-            </a:p>
-          </p:txBody>
-        </p:sp>
-        <p:sp>
-          <p:nvSpPr>
-            <p:cNvPr id="40" name="Rectangle 40"/>
+                <a:t>成本与评估意识</a:t>
+              </a:r>
+            </a:p>
+          </p:txBody>
+        </p:sp>
+        <p:sp>
+          <p:nvSpPr>
+            <p:cNvPr id="98" name="Rectangle 52">
+              <a:extLst>
+                <a:ext uri="{FF2B5EF4-FFF2-40B4-BE49-F238E27FC236}">
+                  <a16:creationId xmlns:a16="http://schemas.microsoft.com/office/drawing/2014/main" id="{CE6AFD58-9B7F-7022-1FEA-58EF5355BD86}"/>
+                </a:ext>
+              </a:extLst>
+            </p:cNvPr>
             <p:cNvSpPr/>
             <p:nvPr/>
           </p:nvSpPr>
           <p:spPr>
             <a:xfrm>
-              <a:off x="1047750" y="5715000"/>
-              <a:ext cx="10096500" cy="457200"/>
+              <a:off x="9144000" y="3905250"/>
+              <a:ext cx="66675" cy="66675"/>
+            </a:xfrm>
+            <a:prstGeom prst="rect">
+              <a:avLst/>
+            </a:prstGeom>
+            <a:solidFill>
+              <a:srgbClr val="E30613"/>
+            </a:solidFill>
+            <a:ln>
+              <a:noFill/>
+            </a:ln>
+          </p:spPr>
+        </p:sp>
+        <p:sp>
+          <p:nvSpPr>
+            <p:cNvPr id="99" name="Rectangle 53">
+              <a:extLst>
+                <a:ext uri="{FF2B5EF4-FFF2-40B4-BE49-F238E27FC236}">
+                  <a16:creationId xmlns:a16="http://schemas.microsoft.com/office/drawing/2014/main" id="{856FFF00-03AA-7792-72D6-E43B7A270733}"/>
+                </a:ext>
+              </a:extLst>
+            </p:cNvPr>
+            <p:cNvSpPr/>
+            <p:nvPr/>
+          </p:nvSpPr>
+          <p:spPr>
+            <a:xfrm>
+              <a:off x="9105900" y="4572000"/>
+              <a:ext cx="1885950" cy="742950"/>
             </a:xfrm>
             <a:prstGeom prst="roundRect">
               <a:avLst>
-                <a:gd name="adj" fmla="val 6250"/>
+                <a:gd name="adj" fmla="val 3846"/>
+              </a:avLst>
+            </a:prstGeom>
+            <a:solidFill>
+              <a:srgbClr val="F5F5F5"/>
+            </a:solidFill>
+            <a:ln>
+              <a:noFill/>
+            </a:ln>
+          </p:spPr>
+        </p:sp>
+        <p:sp>
+          <p:nvSpPr>
+            <p:cNvPr id="100" name="TextBox 54">
+              <a:extLst>
+                <a:ext uri="{FF2B5EF4-FFF2-40B4-BE49-F238E27FC236}">
+                  <a16:creationId xmlns:a16="http://schemas.microsoft.com/office/drawing/2014/main" id="{7F1ECBCB-6369-1ABF-F75B-0846D506706F}"/>
+                </a:ext>
+              </a:extLst>
+            </p:cNvPr>
+            <p:cNvSpPr txBox="1"/>
+            <p:nvPr/>
+          </p:nvSpPr>
+          <p:spPr>
+            <a:xfrm>
+              <a:off x="9812566" y="4726543"/>
+              <a:ext cx="472618" cy="169069"/>
+            </a:xfrm>
+            <a:prstGeom prst="rect">
+              <a:avLst/>
+            </a:prstGeom>
+            <a:noFill/>
+            <a:ln>
+              <a:noFill/>
+            </a:ln>
+          </p:spPr>
+          <p:txBody>
+            <a:bodyPr wrap="none" lIns="0" tIns="0" rIns="0" bIns="0" anchor="t" anchorCtr="0">
+              <a:spAutoFit/>
+            </a:bodyPr>
+            <a:lstStyle/>
+            <a:p>
+              <a:pPr algn="ctr"/>
+              <a:r>
+                <a:rPr lang="zh-CN" sz="860" b="1" dirty="0">
+                  <a:solidFill>
+                    <a:srgbClr val="1A1A1A"/>
+                  </a:solidFill>
+                  <a:latin typeface="Arial"/>
+                  <a:ea typeface="Microsoft YaHei"/>
+                  <a:cs typeface="Arial"/>
+                </a:rPr>
+                <a:t>别停在这</a:t>
+              </a:r>
+            </a:p>
+          </p:txBody>
+        </p:sp>
+        <p:sp>
+          <p:nvSpPr>
+            <p:cNvPr id="101" name="TextBox 55">
+              <a:extLst>
+                <a:ext uri="{FF2B5EF4-FFF2-40B4-BE49-F238E27FC236}">
+                  <a16:creationId xmlns:a16="http://schemas.microsoft.com/office/drawing/2014/main" id="{FA6741FD-177F-B014-3BFA-5C92EB210EF8}"/>
+                </a:ext>
+              </a:extLst>
+            </p:cNvPr>
+            <p:cNvSpPr txBox="1"/>
+            <p:nvPr/>
+          </p:nvSpPr>
+          <p:spPr>
+            <a:xfrm>
+              <a:off x="9767100" y="4940141"/>
+              <a:ext cx="563550" cy="161925"/>
+            </a:xfrm>
+            <a:prstGeom prst="rect">
+              <a:avLst/>
+            </a:prstGeom>
+            <a:noFill/>
+            <a:ln>
+              <a:noFill/>
+            </a:ln>
+          </p:spPr>
+          <p:txBody>
+            <a:bodyPr wrap="none" lIns="0" tIns="0" rIns="0" bIns="0" anchor="t" anchorCtr="0">
+              <a:spAutoFit/>
+            </a:bodyPr>
+            <a:lstStyle/>
+            <a:p>
+              <a:pPr algn="ctr"/>
+              <a:r>
+                <a:rPr lang="zh-CN" sz="820" dirty="0">
+                  <a:solidFill>
+                    <a:srgbClr val="555555"/>
+                  </a:solidFill>
+                  <a:latin typeface="Arial"/>
+                  <a:ea typeface="Microsoft YaHei"/>
+                  <a:cs typeface="Arial"/>
+                </a:rPr>
+                <a:t>角色(P10)</a:t>
+              </a:r>
+            </a:p>
+          </p:txBody>
+        </p:sp>
+        <p:sp>
+          <p:nvSpPr>
+            <p:cNvPr id="102" name="TextBox 56">
+              <a:extLst>
+                <a:ext uri="{FF2B5EF4-FFF2-40B4-BE49-F238E27FC236}">
+                  <a16:creationId xmlns:a16="http://schemas.microsoft.com/office/drawing/2014/main" id="{0C006F0A-1CD8-298D-8440-DD059D987306}"/>
+                </a:ext>
+              </a:extLst>
+            </p:cNvPr>
+            <p:cNvSpPr txBox="1"/>
+            <p:nvPr/>
+          </p:nvSpPr>
+          <p:spPr>
+            <a:xfrm>
+              <a:off x="9708782" y="5130641"/>
+              <a:ext cx="680187" cy="161925"/>
+            </a:xfrm>
+            <a:prstGeom prst="rect">
+              <a:avLst/>
+            </a:prstGeom>
+            <a:noFill/>
+            <a:ln>
+              <a:noFill/>
+            </a:ln>
+          </p:spPr>
+          <p:txBody>
+            <a:bodyPr wrap="none" lIns="0" tIns="0" rIns="0" bIns="0" anchor="t" anchorCtr="0">
+              <a:spAutoFit/>
+            </a:bodyPr>
+            <a:lstStyle/>
+            <a:p>
+              <a:pPr algn="ctr"/>
+              <a:r>
+                <a:rPr lang="zh-CN" sz="820" dirty="0">
+                  <a:solidFill>
+                    <a:srgbClr val="555555"/>
+                  </a:solidFill>
+                  <a:latin typeface="Arial"/>
+                  <a:ea typeface="Microsoft YaHei"/>
+                  <a:cs typeface="Arial"/>
+                </a:rPr>
+                <a:t>演进链(P06)</a:t>
+              </a:r>
+            </a:p>
+          </p:txBody>
+        </p:sp>
+        <p:sp>
+          <p:nvSpPr>
+            <p:cNvPr id="103" name="Rectangle 57">
+              <a:extLst>
+                <a:ext uri="{FF2B5EF4-FFF2-40B4-BE49-F238E27FC236}">
+                  <a16:creationId xmlns:a16="http://schemas.microsoft.com/office/drawing/2014/main" id="{AF00A175-6AAF-2DD3-0EE4-B8843C2CE601}"/>
+                </a:ext>
+              </a:extLst>
+            </p:cNvPr>
+            <p:cNvSpPr/>
+            <p:nvPr/>
+          </p:nvSpPr>
+          <p:spPr>
+            <a:xfrm>
+              <a:off x="1047750" y="5715000"/>
+              <a:ext cx="10096500" cy="438150"/>
+            </a:xfrm>
+            <a:prstGeom prst="roundRect">
+              <a:avLst>
+                <a:gd name="adj" fmla="val 6522"/>
               </a:avLst>
             </a:prstGeom>
             <a:solidFill>
@@ -31810,14 +34056,20 @@
         </p:sp>
         <p:sp>
           <p:nvSpPr>
-            <p:cNvPr id="41" name="TextBox 41"/>
-            <p:cNvSpPr txBox="1"/>
-            <p:nvPr/>
-          </p:nvSpPr>
-          <p:spPr>
-            <a:xfrm>
-              <a:off x="3537225" y="5843826"/>
-              <a:ext cx="5117550" cy="198025"/>
+            <p:cNvPr id="104" name="TextBox 58">
+              <a:extLst>
+                <a:ext uri="{FF2B5EF4-FFF2-40B4-BE49-F238E27FC236}">
+                  <a16:creationId xmlns:a16="http://schemas.microsoft.com/office/drawing/2014/main" id="{184256B7-5A21-CD9B-2243-54D36DC55592}"/>
+                </a:ext>
+              </a:extLst>
+            </p:cNvPr>
+            <p:cNvSpPr txBox="1"/>
+            <p:nvPr/>
+          </p:nvSpPr>
+          <p:spPr>
+            <a:xfrm>
+              <a:off x="3754939" y="5876449"/>
+              <a:ext cx="4682122" cy="190690"/>
             </a:xfrm>
             <a:prstGeom prst="rect">
               <a:avLst/>
@@ -31835,7 +34087,7 @@
             <a:p>
               <a:pPr algn="ctr"/>
               <a:r>
-                <a:rPr lang="zh-CN" sz="1010" b="1" dirty="0">
+                <a:rPr lang="zh-CN" sz="980" b="1" dirty="0">
                   <a:solidFill>
                     <a:srgbClr val="1A1A1A"/>
                   </a:solidFill>
@@ -31843,7 +34095,7 @@
                   <a:ea typeface="Microsoft YaHei"/>
                   <a:cs typeface="Arial"/>
                 </a:rPr>
-                <a:t>你的 CS 底座已具备 → 本讲主线：学会 Using coding agents（五大技能逐层展开）</a:t>
+                <a:t>你现在在哪？有地基 → 直奔主线练五技能；想再进一步 → 补系统设计与工程范式</a:t>
               </a:r>
             </a:p>
           </p:txBody>
@@ -31851,7 +34103,13 @@
       </p:grpSp>
       <p:grpSp>
         <p:nvGrpSpPr>
-          <p:cNvPr id="46" name="Group 46"/>
+          <p:cNvPr id="105" name="Group 63">
+            <a:extLst>
+              <a:ext uri="{FF2B5EF4-FFF2-40B4-BE49-F238E27FC236}">
+                <a16:creationId xmlns:a16="http://schemas.microsoft.com/office/drawing/2014/main" id="{265AFF36-C845-3231-14BE-5187D2F592FA}"/>
+              </a:ext>
+            </a:extLst>
+          </p:cNvPr>
           <p:cNvGrpSpPr/>
           <p:nvPr/>
         </p:nvGrpSpPr>
@@ -31865,7 +34123,13 @@
         </p:grpSpPr>
         <p:sp>
           <p:nvSpPr>
-            <p:cNvPr id="43" name="TextBox 43"/>
+            <p:cNvPr id="106" name="TextBox 60">
+              <a:extLst>
+                <a:ext uri="{FF2B5EF4-FFF2-40B4-BE49-F238E27FC236}">
+                  <a16:creationId xmlns:a16="http://schemas.microsoft.com/office/drawing/2014/main" id="{784AE040-D81B-8C9F-54C5-2C3BF3D317F6}"/>
+                </a:ext>
+              </a:extLst>
+            </p:cNvPr>
             <p:cNvSpPr txBox="1"/>
             <p:nvPr/>
           </p:nvSpPr>
@@ -31905,7 +34169,13 @@
         </p:sp>
         <p:sp>
           <p:nvSpPr>
-            <p:cNvPr id="44" name="Rectangle 44"/>
+            <p:cNvPr id="107" name="Rectangle 61">
+              <a:extLst>
+                <a:ext uri="{FF2B5EF4-FFF2-40B4-BE49-F238E27FC236}">
+                  <a16:creationId xmlns:a16="http://schemas.microsoft.com/office/drawing/2014/main" id="{55AA7635-2A68-53A5-513A-C5B082CF9AC2}"/>
+                </a:ext>
+              </a:extLst>
+            </p:cNvPr>
             <p:cNvSpPr/>
             <p:nvPr/>
           </p:nvSpPr>
@@ -31927,7 +34197,13 @@
         </p:sp>
         <p:sp>
           <p:nvSpPr>
-            <p:cNvPr id="45" name="TextBox 45"/>
+            <p:cNvPr id="108" name="TextBox 62">
+              <a:extLst>
+                <a:ext uri="{FF2B5EF4-FFF2-40B4-BE49-F238E27FC236}">
+                  <a16:creationId xmlns:a16="http://schemas.microsoft.com/office/drawing/2014/main" id="{EE8D111A-E2B6-553D-188B-45C3996194F0}"/>
+                </a:ext>
+              </a:extLst>
+            </p:cNvPr>
             <p:cNvSpPr txBox="1"/>
             <p:nvPr/>
           </p:nvSpPr>

--- a/Agentic时代_从AI使用者到AI架构师.pptx
+++ b/Agentic时代_从AI使用者到AI架构师.pptx
@@ -184,7 +184,7 @@
           <a:p>
             <a:fld id="{5BCAD085-E8A6-8845-BD4E-CB4CCA059FC4}" type="datetimeFigureOut">
               <a:rPr lang="en-US" smtClean="0"/>
-              <a:t>9/8/2026</a:t>
+              <a:t>9/9/2026</a:t>
             </a:fld>
             <a:endParaRPr lang="en-US"/>
           </a:p>
@@ -297,7 +297,7 @@
           <a:p>
             <a:fld id="{5BCAD085-E8A6-8845-BD4E-CB4CCA059FC4}" type="datetimeFigureOut">
               <a:rPr lang="en-US" smtClean="0"/>
-              <a:t>9/8/2026</a:t>
+              <a:t>9/9/2026</a:t>
             </a:fld>
             <a:endParaRPr lang="en-US"/>
           </a:p>
